--- a/slides_output/person_follow_ai_review_efficiency.pptx
+++ b/slides_output/person_follow_ai_review_efficiency.pptx
@@ -2,18 +2,18 @@
 <file path=ppt/presentation.xml><?xml version="1.0" encoding="utf-8"?>
 <p:presentation xmlns:p="http://schemas.openxmlformats.org/presentationml/2006/main">
   <p:sldMasterIdLst>
-    <p:sldMasterId xmlns:r="http://schemas.openxmlformats.org/officeDocument/2006/relationships" id="2147483648" r:id="R688c65d7cda14869"/>
+    <p:sldMasterId xmlns:r="http://schemas.openxmlformats.org/officeDocument/2006/relationships" id="2147483648" r:id="R3599be8e0c10483f"/>
   </p:sldMasterIdLst>
   <p:notesMasterIdLst>
-    <p:notesMasterId xmlns:r="http://schemas.openxmlformats.org/officeDocument/2006/relationships" r:id="R66a4b95d110a4838"/>
+    <p:notesMasterId xmlns:r="http://schemas.openxmlformats.org/officeDocument/2006/relationships" r:id="R4f86757fff334295"/>
   </p:notesMasterIdLst>
   <p:sldIdLst>
-    <p:sldId xmlns:r="http://schemas.openxmlformats.org/officeDocument/2006/relationships" id="256" r:id="Rcddb6feb0e034bde"/>
-    <p:sldId xmlns:r="http://schemas.openxmlformats.org/officeDocument/2006/relationships" id="257" r:id="Rda8afd7063dc4dbf"/>
-    <p:sldId xmlns:r="http://schemas.openxmlformats.org/officeDocument/2006/relationships" id="258" r:id="R06de444b6f374240"/>
-    <p:sldId xmlns:r="http://schemas.openxmlformats.org/officeDocument/2006/relationships" id="259" r:id="Rd1033edbb3fa4cdf"/>
-    <p:sldId xmlns:r="http://schemas.openxmlformats.org/officeDocument/2006/relationships" id="260" r:id="Rc6a3cad582d249c2"/>
-    <p:sldId xmlns:r="http://schemas.openxmlformats.org/officeDocument/2006/relationships" id="261" r:id="Rc94bdbe9245544c8"/>
+    <p:sldId xmlns:r="http://schemas.openxmlformats.org/officeDocument/2006/relationships" id="256" r:id="R915a56c2c08641be"/>
+    <p:sldId xmlns:r="http://schemas.openxmlformats.org/officeDocument/2006/relationships" id="257" r:id="R1917dddd7aef4960"/>
+    <p:sldId xmlns:r="http://schemas.openxmlformats.org/officeDocument/2006/relationships" id="258" r:id="R715de9fcf6184ef6"/>
+    <p:sldId xmlns:r="http://schemas.openxmlformats.org/officeDocument/2006/relationships" id="259" r:id="R66c4f561c1854eb2"/>
+    <p:sldId xmlns:r="http://schemas.openxmlformats.org/officeDocument/2006/relationships" id="260" r:id="Ra4babe592c2e481e"/>
+    <p:sldId xmlns:r="http://schemas.openxmlformats.org/officeDocument/2006/relationships" id="261" r:id="R7ebec255fb244c0e"/>
   </p:sldIdLst>
   <p:sldSz cx="18288000" cy="10287000"/>
   <p:notesSz cx="6858000" cy="9144000"/>
@@ -890,7 +890,7 @@
   </p:cSld>
   <p:clrMap bg1="lt1" tx1="dk1" bg2="lt2" tx2="dk2" accent1="accent1" accent2="accent2" accent3="accent3" accent4="accent4" accent5="accent5" accent6="accent6" hlink="hlink" folHlink="folHlink"/>
   <p:sldLayoutIdLst>
-    <p:sldLayoutId xmlns:r="http://schemas.openxmlformats.org/officeDocument/2006/relationships" id="2147483649" r:id="Rc40a21a42a6143a7"/>
+    <p:sldLayoutId xmlns:r="http://schemas.openxmlformats.org/officeDocument/2006/relationships" id="2147483649" r:id="Ra9752d0902ba4414"/>
   </p:sldLayoutIdLst>
   <p:txStyles>
     <p:titleStyle>
@@ -1185,7 +1185,7 @@
           <a:p xmlns:a="http://schemas.openxmlformats.org/drawingml/2006/main">
             <a:r>
               <a:rPr/>
-              <a:t>准备时间对比（分钟）</a:t>
+              <a:t>首轮评审准备时间（分钟）</a:t>
             </a:r>
           </a:p>
         </c:rich>
@@ -1593,7 +1593,7 @@
           <a:p xmlns:a="http://schemas.openxmlformats.org/drawingml/2006/main">
             <a:r>
               <a:rPr/>
-              <a:t>综合提效指数（人工=100）</a:t>
+              <a:t>部门收益指数（人工=100）</a:t>
             </a:r>
           </a:p>
         </c:rich>
@@ -1610,16 +1610,16 @@
           <c:idx val="0"/>
           <c:order val="0"/>
           <c:tx>
-            <c:v>指数</c:v>
+            <c:v>综合指数</c:v>
           </c:tx>
           <c:cat>
             <c:strLit>
               <c:ptCount val="2"/>
               <c:pt idx="0">
-                <c:v>人工</c:v>
+                <c:v>人工流程</c:v>
               </c:pt>
               <c:pt idx="1">
-                <c:v>AI 辅助</c:v>
+                <c:v>AI 辅助流程</c:v>
               </c:pt>
             </c:strLit>
           </c:cat>
@@ -1747,42 +1747,42 @@
           <p:cNvPr id="1" name="">
             <a:extLst xmlns:a="http://schemas.openxmlformats.org/drawingml/2006/main">
               <a:ext uri="{FF2B5EF4-FFF2-40B4-BE49-F238E27FC236}">
-                <a16:creationId xmlns:a16="http://schemas.microsoft.com/office/drawing/2014/main" id="{30154984-A4A2-48A4-BC47-35A87BD00BE7}"/>
-              </a:ext>
-            </a:extLst>
-          </p:cNvPr>
-          <p:cNvSpPr>
-            <a:spLocks xmlns:a="http://schemas.openxmlformats.org/drawingml/2006/main" noGrp="1"/>
-          </p:cNvSpPr>
-          <p:nvPr/>
-        </p:nvSpPr>
-        <p:spPr>
-          <a:xfrm xmlns:a="http://schemas.openxmlformats.org/drawingml/2006/main">
-            <a:off x="876300" y="2705100"/>
-            <a:ext cx="5715000" cy="1695450"/>
-          </a:xfrm>
-          <a:prstGeom xmlns:a="http://schemas.openxmlformats.org/drawingml/2006/main" prst="rect">
-            <a:avLst/>
-          </a:prstGeom>
-        </p:spPr>
-        <p:txBody>
-          <a:bodyPr xmlns:a="http://schemas.openxmlformats.org/drawingml/2006/main" lIns="0" tIns="0" rIns="0" bIns="0"/>
-          <a:lstStyle xmlns:a="http://schemas.openxmlformats.org/drawingml/2006/main"/>
-          <a:p xmlns:a="http://schemas.openxmlformats.org/drawingml/2006/main">
-            <a:pPr>
-              <a:defRPr sz="5550" b="1">
+                <a16:creationId xmlns:a16="http://schemas.microsoft.com/office/drawing/2014/main" id="{76DABD50-4097-48A2-BD0C-0F384E438B8F}"/>
+              </a:ext>
+            </a:extLst>
+          </p:cNvPr>
+          <p:cNvSpPr>
+            <a:spLocks xmlns:a="http://schemas.openxmlformats.org/drawingml/2006/main" noGrp="1"/>
+          </p:cNvSpPr>
+          <p:nvPr/>
+        </p:nvSpPr>
+        <p:spPr>
+          <a:xfrm xmlns:a="http://schemas.openxmlformats.org/drawingml/2006/main">
+            <a:off x="838200" y="2800350"/>
+            <a:ext cx="6096000" cy="1562100"/>
+          </a:xfrm>
+          <a:prstGeom xmlns:a="http://schemas.openxmlformats.org/drawingml/2006/main" prst="rect">
+            <a:avLst/>
+          </a:prstGeom>
+        </p:spPr>
+        <p:txBody>
+          <a:bodyPr xmlns:a="http://schemas.openxmlformats.org/drawingml/2006/main" lIns="0" tIns="0" rIns="0" bIns="0"/>
+          <a:lstStyle xmlns:a="http://schemas.openxmlformats.org/drawingml/2006/main"/>
+          <a:p xmlns:a="http://schemas.openxmlformats.org/drawingml/2006/main">
+            <a:pPr>
+              <a:defRPr sz="5100" b="1">
                 <a:solidFill>
                   <a:srgbClr val="17223B"/>
                 </a:solidFill>
               </a:defRPr>
             </a:pPr>
             <a:r>
-              <a:rPr sz="5550" b="1">
+              <a:rPr sz="5100" b="1">
                 <a:solidFill>
                   <a:srgbClr val="17223B"/>
                 </a:solidFill>
               </a:rPr>
-              <a:t>AI 助力机器人研发</a:t>
+              <a:t>面向研发部门的 AI PR 风险前置方案</a:t>
             </a:r>
           </a:p>
         </p:txBody>
@@ -1792,19 +1792,19 @@
           <p:cNvPr id="2" name="">
             <a:extLst xmlns:a="http://schemas.openxmlformats.org/drawingml/2006/main">
               <a:ext uri="{FF2B5EF4-FFF2-40B4-BE49-F238E27FC236}">
-                <a16:creationId xmlns:a16="http://schemas.microsoft.com/office/drawing/2014/main" id="{7D42B680-DD35-4D5F-A757-3FE5395B526F}"/>
-              </a:ext>
-            </a:extLst>
-          </p:cNvPr>
-          <p:cNvSpPr>
-            <a:spLocks xmlns:a="http://schemas.openxmlformats.org/drawingml/2006/main" noGrp="1"/>
-          </p:cNvSpPr>
-          <p:nvPr/>
-        </p:nvSpPr>
-        <p:spPr>
-          <a:xfrm xmlns:a="http://schemas.openxmlformats.org/drawingml/2006/main">
-            <a:off x="876300" y="4667250"/>
-            <a:ext cx="7200900" cy="933450"/>
+                <a16:creationId xmlns:a16="http://schemas.microsoft.com/office/drawing/2014/main" id="{91DEBB7C-2DBF-413B-99A2-1C201B991497}"/>
+              </a:ext>
+            </a:extLst>
+          </p:cNvPr>
+          <p:cNvSpPr>
+            <a:spLocks xmlns:a="http://schemas.openxmlformats.org/drawingml/2006/main" noGrp="1"/>
+          </p:cNvSpPr>
+          <p:nvPr/>
+        </p:nvSpPr>
+        <p:spPr>
+          <a:xfrm xmlns:a="http://schemas.openxmlformats.org/drawingml/2006/main">
+            <a:off x="838200" y="4629150"/>
+            <a:ext cx="7981950" cy="933450"/>
           </a:xfrm>
           <a:prstGeom xmlns:a="http://schemas.openxmlformats.org/drawingml/2006/main" prst="rect">
             <a:avLst/>
@@ -1827,7 +1827,7 @@
                   <a:srgbClr val="40506A"/>
                 </a:solidFill>
               </a:rPr>
-              <a:t>以 person_follow 的 PR 评审为例，把风险识别、上下文检索和测试建议前置到提交阶段。</a:t>
+              <a:t>以 person_follow 机器人跟随模块为例，把评审准备、风险识别、测试建议和知识沉淀前置到 PR 阶段。</a:t>
             </a:r>
           </a:p>
         </p:txBody>
@@ -1837,23 +1837,23 @@
           <p:cNvPr id="3" name="">
             <a:extLst xmlns:a="http://schemas.openxmlformats.org/drawingml/2006/main">
               <a:ext uri="{FF2B5EF4-FFF2-40B4-BE49-F238E27FC236}">
-                <a16:creationId xmlns:a16="http://schemas.microsoft.com/office/drawing/2014/main" id="{F55168D2-72C7-4660-9136-C5F156B52773}"/>
-              </a:ext>
-            </a:extLst>
-          </p:cNvPr>
-          <p:cNvSpPr>
-            <a:spLocks xmlns:a="http://schemas.openxmlformats.org/drawingml/2006/main" noGrp="1"/>
-          </p:cNvSpPr>
-          <p:nvPr/>
-        </p:nvSpPr>
-        <p:spPr>
-          <a:xfrm xmlns:a="http://schemas.openxmlformats.org/drawingml/2006/main">
-            <a:off x="876300" y="5884545"/>
-            <a:ext cx="4051697" cy="1706880"/>
+                <a16:creationId xmlns:a16="http://schemas.microsoft.com/office/drawing/2014/main" id="{7AE01A45-F892-4699-9B56-DD2AD222ECF8}"/>
+              </a:ext>
+            </a:extLst>
+          </p:cNvPr>
+          <p:cNvSpPr>
+            <a:spLocks xmlns:a="http://schemas.openxmlformats.org/drawingml/2006/main" noGrp="1"/>
+          </p:cNvSpPr>
+          <p:nvPr/>
+        </p:nvSpPr>
+        <p:spPr>
+          <a:xfrm xmlns:a="http://schemas.openxmlformats.org/drawingml/2006/main">
+            <a:off x="838200" y="5814060"/>
+            <a:ext cx="4095750" cy="1672590"/>
           </a:xfrm>
           <a:prstGeom xmlns:a="http://schemas.openxmlformats.org/drawingml/2006/main" prst="roundRect">
             <a:avLst>
-              <a:gd name="adj" fmla="val 6696"/>
+              <a:gd name="adj" fmla="val 6834"/>
             </a:avLst>
           </a:prstGeom>
           <a:solidFill xmlns:a="http://schemas.openxmlformats.org/drawingml/2006/main">
@@ -1872,37 +1872,37 @@
           <p:cNvPr id="4" name="">
             <a:extLst xmlns:a="http://schemas.openxmlformats.org/drawingml/2006/main">
               <a:ext uri="{FF2B5EF4-FFF2-40B4-BE49-F238E27FC236}">
-                <a16:creationId xmlns:a16="http://schemas.microsoft.com/office/drawing/2014/main" id="{3042A3FF-D834-40C7-B227-F37A5700E109}"/>
-              </a:ext>
-            </a:extLst>
-          </p:cNvPr>
-          <p:cNvSpPr>
-            <a:spLocks xmlns:a="http://schemas.openxmlformats.org/drawingml/2006/main" noGrp="1"/>
-          </p:cNvSpPr>
-          <p:nvPr/>
-        </p:nvSpPr>
-        <p:spPr>
-          <a:xfrm xmlns:a="http://schemas.openxmlformats.org/drawingml/2006/main">
-            <a:off x="1143000" y="6115050"/>
-            <a:ext cx="3524250" cy="647700"/>
-          </a:xfrm>
-          <a:prstGeom xmlns:a="http://schemas.openxmlformats.org/drawingml/2006/main" prst="rect">
-            <a:avLst/>
-          </a:prstGeom>
-        </p:spPr>
-        <p:txBody>
-          <a:bodyPr xmlns:a="http://schemas.openxmlformats.org/drawingml/2006/main" lIns="0" tIns="0" rIns="0" bIns="0"/>
-          <a:lstStyle xmlns:a="http://schemas.openxmlformats.org/drawingml/2006/main"/>
-          <a:p xmlns:a="http://schemas.openxmlformats.org/drawingml/2006/main">
-            <a:pPr>
-              <a:defRPr sz="4200" b="1">
+                <a16:creationId xmlns:a16="http://schemas.microsoft.com/office/drawing/2014/main" id="{182A02EB-AEB4-4959-8E96-61C44D554BA6}"/>
+              </a:ext>
+            </a:extLst>
+          </p:cNvPr>
+          <p:cNvSpPr>
+            <a:spLocks xmlns:a="http://schemas.openxmlformats.org/drawingml/2006/main" noGrp="1"/>
+          </p:cNvSpPr>
+          <p:nvPr/>
+        </p:nvSpPr>
+        <p:spPr>
+          <a:xfrm xmlns:a="http://schemas.openxmlformats.org/drawingml/2006/main">
+            <a:off x="1104900" y="6038850"/>
+            <a:ext cx="3562350" cy="628650"/>
+          </a:xfrm>
+          <a:prstGeom xmlns:a="http://schemas.openxmlformats.org/drawingml/2006/main" prst="rect">
+            <a:avLst/>
+          </a:prstGeom>
+        </p:spPr>
+        <p:txBody>
+          <a:bodyPr xmlns:a="http://schemas.openxmlformats.org/drawingml/2006/main" lIns="0" tIns="0" rIns="0" bIns="0"/>
+          <a:lstStyle xmlns:a="http://schemas.openxmlformats.org/drawingml/2006/main"/>
+          <a:p xmlns:a="http://schemas.openxmlformats.org/drawingml/2006/main">
+            <a:pPr>
+              <a:defRPr sz="4050" b="1">
                 <a:solidFill>
                   <a:srgbClr val="16A34A"/>
                 </a:solidFill>
               </a:defRPr>
             </a:pPr>
             <a:r>
-              <a:rPr sz="4200" b="1">
+              <a:rPr sz="4050" b="1">
                 <a:solidFill>
                   <a:srgbClr val="16A34A"/>
                 </a:solidFill>
@@ -1917,42 +1917,42 @@
           <p:cNvPr id="5" name="">
             <a:extLst xmlns:a="http://schemas.openxmlformats.org/drawingml/2006/main">
               <a:ext uri="{FF2B5EF4-FFF2-40B4-BE49-F238E27FC236}">
-                <a16:creationId xmlns:a16="http://schemas.microsoft.com/office/drawing/2014/main" id="{112B6A50-5214-480D-AE83-C2912B5090E2}"/>
-              </a:ext>
-            </a:extLst>
-          </p:cNvPr>
-          <p:cNvSpPr>
-            <a:spLocks xmlns:a="http://schemas.openxmlformats.org/drawingml/2006/main" noGrp="1"/>
-          </p:cNvSpPr>
-          <p:nvPr/>
-        </p:nvSpPr>
-        <p:spPr>
-          <a:xfrm xmlns:a="http://schemas.openxmlformats.org/drawingml/2006/main">
-            <a:off x="1143000" y="6838950"/>
-            <a:ext cx="3524250" cy="266700"/>
-          </a:xfrm>
-          <a:prstGeom xmlns:a="http://schemas.openxmlformats.org/drawingml/2006/main" prst="rect">
-            <a:avLst/>
-          </a:prstGeom>
-        </p:spPr>
-        <p:txBody>
-          <a:bodyPr xmlns:a="http://schemas.openxmlformats.org/drawingml/2006/main" lIns="0" tIns="0" rIns="0" bIns="0"/>
-          <a:lstStyle xmlns:a="http://schemas.openxmlformats.org/drawingml/2006/main"/>
-          <a:p xmlns:a="http://schemas.openxmlformats.org/drawingml/2006/main">
-            <a:pPr>
-              <a:defRPr sz="1725" b="1">
+                <a16:creationId xmlns:a16="http://schemas.microsoft.com/office/drawing/2014/main" id="{B6A2CEB3-DDF7-4C07-9756-C86B00B63460}"/>
+              </a:ext>
+            </a:extLst>
+          </p:cNvPr>
+          <p:cNvSpPr>
+            <a:spLocks xmlns:a="http://schemas.openxmlformats.org/drawingml/2006/main" noGrp="1"/>
+          </p:cNvSpPr>
+          <p:nvPr/>
+        </p:nvSpPr>
+        <p:spPr>
+          <a:xfrm xmlns:a="http://schemas.openxmlformats.org/drawingml/2006/main">
+            <a:off x="1104900" y="6743700"/>
+            <a:ext cx="3562350" cy="266700"/>
+          </a:xfrm>
+          <a:prstGeom xmlns:a="http://schemas.openxmlformats.org/drawingml/2006/main" prst="rect">
+            <a:avLst/>
+          </a:prstGeom>
+        </p:spPr>
+        <p:txBody>
+          <a:bodyPr xmlns:a="http://schemas.openxmlformats.org/drawingml/2006/main" lIns="0" tIns="0" rIns="0" bIns="0"/>
+          <a:lstStyle xmlns:a="http://schemas.openxmlformats.org/drawingml/2006/main"/>
+          <a:p xmlns:a="http://schemas.openxmlformats.org/drawingml/2006/main">
+            <a:pPr>
+              <a:defRPr sz="1650" b="1">
                 <a:solidFill>
                   <a:srgbClr val="1F2937"/>
                 </a:solidFill>
               </a:defRPr>
             </a:pPr>
             <a:r>
-              <a:rPr sz="1725" b="1">
+              <a:rPr sz="1650" b="1">
                 <a:solidFill>
                   <a:srgbClr val="1F2937"/>
                 </a:solidFill>
               </a:rPr>
-              <a:t>评审准备时间</a:t>
+              <a:t>首轮评审准备</a:t>
             </a:r>
           </a:p>
         </p:txBody>
@@ -1962,30 +1962,42 @@
           <p:cNvPr id="6" name="">
             <a:extLst xmlns:a="http://schemas.openxmlformats.org/drawingml/2006/main">
               <a:ext uri="{FF2B5EF4-FFF2-40B4-BE49-F238E27FC236}">
-                <a16:creationId xmlns:a16="http://schemas.microsoft.com/office/drawing/2014/main" id="{90B305E0-8B61-447E-AFE4-21DB8F0B75C5}"/>
-              </a:ext>
-            </a:extLst>
-          </p:cNvPr>
-          <p:cNvSpPr>
-            <a:spLocks xmlns:a="http://schemas.openxmlformats.org/drawingml/2006/main" noGrp="1"/>
-          </p:cNvSpPr>
-          <p:nvPr/>
-        </p:nvSpPr>
-        <p:spPr>
-          <a:xfrm xmlns:a="http://schemas.openxmlformats.org/drawingml/2006/main">
-            <a:off x="1143000" y="7162800"/>
-            <a:ext cx="3524250" cy="209550"/>
-          </a:xfrm>
-          <a:prstGeom xmlns:a="http://schemas.openxmlformats.org/drawingml/2006/main" prst="rect">
-            <a:avLst/>
-          </a:prstGeom>
-        </p:spPr>
-        <p:txBody>
-          <a:bodyPr xmlns:a="http://schemas.openxmlformats.org/drawingml/2006/main" lIns="0" tIns="0" rIns="0" bIns="0"/>
-          <a:lstStyle xmlns:a="http://schemas.openxmlformats.org/drawingml/2006/main"/>
-          <a:p xmlns:a="http://schemas.openxmlformats.org/drawingml/2006/main">
-            <a:r>
-              <a:t/>
+                <a16:creationId xmlns:a16="http://schemas.microsoft.com/office/drawing/2014/main" id="{6F6BF784-93EC-4963-AEF9-83F30EE761ED}"/>
+              </a:ext>
+            </a:extLst>
+          </p:cNvPr>
+          <p:cNvSpPr>
+            <a:spLocks xmlns:a="http://schemas.openxmlformats.org/drawingml/2006/main" noGrp="1"/>
+          </p:cNvSpPr>
+          <p:nvPr/>
+        </p:nvSpPr>
+        <p:spPr>
+          <a:xfrm xmlns:a="http://schemas.openxmlformats.org/drawingml/2006/main">
+            <a:off x="1104900" y="7067550"/>
+            <a:ext cx="3562350" cy="209550"/>
+          </a:xfrm>
+          <a:prstGeom xmlns:a="http://schemas.openxmlformats.org/drawingml/2006/main" prst="rect">
+            <a:avLst/>
+          </a:prstGeom>
+        </p:spPr>
+        <p:txBody>
+          <a:bodyPr xmlns:a="http://schemas.openxmlformats.org/drawingml/2006/main" lIns="0" tIns="0" rIns="0" bIns="0"/>
+          <a:lstStyle xmlns:a="http://schemas.openxmlformats.org/drawingml/2006/main"/>
+          <a:p xmlns:a="http://schemas.openxmlformats.org/drawingml/2006/main">
+            <a:pPr>
+              <a:defRPr sz="1275">
+                <a:solidFill>
+                  <a:srgbClr val="64748B"/>
+                </a:solidFill>
+              </a:defRPr>
+            </a:pPr>
+            <a:r>
+              <a:rPr sz="1275">
+                <a:solidFill>
+                  <a:srgbClr val="64748B"/>
+                </a:solidFill>
+              </a:rPr>
+              <a:t>单 PR demo 口径</a:t>
             </a:r>
           </a:p>
         </p:txBody>
@@ -1995,23 +2007,23 @@
           <p:cNvPr id="7" name="">
             <a:extLst xmlns:a="http://schemas.openxmlformats.org/drawingml/2006/main">
               <a:ext uri="{FF2B5EF4-FFF2-40B4-BE49-F238E27FC236}">
-                <a16:creationId xmlns:a16="http://schemas.microsoft.com/office/drawing/2014/main" id="{B504B9D6-2A09-43B5-9F37-A95E417D23DA}"/>
-              </a:ext>
-            </a:extLst>
-          </p:cNvPr>
-          <p:cNvSpPr>
-            <a:spLocks xmlns:a="http://schemas.openxmlformats.org/drawingml/2006/main" noGrp="1"/>
-          </p:cNvSpPr>
-          <p:nvPr/>
-        </p:nvSpPr>
-        <p:spPr>
-          <a:xfrm xmlns:a="http://schemas.openxmlformats.org/drawingml/2006/main">
-            <a:off x="5175647" y="5884545"/>
-            <a:ext cx="4051697" cy="1706880"/>
+                <a16:creationId xmlns:a16="http://schemas.microsoft.com/office/drawing/2014/main" id="{716C12BD-E79D-4E78-814F-AE93F71B0A8A}"/>
+              </a:ext>
+            </a:extLst>
+          </p:cNvPr>
+          <p:cNvSpPr>
+            <a:spLocks xmlns:a="http://schemas.openxmlformats.org/drawingml/2006/main" noGrp="1"/>
+          </p:cNvSpPr>
+          <p:nvPr/>
+        </p:nvSpPr>
+        <p:spPr>
+          <a:xfrm xmlns:a="http://schemas.openxmlformats.org/drawingml/2006/main">
+            <a:off x="5143500" y="5814060"/>
+            <a:ext cx="4095750" cy="1672590"/>
           </a:xfrm>
           <a:prstGeom xmlns:a="http://schemas.openxmlformats.org/drawingml/2006/main" prst="roundRect">
             <a:avLst>
-              <a:gd name="adj" fmla="val 6696"/>
+              <a:gd name="adj" fmla="val 6834"/>
             </a:avLst>
           </a:prstGeom>
           <a:solidFill xmlns:a="http://schemas.openxmlformats.org/drawingml/2006/main">
@@ -2030,42 +2042,42 @@
           <p:cNvPr id="8" name="">
             <a:extLst xmlns:a="http://schemas.openxmlformats.org/drawingml/2006/main">
               <a:ext uri="{FF2B5EF4-FFF2-40B4-BE49-F238E27FC236}">
-                <a16:creationId xmlns:a16="http://schemas.microsoft.com/office/drawing/2014/main" id="{731C10B6-3824-47EF-A6C8-085FA3D913B8}"/>
-              </a:ext>
-            </a:extLst>
-          </p:cNvPr>
-          <p:cNvSpPr>
-            <a:spLocks xmlns:a="http://schemas.openxmlformats.org/drawingml/2006/main" noGrp="1"/>
-          </p:cNvSpPr>
-          <p:nvPr/>
-        </p:nvSpPr>
-        <p:spPr>
-          <a:xfrm xmlns:a="http://schemas.openxmlformats.org/drawingml/2006/main">
-            <a:off x="5448300" y="6115050"/>
-            <a:ext cx="3524250" cy="647700"/>
-          </a:xfrm>
-          <a:prstGeom xmlns:a="http://schemas.openxmlformats.org/drawingml/2006/main" prst="rect">
-            <a:avLst/>
-          </a:prstGeom>
-        </p:spPr>
-        <p:txBody>
-          <a:bodyPr xmlns:a="http://schemas.openxmlformats.org/drawingml/2006/main" lIns="0" tIns="0" rIns="0" bIns="0"/>
-          <a:lstStyle xmlns:a="http://schemas.openxmlformats.org/drawingml/2006/main"/>
-          <a:p xmlns:a="http://schemas.openxmlformats.org/drawingml/2006/main">
-            <a:pPr>
-              <a:defRPr sz="4200" b="1">
+                <a16:creationId xmlns:a16="http://schemas.microsoft.com/office/drawing/2014/main" id="{00FED39F-C8C1-4576-B8AD-0BD62281F99A}"/>
+              </a:ext>
+            </a:extLst>
+          </p:cNvPr>
+          <p:cNvSpPr>
+            <a:spLocks xmlns:a="http://schemas.openxmlformats.org/drawingml/2006/main" noGrp="1"/>
+          </p:cNvSpPr>
+          <p:nvPr/>
+        </p:nvSpPr>
+        <p:spPr>
+          <a:xfrm xmlns:a="http://schemas.openxmlformats.org/drawingml/2006/main">
+            <a:off x="5410200" y="6038850"/>
+            <a:ext cx="3562350" cy="628650"/>
+          </a:xfrm>
+          <a:prstGeom xmlns:a="http://schemas.openxmlformats.org/drawingml/2006/main" prst="rect">
+            <a:avLst/>
+          </a:prstGeom>
+        </p:spPr>
+        <p:txBody>
+          <a:bodyPr xmlns:a="http://schemas.openxmlformats.org/drawingml/2006/main" lIns="0" tIns="0" rIns="0" bIns="0"/>
+          <a:lstStyle xmlns:a="http://schemas.openxmlformats.org/drawingml/2006/main"/>
+          <a:p xmlns:a="http://schemas.openxmlformats.org/drawingml/2006/main">
+            <a:pPr>
+              <a:defRPr sz="4050" b="1">
                 <a:solidFill>
                   <a:srgbClr val="2563EB"/>
                 </a:solidFill>
               </a:defRPr>
             </a:pPr>
             <a:r>
-              <a:rPr sz="4200" b="1">
+              <a:rPr sz="4050" b="1">
                 <a:solidFill>
                   <a:srgbClr val="2563EB"/>
                 </a:solidFill>
               </a:rPr>
-              <a:t>2 / 2</a:t>
+              <a:t>7.3 h</a:t>
             </a:r>
           </a:p>
         </p:txBody>
@@ -2075,42 +2087,42 @@
           <p:cNvPr id="9" name="">
             <a:extLst xmlns:a="http://schemas.openxmlformats.org/drawingml/2006/main">
               <a:ext uri="{FF2B5EF4-FFF2-40B4-BE49-F238E27FC236}">
-                <a16:creationId xmlns:a16="http://schemas.microsoft.com/office/drawing/2014/main" id="{5E253C37-0715-4BEB-99D3-C792454F4463}"/>
-              </a:ext>
-            </a:extLst>
-          </p:cNvPr>
-          <p:cNvSpPr>
-            <a:spLocks xmlns:a="http://schemas.openxmlformats.org/drawingml/2006/main" noGrp="1"/>
-          </p:cNvSpPr>
-          <p:nvPr/>
-        </p:nvSpPr>
-        <p:spPr>
-          <a:xfrm xmlns:a="http://schemas.openxmlformats.org/drawingml/2006/main">
-            <a:off x="5448300" y="6838950"/>
-            <a:ext cx="3524250" cy="266700"/>
-          </a:xfrm>
-          <a:prstGeom xmlns:a="http://schemas.openxmlformats.org/drawingml/2006/main" prst="rect">
-            <a:avLst/>
-          </a:prstGeom>
-        </p:spPr>
-        <p:txBody>
-          <a:bodyPr xmlns:a="http://schemas.openxmlformats.org/drawingml/2006/main" lIns="0" tIns="0" rIns="0" bIns="0"/>
-          <a:lstStyle xmlns:a="http://schemas.openxmlformats.org/drawingml/2006/main"/>
-          <a:p xmlns:a="http://schemas.openxmlformats.org/drawingml/2006/main">
-            <a:pPr>
-              <a:defRPr sz="1725" b="1">
+                <a16:creationId xmlns:a16="http://schemas.microsoft.com/office/drawing/2014/main" id="{DA8A7869-D276-4A3E-87D6-65E332F58D5D}"/>
+              </a:ext>
+            </a:extLst>
+          </p:cNvPr>
+          <p:cNvSpPr>
+            <a:spLocks xmlns:a="http://schemas.openxmlformats.org/drawingml/2006/main" noGrp="1"/>
+          </p:cNvSpPr>
+          <p:nvPr/>
+        </p:nvSpPr>
+        <p:spPr>
+          <a:xfrm xmlns:a="http://schemas.openxmlformats.org/drawingml/2006/main">
+            <a:off x="5410200" y="6743700"/>
+            <a:ext cx="3562350" cy="266700"/>
+          </a:xfrm>
+          <a:prstGeom xmlns:a="http://schemas.openxmlformats.org/drawingml/2006/main" prst="rect">
+            <a:avLst/>
+          </a:prstGeom>
+        </p:spPr>
+        <p:txBody>
+          <a:bodyPr xmlns:a="http://schemas.openxmlformats.org/drawingml/2006/main" lIns="0" tIns="0" rIns="0" bIns="0"/>
+          <a:lstStyle xmlns:a="http://schemas.openxmlformats.org/drawingml/2006/main"/>
+          <a:p xmlns:a="http://schemas.openxmlformats.org/drawingml/2006/main">
+            <a:pPr>
+              <a:defRPr sz="1650" b="1">
                 <a:solidFill>
                   <a:srgbClr val="1F2937"/>
                 </a:solidFill>
               </a:defRPr>
             </a:pPr>
             <a:r>
-              <a:rPr sz="1725" b="1">
+              <a:rPr sz="1650" b="1">
                 <a:solidFill>
                   <a:srgbClr val="1F2937"/>
                 </a:solidFill>
               </a:rPr>
-              <a:t>风险命中</a:t>
+              <a:t>每周节省</a:t>
             </a:r>
           </a:p>
         </p:txBody>
@@ -2120,30 +2132,42 @@
           <p:cNvPr id="10" name="">
             <a:extLst xmlns:a="http://schemas.openxmlformats.org/drawingml/2006/main">
               <a:ext uri="{FF2B5EF4-FFF2-40B4-BE49-F238E27FC236}">
-                <a16:creationId xmlns:a16="http://schemas.microsoft.com/office/drawing/2014/main" id="{2874417A-415D-43FC-89D8-20580369AC34}"/>
-              </a:ext>
-            </a:extLst>
-          </p:cNvPr>
-          <p:cNvSpPr>
-            <a:spLocks xmlns:a="http://schemas.openxmlformats.org/drawingml/2006/main" noGrp="1"/>
-          </p:cNvSpPr>
-          <p:nvPr/>
-        </p:nvSpPr>
-        <p:spPr>
-          <a:xfrm xmlns:a="http://schemas.openxmlformats.org/drawingml/2006/main">
-            <a:off x="5448300" y="7162800"/>
-            <a:ext cx="3524250" cy="209550"/>
-          </a:xfrm>
-          <a:prstGeom xmlns:a="http://schemas.openxmlformats.org/drawingml/2006/main" prst="rect">
-            <a:avLst/>
-          </a:prstGeom>
-        </p:spPr>
-        <p:txBody>
-          <a:bodyPr xmlns:a="http://schemas.openxmlformats.org/drawingml/2006/main" lIns="0" tIns="0" rIns="0" bIns="0"/>
-          <a:lstStyle xmlns:a="http://schemas.openxmlformats.org/drawingml/2006/main"/>
-          <a:p xmlns:a="http://schemas.openxmlformats.org/drawingml/2006/main">
-            <a:r>
-              <a:t/>
+                <a16:creationId xmlns:a16="http://schemas.microsoft.com/office/drawing/2014/main" id="{D63F9C34-CA2B-48EC-B7D2-5DF1DB23C956}"/>
+              </a:ext>
+            </a:extLst>
+          </p:cNvPr>
+          <p:cNvSpPr>
+            <a:spLocks xmlns:a="http://schemas.openxmlformats.org/drawingml/2006/main" noGrp="1"/>
+          </p:cNvSpPr>
+          <p:nvPr/>
+        </p:nvSpPr>
+        <p:spPr>
+          <a:xfrm xmlns:a="http://schemas.openxmlformats.org/drawingml/2006/main">
+            <a:off x="5410200" y="7067550"/>
+            <a:ext cx="3562350" cy="209550"/>
+          </a:xfrm>
+          <a:prstGeom xmlns:a="http://schemas.openxmlformats.org/drawingml/2006/main" prst="rect">
+            <a:avLst/>
+          </a:prstGeom>
+        </p:spPr>
+        <p:txBody>
+          <a:bodyPr xmlns:a="http://schemas.openxmlformats.org/drawingml/2006/main" lIns="0" tIns="0" rIns="0" bIns="0"/>
+          <a:lstStyle xmlns:a="http://schemas.openxmlformats.org/drawingml/2006/main"/>
+          <a:p xmlns:a="http://schemas.openxmlformats.org/drawingml/2006/main">
+            <a:pPr>
+              <a:defRPr sz="1275">
+                <a:solidFill>
+                  <a:srgbClr val="64748B"/>
+                </a:solidFill>
+              </a:defRPr>
+            </a:pPr>
+            <a:r>
+              <a:rPr sz="1275">
+                <a:solidFill>
+                  <a:srgbClr val="64748B"/>
+                </a:solidFill>
+              </a:rPr>
+              <a:t>按 20 个 PR 估算</a:t>
             </a:r>
           </a:p>
         </p:txBody>
@@ -2153,23 +2177,23 @@
           <p:cNvPr id="11" name="">
             <a:extLst xmlns:a="http://schemas.openxmlformats.org/drawingml/2006/main">
               <a:ext uri="{FF2B5EF4-FFF2-40B4-BE49-F238E27FC236}">
-                <a16:creationId xmlns:a16="http://schemas.microsoft.com/office/drawing/2014/main" id="{87801CAE-E031-4083-A9AC-8542DF2F065C}"/>
-              </a:ext>
-            </a:extLst>
-          </p:cNvPr>
-          <p:cNvSpPr>
-            <a:spLocks xmlns:a="http://schemas.openxmlformats.org/drawingml/2006/main" noGrp="1"/>
-          </p:cNvSpPr>
-          <p:nvPr/>
-        </p:nvSpPr>
-        <p:spPr>
-          <a:xfrm xmlns:a="http://schemas.openxmlformats.org/drawingml/2006/main">
-            <a:off x="9855994" y="723900"/>
-            <a:ext cx="7555706" cy="8839200"/>
+                <a16:creationId xmlns:a16="http://schemas.microsoft.com/office/drawing/2014/main" id="{F4A1CE9E-DFD2-4071-871A-6AF474D4AF65}"/>
+              </a:ext>
+            </a:extLst>
+          </p:cNvPr>
+          <p:cNvSpPr>
+            <a:spLocks xmlns:a="http://schemas.openxmlformats.org/drawingml/2006/main" noGrp="1"/>
+          </p:cNvSpPr>
+          <p:nvPr/>
+        </p:nvSpPr>
+        <p:spPr>
+          <a:xfrm xmlns:a="http://schemas.openxmlformats.org/drawingml/2006/main">
+            <a:off x="9848850" y="704850"/>
+            <a:ext cx="7600950" cy="8877300"/>
           </a:xfrm>
           <a:prstGeom xmlns:a="http://schemas.openxmlformats.org/drawingml/2006/main" prst="roundRect">
             <a:avLst>
-              <a:gd name="adj" fmla="val 2017"/>
+              <a:gd name="adj" fmla="val 2005"/>
             </a:avLst>
           </a:prstGeom>
           <a:solidFill xmlns:a="http://schemas.openxmlformats.org/drawingml/2006/main">
@@ -2188,7 +2212,7 @@
           <p:cNvPr id="12" name="">
             <a:extLst xmlns:a="http://schemas.openxmlformats.org/drawingml/2006/main">
               <a:ext uri="{FF2B5EF4-FFF2-40B4-BE49-F238E27FC236}">
-                <a16:creationId xmlns:a16="http://schemas.microsoft.com/office/drawing/2014/main" id="{F4711921-10C3-499A-A25E-986D7502D80F}"/>
+                <a16:creationId xmlns:a16="http://schemas.microsoft.com/office/drawing/2014/main" id="{8C3E5F8F-1D65-4308-9276-E25506045F4B}"/>
               </a:ext>
             </a:extLst>
           </p:cNvPr>
@@ -2200,30 +2224,30 @@
         <p:spPr>
           <a:xfrm xmlns:a="http://schemas.openxmlformats.org/drawingml/2006/main">
             <a:off x="10248900" y="3638550"/>
-            <a:ext cx="6762750" cy="381000"/>
-          </a:xfrm>
-          <a:prstGeom xmlns:a="http://schemas.openxmlformats.org/drawingml/2006/main" prst="rect">
-            <a:avLst/>
-          </a:prstGeom>
-        </p:spPr>
-        <p:txBody>
-          <a:bodyPr xmlns:a="http://schemas.openxmlformats.org/drawingml/2006/main" lIns="0" tIns="0" rIns="0" bIns="0"/>
-          <a:lstStyle xmlns:a="http://schemas.openxmlformats.org/drawingml/2006/main"/>
-          <a:p xmlns:a="http://schemas.openxmlformats.org/drawingml/2006/main">
-            <a:pPr>
-              <a:defRPr sz="2400" b="1">
+            <a:ext cx="6800850" cy="361950"/>
+          </a:xfrm>
+          <a:prstGeom xmlns:a="http://schemas.openxmlformats.org/drawingml/2006/main" prst="rect">
+            <a:avLst/>
+          </a:prstGeom>
+        </p:spPr>
+        <p:txBody>
+          <a:bodyPr xmlns:a="http://schemas.openxmlformats.org/drawingml/2006/main" lIns="0" tIns="0" rIns="0" bIns="0"/>
+          <a:lstStyle xmlns:a="http://schemas.openxmlformats.org/drawingml/2006/main"/>
+          <a:p xmlns:a="http://schemas.openxmlformats.org/drawingml/2006/main">
+            <a:pPr>
+              <a:defRPr sz="2325" b="1">
                 <a:solidFill>
                   <a:srgbClr val="17223B"/>
                 </a:solidFill>
               </a:defRPr>
             </a:pPr>
             <a:r>
-              <a:rPr sz="2400" b="1">
+              <a:rPr sz="2325" b="1">
                 <a:solidFill>
                   <a:srgbClr val="17223B"/>
                 </a:solidFill>
               </a:rPr>
-              <a:t>AI Review 输出长什么样</a:t>
+              <a:t>研发部门关心的不是“会聊天”</a:t>
             </a:r>
           </a:p>
         </p:txBody>
@@ -2233,7 +2257,7 @@
           <p:cNvPr id="13" name="">
             <a:extLst xmlns:a="http://schemas.openxmlformats.org/drawingml/2006/main">
               <a:ext uri="{FF2B5EF4-FFF2-40B4-BE49-F238E27FC236}">
-                <a16:creationId xmlns:a16="http://schemas.microsoft.com/office/drawing/2014/main" id="{5AF7DE92-1B61-4487-9F29-E8C1C47E4512}"/>
+                <a16:creationId xmlns:a16="http://schemas.microsoft.com/office/drawing/2014/main" id="{3E33DB4A-26C3-49E5-A3A0-0FA43D787201}"/>
               </a:ext>
             </a:extLst>
           </p:cNvPr>
@@ -2245,7 +2269,7 @@
         <p:spPr>
           <a:xfrm xmlns:a="http://schemas.openxmlformats.org/drawingml/2006/main">
             <a:off x="10248900" y="4248150"/>
-            <a:ext cx="6762750" cy="19050"/>
+            <a:ext cx="6800850" cy="19050"/>
           </a:xfrm>
           <a:prstGeom xmlns:a="http://schemas.openxmlformats.org/drawingml/2006/main" prst="rect">
             <a:avLst/>
@@ -2266,18 +2290,18 @@
           <p:cNvPr id="14" name="">
             <a:extLst xmlns:a="http://schemas.openxmlformats.org/drawingml/2006/main">
               <a:ext uri="{FF2B5EF4-FFF2-40B4-BE49-F238E27FC236}">
-                <a16:creationId xmlns:a16="http://schemas.microsoft.com/office/drawing/2014/main" id="{57CD6514-7720-4D62-9201-AD827C88EDE7}"/>
-              </a:ext>
-            </a:extLst>
-          </p:cNvPr>
-          <p:cNvSpPr>
-            <a:spLocks xmlns:a="http://schemas.openxmlformats.org/drawingml/2006/main" noGrp="1"/>
-          </p:cNvSpPr>
-          <p:nvPr/>
-        </p:nvSpPr>
-        <p:spPr>
-          <a:xfrm xmlns:a="http://schemas.openxmlformats.org/drawingml/2006/main">
-            <a:off x="10256044" y="4512945"/>
+                <a16:creationId xmlns:a16="http://schemas.microsoft.com/office/drawing/2014/main" id="{8054E2DE-C763-454E-BB9B-4D073BCCD68E}"/>
+              </a:ext>
+            </a:extLst>
+          </p:cNvPr>
+          <p:cNvSpPr>
+            <a:spLocks xmlns:a="http://schemas.openxmlformats.org/drawingml/2006/main" noGrp="1"/>
+          </p:cNvSpPr>
+          <p:nvPr/>
+        </p:nvSpPr>
+        <p:spPr>
+          <a:xfrm xmlns:a="http://schemas.openxmlformats.org/drawingml/2006/main">
+            <a:off x="10248900" y="4507230"/>
             <a:ext cx="533400" cy="533400"/>
           </a:xfrm>
           <a:prstGeom xmlns:a="http://schemas.openxmlformats.org/drawingml/2006/main" prst="roundRect">
@@ -2286,7 +2310,7 @@
             </a:avLst>
           </a:prstGeom>
           <a:solidFill xmlns:a="http://schemas.openxmlformats.org/drawingml/2006/main">
-            <a:srgbClr val="E11D48"/>
+            <a:srgbClr val="2563EB"/>
           </a:solidFill>
         </p:spPr>
       </p:sp>
@@ -2295,7 +2319,7 @@
           <p:cNvPr id="15" name="">
             <a:extLst xmlns:a="http://schemas.openxmlformats.org/drawingml/2006/main">
               <a:ext uri="{FF2B5EF4-FFF2-40B4-BE49-F238E27FC236}">
-                <a16:creationId xmlns:a16="http://schemas.microsoft.com/office/drawing/2014/main" id="{582C91D4-3E08-4A45-A789-3FA5E97824A5}"/>
+                <a16:creationId xmlns:a16="http://schemas.microsoft.com/office/drawing/2014/main" id="{99CF4251-B294-4D36-BA05-944AB7FBC2BD}"/>
               </a:ext>
             </a:extLst>
           </p:cNvPr>
@@ -2340,7 +2364,7 @@
           <p:cNvPr id="16" name="">
             <a:extLst xmlns:a="http://schemas.openxmlformats.org/drawingml/2006/main">
               <a:ext uri="{FF2B5EF4-FFF2-40B4-BE49-F238E27FC236}">
-                <a16:creationId xmlns:a16="http://schemas.microsoft.com/office/drawing/2014/main" id="{6D404659-6426-4313-A598-7B677144BF3F}"/>
+                <a16:creationId xmlns:a16="http://schemas.microsoft.com/office/drawing/2014/main" id="{1D644024-1DE8-4DC8-A4F0-7A287BDAEBDB}"/>
               </a:ext>
             </a:extLst>
           </p:cNvPr>
@@ -2352,7 +2376,7 @@
         <p:spPr>
           <a:xfrm xmlns:a="http://schemas.openxmlformats.org/drawingml/2006/main">
             <a:off x="10953750" y="4514850"/>
-            <a:ext cx="6057900" cy="285750"/>
+            <a:ext cx="6096000" cy="285750"/>
           </a:xfrm>
           <a:prstGeom xmlns:a="http://schemas.openxmlformats.org/drawingml/2006/main" prst="rect">
             <a:avLst/>
@@ -2375,7 +2399,7 @@
                   <a:srgbClr val="1F2937"/>
                 </a:solidFill>
               </a:rPr>
-              <a:t>运动安全高风险</a:t>
+              <a:t>PR 吞吐</a:t>
             </a:r>
           </a:p>
         </p:txBody>
@@ -2385,7 +2409,7 @@
           <p:cNvPr id="17" name="">
             <a:extLst xmlns:a="http://schemas.openxmlformats.org/drawingml/2006/main">
               <a:ext uri="{FF2B5EF4-FFF2-40B4-BE49-F238E27FC236}">
-                <a16:creationId xmlns:a16="http://schemas.microsoft.com/office/drawing/2014/main" id="{6E22D6C8-31D6-4415-9983-A70A25B051BC}"/>
+                <a16:creationId xmlns:a16="http://schemas.microsoft.com/office/drawing/2014/main" id="{BE73074F-96C4-4277-AEE7-A4EA04444356}"/>
               </a:ext>
             </a:extLst>
           </p:cNvPr>
@@ -2397,7 +2421,7 @@
         <p:spPr>
           <a:xfrm xmlns:a="http://schemas.openxmlformats.org/drawingml/2006/main">
             <a:off x="10953750" y="4857750"/>
-            <a:ext cx="5238750" cy="209550"/>
+            <a:ext cx="3943350" cy="209550"/>
           </a:xfrm>
           <a:prstGeom xmlns:a="http://schemas.openxmlformats.org/drawingml/2006/main" prst="rect">
             <a:avLst/>
@@ -2420,7 +2444,7 @@
                   <a:srgbClr val="64748B"/>
                 </a:solidFill>
               </a:rPr>
-              <a:t>目标丢失后必须关注 vx/wz 是否及时置 0，避免沿用上一帧底盘速度。</a:t>
+              <a:t>缩短 reviewer 找上下文和判断影响范围的准备时间。</a:t>
             </a:r>
           </a:p>
         </p:txBody>
@@ -2430,18 +2454,18 @@
           <p:cNvPr id="18" name="">
             <a:extLst xmlns:a="http://schemas.openxmlformats.org/drawingml/2006/main">
               <a:ext uri="{FF2B5EF4-FFF2-40B4-BE49-F238E27FC236}">
-                <a16:creationId xmlns:a16="http://schemas.microsoft.com/office/drawing/2014/main" id="{5285C1A9-C458-4F1A-B91F-ADB2F37BFE1A}"/>
-              </a:ext>
-            </a:extLst>
-          </p:cNvPr>
-          <p:cNvSpPr>
-            <a:spLocks xmlns:a="http://schemas.openxmlformats.org/drawingml/2006/main" noGrp="1"/>
-          </p:cNvSpPr>
-          <p:nvPr/>
-        </p:nvSpPr>
-        <p:spPr>
-          <a:xfrm xmlns:a="http://schemas.openxmlformats.org/drawingml/2006/main">
-            <a:off x="10256044" y="5309235"/>
+                <a16:creationId xmlns:a16="http://schemas.microsoft.com/office/drawing/2014/main" id="{5B49A54F-FCB0-4390-91EE-0EB41254F24C}"/>
+              </a:ext>
+            </a:extLst>
+          </p:cNvPr>
+          <p:cNvSpPr>
+            <a:spLocks xmlns:a="http://schemas.openxmlformats.org/drawingml/2006/main" noGrp="1"/>
+          </p:cNvSpPr>
+          <p:nvPr/>
+        </p:nvSpPr>
+        <p:spPr>
+          <a:xfrm xmlns:a="http://schemas.openxmlformats.org/drawingml/2006/main">
+            <a:off x="10248900" y="5303520"/>
             <a:ext cx="533400" cy="533400"/>
           </a:xfrm>
           <a:prstGeom xmlns:a="http://schemas.openxmlformats.org/drawingml/2006/main" prst="roundRect">
@@ -2450,7 +2474,7 @@
             </a:avLst>
           </a:prstGeom>
           <a:solidFill xmlns:a="http://schemas.openxmlformats.org/drawingml/2006/main">
-            <a:srgbClr val="F59E0B"/>
+            <a:srgbClr val="E11D48"/>
           </a:solidFill>
         </p:spPr>
       </p:sp>
@@ -2459,18 +2483,18 @@
           <p:cNvPr id="19" name="">
             <a:extLst xmlns:a="http://schemas.openxmlformats.org/drawingml/2006/main">
               <a:ext uri="{FF2B5EF4-FFF2-40B4-BE49-F238E27FC236}">
-                <a16:creationId xmlns:a16="http://schemas.microsoft.com/office/drawing/2014/main" id="{845B2F88-CD9F-4BF8-95BD-E68B4DABF441}"/>
-              </a:ext>
-            </a:extLst>
-          </p:cNvPr>
-          <p:cNvSpPr>
-            <a:spLocks xmlns:a="http://schemas.openxmlformats.org/drawingml/2006/main" noGrp="1"/>
-          </p:cNvSpPr>
-          <p:nvPr/>
-        </p:nvSpPr>
-        <p:spPr>
-          <a:xfrm xmlns:a="http://schemas.openxmlformats.org/drawingml/2006/main">
-            <a:off x="10458450" y="5448300"/>
+                <a16:creationId xmlns:a16="http://schemas.microsoft.com/office/drawing/2014/main" id="{39D05E29-E4B5-442A-BA4B-4B98D9DF638A}"/>
+              </a:ext>
+            </a:extLst>
+          </p:cNvPr>
+          <p:cNvSpPr>
+            <a:spLocks xmlns:a="http://schemas.openxmlformats.org/drawingml/2006/main" noGrp="1"/>
+          </p:cNvSpPr>
+          <p:nvPr/>
+        </p:nvSpPr>
+        <p:spPr>
+          <a:xfrm xmlns:a="http://schemas.openxmlformats.org/drawingml/2006/main">
+            <a:off x="10458450" y="5429250"/>
             <a:ext cx="114300" cy="266700"/>
           </a:xfrm>
           <a:prstGeom xmlns:a="http://schemas.openxmlformats.org/drawingml/2006/main" prst="rect">
@@ -2504,19 +2528,19 @@
           <p:cNvPr id="20" name="">
             <a:extLst xmlns:a="http://schemas.openxmlformats.org/drawingml/2006/main">
               <a:ext uri="{FF2B5EF4-FFF2-40B4-BE49-F238E27FC236}">
-                <a16:creationId xmlns:a16="http://schemas.microsoft.com/office/drawing/2014/main" id="{890683A4-7CCF-49B3-849F-B3D7CBC6F94D}"/>
-              </a:ext>
-            </a:extLst>
-          </p:cNvPr>
-          <p:cNvSpPr>
-            <a:spLocks xmlns:a="http://schemas.openxmlformats.org/drawingml/2006/main" noGrp="1"/>
-          </p:cNvSpPr>
-          <p:nvPr/>
-        </p:nvSpPr>
-        <p:spPr>
-          <a:xfrm xmlns:a="http://schemas.openxmlformats.org/drawingml/2006/main">
-            <a:off x="10953750" y="5314950"/>
-            <a:ext cx="6057900" cy="285750"/>
+                <a16:creationId xmlns:a16="http://schemas.microsoft.com/office/drawing/2014/main" id="{2AE560C2-AF5B-4B6D-8B99-56B94DF9E906}"/>
+              </a:ext>
+            </a:extLst>
+          </p:cNvPr>
+          <p:cNvSpPr>
+            <a:spLocks xmlns:a="http://schemas.openxmlformats.org/drawingml/2006/main" noGrp="1"/>
+          </p:cNvSpPr>
+          <p:nvPr/>
+        </p:nvSpPr>
+        <p:spPr>
+          <a:xfrm xmlns:a="http://schemas.openxmlformats.org/drawingml/2006/main">
+            <a:off x="10953750" y="5295900"/>
+            <a:ext cx="6096000" cy="285750"/>
           </a:xfrm>
           <a:prstGeom xmlns:a="http://schemas.openxmlformats.org/drawingml/2006/main" prst="rect">
             <a:avLst/>
@@ -2539,7 +2563,7 @@
                   <a:srgbClr val="1F2937"/>
                 </a:solidFill>
               </a:rPr>
-              <a:t>Action 契约兼容风险</a:t>
+              <a:t>质量前置</a:t>
             </a:r>
           </a:p>
         </p:txBody>
@@ -2549,19 +2573,19 @@
           <p:cNvPr id="21" name="">
             <a:extLst xmlns:a="http://schemas.openxmlformats.org/drawingml/2006/main">
               <a:ext uri="{FF2B5EF4-FFF2-40B4-BE49-F238E27FC236}">
-                <a16:creationId xmlns:a16="http://schemas.microsoft.com/office/drawing/2014/main" id="{704A566F-1887-4445-B11D-473BF744F71C}"/>
-              </a:ext>
-            </a:extLst>
-          </p:cNvPr>
-          <p:cNvSpPr>
-            <a:spLocks xmlns:a="http://schemas.openxmlformats.org/drawingml/2006/main" noGrp="1"/>
-          </p:cNvSpPr>
-          <p:nvPr/>
-        </p:nvSpPr>
-        <p:spPr>
-          <a:xfrm xmlns:a="http://schemas.openxmlformats.org/drawingml/2006/main">
-            <a:off x="10953750" y="5657850"/>
-            <a:ext cx="4781550" cy="209550"/>
+                <a16:creationId xmlns:a16="http://schemas.microsoft.com/office/drawing/2014/main" id="{E361E02B-5367-4433-9210-72A5C82E8375}"/>
+              </a:ext>
+            </a:extLst>
+          </p:cNvPr>
+          <p:cNvSpPr>
+            <a:spLocks xmlns:a="http://schemas.openxmlformats.org/drawingml/2006/main" noGrp="1"/>
+          </p:cNvSpPr>
+          <p:nvPr/>
+        </p:nvSpPr>
+        <p:spPr>
+          <a:xfrm xmlns:a="http://schemas.openxmlformats.org/drawingml/2006/main">
+            <a:off x="10953750" y="5638800"/>
+            <a:ext cx="4114800" cy="209550"/>
           </a:xfrm>
           <a:prstGeom xmlns:a="http://schemas.openxmlformats.org/drawingml/2006/main" prst="rect">
             <a:avLst/>
@@ -2584,7 +2608,7 @@
                   <a:srgbClr val="64748B"/>
                 </a:solidFill>
               </a:rPr>
-              <a:t>start:person、start:72、stop/status 是外部系统依赖的稳定接口。</a:t>
+              <a:t>运动安全、接口契约、测试缺失等高风险点更早暴露。</a:t>
             </a:r>
           </a:p>
         </p:txBody>
@@ -2594,18 +2618,18 @@
           <p:cNvPr id="22" name="">
             <a:extLst xmlns:a="http://schemas.openxmlformats.org/drawingml/2006/main">
               <a:ext uri="{FF2B5EF4-FFF2-40B4-BE49-F238E27FC236}">
-                <a16:creationId xmlns:a16="http://schemas.microsoft.com/office/drawing/2014/main" id="{3E500FBE-EA3B-4983-88F3-D006CC54090E}"/>
-              </a:ext>
-            </a:extLst>
-          </p:cNvPr>
-          <p:cNvSpPr>
-            <a:spLocks xmlns:a="http://schemas.openxmlformats.org/drawingml/2006/main" noGrp="1"/>
-          </p:cNvSpPr>
-          <p:nvPr/>
-        </p:nvSpPr>
-        <p:spPr>
-          <a:xfrm xmlns:a="http://schemas.openxmlformats.org/drawingml/2006/main">
-            <a:off x="10256044" y="6105525"/>
+                <a16:creationId xmlns:a16="http://schemas.microsoft.com/office/drawing/2014/main" id="{5393F849-6972-448D-A98A-5E018BA8E71A}"/>
+              </a:ext>
+            </a:extLst>
+          </p:cNvPr>
+          <p:cNvSpPr>
+            <a:spLocks xmlns:a="http://schemas.openxmlformats.org/drawingml/2006/main" noGrp="1"/>
+          </p:cNvSpPr>
+          <p:nvPr/>
+        </p:nvSpPr>
+        <p:spPr>
+          <a:xfrm xmlns:a="http://schemas.openxmlformats.org/drawingml/2006/main">
+            <a:off x="10248900" y="6099810"/>
             <a:ext cx="533400" cy="533400"/>
           </a:xfrm>
           <a:prstGeom xmlns:a="http://schemas.openxmlformats.org/drawingml/2006/main" prst="roundRect">
@@ -2623,18 +2647,18 @@
           <p:cNvPr id="23" name="">
             <a:extLst xmlns:a="http://schemas.openxmlformats.org/drawingml/2006/main">
               <a:ext uri="{FF2B5EF4-FFF2-40B4-BE49-F238E27FC236}">
-                <a16:creationId xmlns:a16="http://schemas.microsoft.com/office/drawing/2014/main" id="{6290FBE0-74AE-44D3-84DC-3CCCD52F813E}"/>
-              </a:ext>
-            </a:extLst>
-          </p:cNvPr>
-          <p:cNvSpPr>
-            <a:spLocks xmlns:a="http://schemas.openxmlformats.org/drawingml/2006/main" noGrp="1"/>
-          </p:cNvSpPr>
-          <p:nvPr/>
-        </p:nvSpPr>
-        <p:spPr>
-          <a:xfrm xmlns:a="http://schemas.openxmlformats.org/drawingml/2006/main">
-            <a:off x="10458450" y="6248400"/>
+                <a16:creationId xmlns:a16="http://schemas.microsoft.com/office/drawing/2014/main" id="{A3326D96-1ED1-4400-B5B5-8E7AD920EC8D}"/>
+              </a:ext>
+            </a:extLst>
+          </p:cNvPr>
+          <p:cNvSpPr>
+            <a:spLocks xmlns:a="http://schemas.openxmlformats.org/drawingml/2006/main" noGrp="1"/>
+          </p:cNvSpPr>
+          <p:nvPr/>
+        </p:nvSpPr>
+        <p:spPr>
+          <a:xfrm xmlns:a="http://schemas.openxmlformats.org/drawingml/2006/main">
+            <a:off x="10458450" y="6229350"/>
             <a:ext cx="114300" cy="266700"/>
           </a:xfrm>
           <a:prstGeom xmlns:a="http://schemas.openxmlformats.org/drawingml/2006/main" prst="rect">
@@ -2668,19 +2692,19 @@
           <p:cNvPr id="24" name="">
             <a:extLst xmlns:a="http://schemas.openxmlformats.org/drawingml/2006/main">
               <a:ext uri="{FF2B5EF4-FFF2-40B4-BE49-F238E27FC236}">
-                <a16:creationId xmlns:a16="http://schemas.microsoft.com/office/drawing/2014/main" id="{224A89B5-678F-4CA3-80B2-FE02EC665255}"/>
-              </a:ext>
-            </a:extLst>
-          </p:cNvPr>
-          <p:cNvSpPr>
-            <a:spLocks xmlns:a="http://schemas.openxmlformats.org/drawingml/2006/main" noGrp="1"/>
-          </p:cNvSpPr>
-          <p:nvPr/>
-        </p:nvSpPr>
-        <p:spPr>
-          <a:xfrm xmlns:a="http://schemas.openxmlformats.org/drawingml/2006/main">
-            <a:off x="10953750" y="6115050"/>
-            <a:ext cx="6057900" cy="285750"/>
+                <a16:creationId xmlns:a16="http://schemas.microsoft.com/office/drawing/2014/main" id="{05C71479-79B3-4B5A-9F20-85ADD446E4A7}"/>
+              </a:ext>
+            </a:extLst>
+          </p:cNvPr>
+          <p:cNvSpPr>
+            <a:spLocks xmlns:a="http://schemas.openxmlformats.org/drawingml/2006/main" noGrp="1"/>
+          </p:cNvSpPr>
+          <p:nvPr/>
+        </p:nvSpPr>
+        <p:spPr>
+          <a:xfrm xmlns:a="http://schemas.openxmlformats.org/drawingml/2006/main">
+            <a:off x="10953750" y="6096000"/>
+            <a:ext cx="6096000" cy="285750"/>
           </a:xfrm>
           <a:prstGeom xmlns:a="http://schemas.openxmlformats.org/drawingml/2006/main" prst="rect">
             <a:avLst/>
@@ -2703,7 +2727,7 @@
                   <a:srgbClr val="1F2937"/>
                 </a:solidFill>
               </a:rPr>
-              <a:t>测试补全建议</a:t>
+              <a:t>团队复用</a:t>
             </a:r>
           </a:p>
         </p:txBody>
@@ -2713,19 +2737,19 @@
           <p:cNvPr id="25" name="">
             <a:extLst xmlns:a="http://schemas.openxmlformats.org/drawingml/2006/main">
               <a:ext uri="{FF2B5EF4-FFF2-40B4-BE49-F238E27FC236}">
-                <a16:creationId xmlns:a16="http://schemas.microsoft.com/office/drawing/2014/main" id="{F2284EAB-B00C-42F7-AA92-7B1C155BAEA8}"/>
-              </a:ext>
-            </a:extLst>
-          </p:cNvPr>
-          <p:cNvSpPr>
-            <a:spLocks xmlns:a="http://schemas.openxmlformats.org/drawingml/2006/main" noGrp="1"/>
-          </p:cNvSpPr>
-          <p:nvPr/>
-        </p:nvSpPr>
-        <p:spPr>
-          <a:xfrm xmlns:a="http://schemas.openxmlformats.org/drawingml/2006/main">
-            <a:off x="10953750" y="6457950"/>
-            <a:ext cx="4267200" cy="209550"/>
+                <a16:creationId xmlns:a16="http://schemas.microsoft.com/office/drawing/2014/main" id="{D50EDB62-DFEC-431B-926E-E0639E176CDD}"/>
+              </a:ext>
+            </a:extLst>
+          </p:cNvPr>
+          <p:cNvSpPr>
+            <a:spLocks xmlns:a="http://schemas.openxmlformats.org/drawingml/2006/main" noGrp="1"/>
+          </p:cNvSpPr>
+          <p:nvPr/>
+        </p:nvSpPr>
+        <p:spPr>
+          <a:xfrm xmlns:a="http://schemas.openxmlformats.org/drawingml/2006/main">
+            <a:off x="10953750" y="6438900"/>
+            <a:ext cx="4152900" cy="209550"/>
           </a:xfrm>
           <a:prstGeom xmlns:a="http://schemas.openxmlformats.org/drawingml/2006/main" prst="rect">
             <a:avLst/>
@@ -2748,7 +2772,7 @@
                   <a:srgbClr val="64748B"/>
                 </a:solidFill>
               </a:rPr>
-              <a:t>直接给出目标丢失帧、Action 参数、停止状态等测试点。</a:t>
+              <a:t>把老员工经验沉淀成规则、prompt 和可复用测试清单。</a:t>
             </a:r>
           </a:p>
         </p:txBody>
@@ -2756,7 +2780,7 @@
     </p:spTree>
     <p:extLst>
       <p:ext uri="{BB962C8B-B14F-4D97-AF65-F5344CB8AC3E}">
-        <p14:creationId xmlns:p14="http://schemas.microsoft.com/office/powerpoint/2010/main" val="1737120930"/>
+        <p14:creationId xmlns:p14="http://schemas.microsoft.com/office/powerpoint/2010/main" val="1529088116"/>
       </p:ext>
     </p:extLst>
   </p:cSld>
@@ -2780,7 +2804,7 @@
           <p:cNvPr id="1" name="">
             <a:extLst xmlns:a="http://schemas.openxmlformats.org/drawingml/2006/main">
               <a:ext uri="{FF2B5EF4-FFF2-40B4-BE49-F238E27FC236}">
-                <a16:creationId xmlns:a16="http://schemas.microsoft.com/office/drawing/2014/main" id="{3DCEB4B1-2314-4AF2-815A-09E36A13BEBB}"/>
+                <a16:creationId xmlns:a16="http://schemas.microsoft.com/office/drawing/2014/main" id="{5F00742D-B842-4177-A309-1EED51764A19}"/>
               </a:ext>
             </a:extLst>
           </p:cNvPr>
@@ -2792,7 +2816,7 @@
         <p:spPr>
           <a:xfrm xmlns:a="http://schemas.openxmlformats.org/drawingml/2006/main">
             <a:off x="819150" y="590550"/>
-            <a:ext cx="7181850" cy="628650"/>
+            <a:ext cx="5143500" cy="628650"/>
           </a:xfrm>
           <a:prstGeom xmlns:a="http://schemas.openxmlformats.org/drawingml/2006/main" prst="rect">
             <a:avLst/>
@@ -2815,7 +2839,7 @@
                   <a:srgbClr val="17223B"/>
                 </a:solidFill>
               </a:rPr>
-              <a:t>怎么用：面试现场 3 条命令跑通</a:t>
+              <a:t>研发部门怎么落地使用</a:t>
             </a:r>
           </a:p>
         </p:txBody>
@@ -2825,7 +2849,7 @@
           <p:cNvPr id="2" name="">
             <a:extLst xmlns:a="http://schemas.openxmlformats.org/drawingml/2006/main">
               <a:ext uri="{FF2B5EF4-FFF2-40B4-BE49-F238E27FC236}">
-                <a16:creationId xmlns:a16="http://schemas.microsoft.com/office/drawing/2014/main" id="{33B194D1-A250-4154-9EB0-C42EDFAE5D60}"/>
+                <a16:creationId xmlns:a16="http://schemas.microsoft.com/office/drawing/2014/main" id="{443B02A8-D467-4526-9A62-207A3EA27FE6}"/>
               </a:ext>
             </a:extLst>
           </p:cNvPr>
@@ -2837,7 +2861,7 @@
         <p:spPr>
           <a:xfrm xmlns:a="http://schemas.openxmlformats.org/drawingml/2006/main">
             <a:off x="819150" y="1333500"/>
-            <a:ext cx="5829300" cy="552450"/>
+            <a:ext cx="7143750" cy="552450"/>
           </a:xfrm>
           <a:prstGeom xmlns:a="http://schemas.openxmlformats.org/drawingml/2006/main" prst="rect">
             <a:avLst/>
@@ -2860,7 +2884,7 @@
                   <a:srgbClr val="64748B"/>
                 </a:solidFill>
               </a:rPr>
-              <a:t>从样例 PR patch 到 AI Review 报告，不依赖 ROS 真机环境。</a:t>
+              <a:t>建议先以离线 demo 展示，再接入 GitHub/GitLab Webhook 做 2 周试点。</a:t>
             </a:r>
           </a:p>
         </p:txBody>
@@ -2870,7 +2894,7 @@
           <p:cNvPr id="3" name="">
             <a:extLst xmlns:a="http://schemas.openxmlformats.org/drawingml/2006/main">
               <a:ext uri="{FF2B5EF4-FFF2-40B4-BE49-F238E27FC236}">
-                <a16:creationId xmlns:a16="http://schemas.microsoft.com/office/drawing/2014/main" id="{F810ED53-C5E1-4FCD-B118-2DBC9565D5F6}"/>
+                <a16:creationId xmlns:a16="http://schemas.microsoft.com/office/drawing/2014/main" id="{54E2291A-0405-4E8A-AFFB-690A5E869BBF}"/>
               </a:ext>
             </a:extLst>
           </p:cNvPr>
@@ -2899,7 +2923,7 @@
           <p:cNvPr id="4" name="">
             <a:extLst xmlns:a="http://schemas.openxmlformats.org/drawingml/2006/main">
               <a:ext uri="{FF2B5EF4-FFF2-40B4-BE49-F238E27FC236}">
-                <a16:creationId xmlns:a16="http://schemas.microsoft.com/office/drawing/2014/main" id="{582FDA45-91B6-4858-80B7-4066D70C083E}"/>
+                <a16:creationId xmlns:a16="http://schemas.microsoft.com/office/drawing/2014/main" id="{0003B35C-4BC9-4B0F-9424-E342F7ED09DE}"/>
               </a:ext>
             </a:extLst>
           </p:cNvPr>
@@ -2944,7 +2968,7 @@
           <p:cNvPr id="5" name="">
             <a:extLst xmlns:a="http://schemas.openxmlformats.org/drawingml/2006/main">
               <a:ext uri="{FF2B5EF4-FFF2-40B4-BE49-F238E27FC236}">
-                <a16:creationId xmlns:a16="http://schemas.microsoft.com/office/drawing/2014/main" id="{1716F779-68E1-4B97-96A5-36ACB5DD0E2E}"/>
+                <a16:creationId xmlns:a16="http://schemas.microsoft.com/office/drawing/2014/main" id="{B9609CA9-777D-4462-B9EA-50EF7BF143FA}"/>
               </a:ext>
             </a:extLst>
           </p:cNvPr>
@@ -2956,7 +2980,7 @@
         <p:spPr>
           <a:xfrm xmlns:a="http://schemas.openxmlformats.org/drawingml/2006/main">
             <a:off x="1524000" y="2209800"/>
-            <a:ext cx="6229350" cy="285750"/>
+            <a:ext cx="6953250" cy="285750"/>
           </a:xfrm>
           <a:prstGeom xmlns:a="http://schemas.openxmlformats.org/drawingml/2006/main" prst="rect">
             <a:avLst/>
@@ -2979,7 +3003,7 @@
                   <a:srgbClr val="1F2937"/>
                 </a:solidFill>
               </a:rPr>
-              <a:t>进入工程</a:t>
+              <a:t>开发者提交 PR</a:t>
             </a:r>
           </a:p>
         </p:txBody>
@@ -2989,7 +3013,7 @@
           <p:cNvPr id="6" name="">
             <a:extLst xmlns:a="http://schemas.openxmlformats.org/drawingml/2006/main">
               <a:ext uri="{FF2B5EF4-FFF2-40B4-BE49-F238E27FC236}">
-                <a16:creationId xmlns:a16="http://schemas.microsoft.com/office/drawing/2014/main" id="{FE06208A-E268-4378-B1D2-B90B76F8D85F}"/>
+                <a16:creationId xmlns:a16="http://schemas.microsoft.com/office/drawing/2014/main" id="{371CBB0F-333D-4092-AE24-53A937EF30C1}"/>
               </a:ext>
             </a:extLst>
           </p:cNvPr>
@@ -3001,7 +3025,7 @@
         <p:spPr>
           <a:xfrm xmlns:a="http://schemas.openxmlformats.org/drawingml/2006/main">
             <a:off x="1524000" y="2552700"/>
-            <a:ext cx="2667000" cy="209550"/>
+            <a:ext cx="3181350" cy="209550"/>
           </a:xfrm>
           <a:prstGeom xmlns:a="http://schemas.openxmlformats.org/drawingml/2006/main" prst="rect">
             <a:avLst/>
@@ -3024,7 +3048,7 @@
                   <a:srgbClr val="64748B"/>
                 </a:solidFill>
               </a:rPr>
-              <a:t>cd D:\person-follow-ai-reviewer-demo</a:t>
+              <a:t>工具读取 diff，解析变更文件和新增行号。</a:t>
             </a:r>
           </a:p>
         </p:txBody>
@@ -3034,18 +3058,18 @@
           <p:cNvPr id="7" name="">
             <a:extLst xmlns:a="http://schemas.openxmlformats.org/drawingml/2006/main">
               <a:ext uri="{FF2B5EF4-FFF2-40B4-BE49-F238E27FC236}">
-                <a16:creationId xmlns:a16="http://schemas.microsoft.com/office/drawing/2014/main" id="{82FE184F-20B1-4B70-A3B6-43744FEFD7F1}"/>
-              </a:ext>
-            </a:extLst>
-          </p:cNvPr>
-          <p:cNvSpPr>
-            <a:spLocks xmlns:a="http://schemas.openxmlformats.org/drawingml/2006/main" noGrp="1"/>
-          </p:cNvSpPr>
-          <p:nvPr/>
-        </p:nvSpPr>
-        <p:spPr>
-          <a:xfrm xmlns:a="http://schemas.openxmlformats.org/drawingml/2006/main">
-            <a:off x="819150" y="3067050"/>
+                <a16:creationId xmlns:a16="http://schemas.microsoft.com/office/drawing/2014/main" id="{334B55C4-487E-4956-900C-85EA4C0EDA42}"/>
+              </a:ext>
+            </a:extLst>
+          </p:cNvPr>
+          <p:cNvSpPr>
+            <a:spLocks xmlns:a="http://schemas.openxmlformats.org/drawingml/2006/main" noGrp="1"/>
+          </p:cNvSpPr>
+          <p:nvPr/>
+        </p:nvSpPr>
+        <p:spPr>
+          <a:xfrm xmlns:a="http://schemas.openxmlformats.org/drawingml/2006/main">
+            <a:off x="819150" y="3028950"/>
             <a:ext cx="533400" cy="533400"/>
           </a:xfrm>
           <a:prstGeom xmlns:a="http://schemas.openxmlformats.org/drawingml/2006/main" prst="roundRect">
@@ -3063,18 +3087,18 @@
           <p:cNvPr id="8" name="">
             <a:extLst xmlns:a="http://schemas.openxmlformats.org/drawingml/2006/main">
               <a:ext uri="{FF2B5EF4-FFF2-40B4-BE49-F238E27FC236}">
-                <a16:creationId xmlns:a16="http://schemas.microsoft.com/office/drawing/2014/main" id="{7DB3703B-497F-45F0-A947-90AA913C717B}"/>
-              </a:ext>
-            </a:extLst>
-          </p:cNvPr>
-          <p:cNvSpPr>
-            <a:spLocks xmlns:a="http://schemas.openxmlformats.org/drawingml/2006/main" noGrp="1"/>
-          </p:cNvSpPr>
-          <p:nvPr/>
-        </p:nvSpPr>
-        <p:spPr>
-          <a:xfrm xmlns:a="http://schemas.openxmlformats.org/drawingml/2006/main">
-            <a:off x="1028700" y="3200400"/>
+                <a16:creationId xmlns:a16="http://schemas.microsoft.com/office/drawing/2014/main" id="{88668914-8D3E-4A29-A646-9800C4AD0556}"/>
+              </a:ext>
+            </a:extLst>
+          </p:cNvPr>
+          <p:cNvSpPr>
+            <a:spLocks xmlns:a="http://schemas.openxmlformats.org/drawingml/2006/main" noGrp="1"/>
+          </p:cNvSpPr>
+          <p:nvPr/>
+        </p:nvSpPr>
+        <p:spPr>
+          <a:xfrm xmlns:a="http://schemas.openxmlformats.org/drawingml/2006/main">
+            <a:off x="1028700" y="3162300"/>
             <a:ext cx="114300" cy="266700"/>
           </a:xfrm>
           <a:prstGeom xmlns:a="http://schemas.openxmlformats.org/drawingml/2006/main" prst="rect">
@@ -3108,19 +3132,19 @@
           <p:cNvPr id="9" name="">
             <a:extLst xmlns:a="http://schemas.openxmlformats.org/drawingml/2006/main">
               <a:ext uri="{FF2B5EF4-FFF2-40B4-BE49-F238E27FC236}">
-                <a16:creationId xmlns:a16="http://schemas.microsoft.com/office/drawing/2014/main" id="{8CCA31EC-75CF-40DD-9442-D9E8E250AED2}"/>
-              </a:ext>
-            </a:extLst>
-          </p:cNvPr>
-          <p:cNvSpPr>
-            <a:spLocks xmlns:a="http://schemas.openxmlformats.org/drawingml/2006/main" noGrp="1"/>
-          </p:cNvSpPr>
-          <p:nvPr/>
-        </p:nvSpPr>
-        <p:spPr>
-          <a:xfrm xmlns:a="http://schemas.openxmlformats.org/drawingml/2006/main">
-            <a:off x="1524000" y="3067050"/>
-            <a:ext cx="6229350" cy="285750"/>
+                <a16:creationId xmlns:a16="http://schemas.microsoft.com/office/drawing/2014/main" id="{5EA99EB1-718A-4DCD-B032-BE09BC0B7425}"/>
+              </a:ext>
+            </a:extLst>
+          </p:cNvPr>
+          <p:cNvSpPr>
+            <a:spLocks xmlns:a="http://schemas.openxmlformats.org/drawingml/2006/main" noGrp="1"/>
+          </p:cNvSpPr>
+          <p:nvPr/>
+        </p:nvSpPr>
+        <p:spPr>
+          <a:xfrm xmlns:a="http://schemas.openxmlformats.org/drawingml/2006/main">
+            <a:off x="1524000" y="3028950"/>
+            <a:ext cx="6953250" cy="285750"/>
           </a:xfrm>
           <a:prstGeom xmlns:a="http://schemas.openxmlformats.org/drawingml/2006/main" prst="rect">
             <a:avLst/>
@@ -3143,7 +3167,7 @@
                   <a:srgbClr val="1F2937"/>
                 </a:solidFill>
               </a:rPr>
-              <a:t>跑工具单测</a:t>
+              <a:t>自动定位上下文</a:t>
             </a:r>
           </a:p>
         </p:txBody>
@@ -3153,19 +3177,19 @@
           <p:cNvPr id="10" name="">
             <a:extLst xmlns:a="http://schemas.openxmlformats.org/drawingml/2006/main">
               <a:ext uri="{FF2B5EF4-FFF2-40B4-BE49-F238E27FC236}">
-                <a16:creationId xmlns:a16="http://schemas.microsoft.com/office/drawing/2014/main" id="{1891AA9A-4289-458C-A56B-894A2C6080EC}"/>
-              </a:ext>
-            </a:extLst>
-          </p:cNvPr>
-          <p:cNvSpPr>
-            <a:spLocks xmlns:a="http://schemas.openxmlformats.org/drawingml/2006/main" noGrp="1"/>
-          </p:cNvSpPr>
-          <p:nvPr/>
-        </p:nvSpPr>
-        <p:spPr>
-          <a:xfrm xmlns:a="http://schemas.openxmlformats.org/drawingml/2006/main">
-            <a:off x="1524000" y="3409950"/>
-            <a:ext cx="2438400" cy="209550"/>
+                <a16:creationId xmlns:a16="http://schemas.microsoft.com/office/drawing/2014/main" id="{69FEB369-5ED3-4E9D-B5F8-E64FC656EF1F}"/>
+              </a:ext>
+            </a:extLst>
+          </p:cNvPr>
+          <p:cNvSpPr>
+            <a:spLocks xmlns:a="http://schemas.openxmlformats.org/drawingml/2006/main" noGrp="1"/>
+          </p:cNvSpPr>
+          <p:nvPr/>
+        </p:nvSpPr>
+        <p:spPr>
+          <a:xfrm xmlns:a="http://schemas.openxmlformats.org/drawingml/2006/main">
+            <a:off x="1524000" y="3371850"/>
+            <a:ext cx="3390900" cy="419100"/>
           </a:xfrm>
           <a:prstGeom xmlns:a="http://schemas.openxmlformats.org/drawingml/2006/main" prst="rect">
             <a:avLst/>
@@ -3188,7 +3212,7 @@
                   <a:srgbClr val="64748B"/>
                 </a:solidFill>
               </a:rPr>
-              <a:t>python -m unittest discover -s tests</a:t>
+              <a:t>AST 定位函数级上下文，检索项目风险规则。</a:t>
             </a:r>
           </a:p>
         </p:txBody>
@@ -3198,18 +3222,18 @@
           <p:cNvPr id="11" name="">
             <a:extLst xmlns:a="http://schemas.openxmlformats.org/drawingml/2006/main">
               <a:ext uri="{FF2B5EF4-FFF2-40B4-BE49-F238E27FC236}">
-                <a16:creationId xmlns:a16="http://schemas.microsoft.com/office/drawing/2014/main" id="{32272767-DF07-45D7-B7DA-7F9664CB403D}"/>
-              </a:ext>
-            </a:extLst>
-          </p:cNvPr>
-          <p:cNvSpPr>
-            <a:spLocks xmlns:a="http://schemas.openxmlformats.org/drawingml/2006/main" noGrp="1"/>
-          </p:cNvSpPr>
-          <p:nvPr/>
-        </p:nvSpPr>
-        <p:spPr>
-          <a:xfrm xmlns:a="http://schemas.openxmlformats.org/drawingml/2006/main">
-            <a:off x="819150" y="3920490"/>
+                <a16:creationId xmlns:a16="http://schemas.microsoft.com/office/drawing/2014/main" id="{53BF12DC-CFC6-4526-8F5A-DD2B9433D5DD}"/>
+              </a:ext>
+            </a:extLst>
+          </p:cNvPr>
+          <p:cNvSpPr>
+            <a:spLocks xmlns:a="http://schemas.openxmlformats.org/drawingml/2006/main" noGrp="1"/>
+          </p:cNvSpPr>
+          <p:nvPr/>
+        </p:nvSpPr>
+        <p:spPr>
+          <a:xfrm xmlns:a="http://schemas.openxmlformats.org/drawingml/2006/main">
+            <a:off x="819150" y="4050030"/>
             <a:ext cx="533400" cy="533400"/>
           </a:xfrm>
           <a:prstGeom xmlns:a="http://schemas.openxmlformats.org/drawingml/2006/main" prst="roundRect">
@@ -3227,18 +3251,18 @@
           <p:cNvPr id="12" name="">
             <a:extLst xmlns:a="http://schemas.openxmlformats.org/drawingml/2006/main">
               <a:ext uri="{FF2B5EF4-FFF2-40B4-BE49-F238E27FC236}">
-                <a16:creationId xmlns:a16="http://schemas.microsoft.com/office/drawing/2014/main" id="{28187B23-D0F2-4841-B982-142AB5C2B6C9}"/>
-              </a:ext>
-            </a:extLst>
-          </p:cNvPr>
-          <p:cNvSpPr>
-            <a:spLocks xmlns:a="http://schemas.openxmlformats.org/drawingml/2006/main" noGrp="1"/>
-          </p:cNvSpPr>
-          <p:nvPr/>
-        </p:nvSpPr>
-        <p:spPr>
-          <a:xfrm xmlns:a="http://schemas.openxmlformats.org/drawingml/2006/main">
-            <a:off x="1028700" y="4057650"/>
+                <a16:creationId xmlns:a16="http://schemas.microsoft.com/office/drawing/2014/main" id="{E620A889-1B41-4BF8-9450-55FA3190C036}"/>
+              </a:ext>
+            </a:extLst>
+          </p:cNvPr>
+          <p:cNvSpPr>
+            <a:spLocks xmlns:a="http://schemas.openxmlformats.org/drawingml/2006/main" noGrp="1"/>
+          </p:cNvSpPr>
+          <p:nvPr/>
+        </p:nvSpPr>
+        <p:spPr>
+          <a:xfrm xmlns:a="http://schemas.openxmlformats.org/drawingml/2006/main">
+            <a:off x="1028700" y="4191000"/>
             <a:ext cx="114300" cy="266700"/>
           </a:xfrm>
           <a:prstGeom xmlns:a="http://schemas.openxmlformats.org/drawingml/2006/main" prst="rect">
@@ -3272,19 +3296,19 @@
           <p:cNvPr id="13" name="">
             <a:extLst xmlns:a="http://schemas.openxmlformats.org/drawingml/2006/main">
               <a:ext uri="{FF2B5EF4-FFF2-40B4-BE49-F238E27FC236}">
-                <a16:creationId xmlns:a16="http://schemas.microsoft.com/office/drawing/2014/main" id="{20462355-39EE-4747-BE26-0F992863D663}"/>
-              </a:ext>
-            </a:extLst>
-          </p:cNvPr>
-          <p:cNvSpPr>
-            <a:spLocks xmlns:a="http://schemas.openxmlformats.org/drawingml/2006/main" noGrp="1"/>
-          </p:cNvSpPr>
-          <p:nvPr/>
-        </p:nvSpPr>
-        <p:spPr>
-          <a:xfrm xmlns:a="http://schemas.openxmlformats.org/drawingml/2006/main">
-            <a:off x="1524000" y="3924300"/>
-            <a:ext cx="6229350" cy="285750"/>
+                <a16:creationId xmlns:a16="http://schemas.microsoft.com/office/drawing/2014/main" id="{DA603034-4FE0-4967-978F-F9F5C121589B}"/>
+              </a:ext>
+            </a:extLst>
+          </p:cNvPr>
+          <p:cNvSpPr>
+            <a:spLocks xmlns:a="http://schemas.openxmlformats.org/drawingml/2006/main" noGrp="1"/>
+          </p:cNvSpPr>
+          <p:nvPr/>
+        </p:nvSpPr>
+        <p:spPr>
+          <a:xfrm xmlns:a="http://schemas.openxmlformats.org/drawingml/2006/main">
+            <a:off x="1524000" y="4057650"/>
+            <a:ext cx="6953250" cy="285750"/>
           </a:xfrm>
           <a:prstGeom xmlns:a="http://schemas.openxmlformats.org/drawingml/2006/main" prst="rect">
             <a:avLst/>
@@ -3307,7 +3331,7 @@
                   <a:srgbClr val="1F2937"/>
                 </a:solidFill>
               </a:rPr>
-              <a:t>生成评审报告</a:t>
+              <a:t>AI 生成初筛报告</a:t>
             </a:r>
           </a:p>
         </p:txBody>
@@ -3317,19 +3341,19 @@
           <p:cNvPr id="14" name="">
             <a:extLst xmlns:a="http://schemas.openxmlformats.org/drawingml/2006/main">
               <a:ext uri="{FF2B5EF4-FFF2-40B4-BE49-F238E27FC236}">
-                <a16:creationId xmlns:a16="http://schemas.microsoft.com/office/drawing/2014/main" id="{13EAD8FE-541E-43B1-9ADA-858F350C6A42}"/>
-              </a:ext>
-            </a:extLst>
-          </p:cNvPr>
-          <p:cNvSpPr>
-            <a:spLocks xmlns:a="http://schemas.openxmlformats.org/drawingml/2006/main" noGrp="1"/>
-          </p:cNvSpPr>
-          <p:nvPr/>
-        </p:nvSpPr>
-        <p:spPr>
-          <a:xfrm xmlns:a="http://schemas.openxmlformats.org/drawingml/2006/main">
-            <a:off x="1524000" y="4267200"/>
-            <a:ext cx="6324600" cy="419100"/>
+                <a16:creationId xmlns:a16="http://schemas.microsoft.com/office/drawing/2014/main" id="{CDD5C7D0-C5CC-4CCE-BD12-BAABA578DFAA}"/>
+              </a:ext>
+            </a:extLst>
+          </p:cNvPr>
+          <p:cNvSpPr>
+            <a:spLocks xmlns:a="http://schemas.openxmlformats.org/drawingml/2006/main" noGrp="1"/>
+          </p:cNvSpPr>
+          <p:nvPr/>
+        </p:nvSpPr>
+        <p:spPr>
+          <a:xfrm xmlns:a="http://schemas.openxmlformats.org/drawingml/2006/main">
+            <a:off x="1524000" y="4400550"/>
+            <a:ext cx="4629150" cy="209550"/>
           </a:xfrm>
           <a:prstGeom xmlns:a="http://schemas.openxmlformats.org/drawingml/2006/main" prst="rect">
             <a:avLst/>
@@ -3352,7 +3376,7 @@
                   <a:srgbClr val="64748B"/>
                 </a:solidFill>
               </a:rPr>
-              <a:t>python -m ai_review_bot.cli --repo sample_repo --diff examples\risky_person_follow.patch --include-prompt --output reports\demo_review.md</a:t>
+              <a:t>输出风险等级、命中函数、测试建议和需要人工确认的问题。</a:t>
             </a:r>
           </a:p>
         </p:txBody>
@@ -3362,19 +3386,183 @@
           <p:cNvPr id="15" name="">
             <a:extLst xmlns:a="http://schemas.openxmlformats.org/drawingml/2006/main">
               <a:ext uri="{FF2B5EF4-FFF2-40B4-BE49-F238E27FC236}">
-                <a16:creationId xmlns:a16="http://schemas.microsoft.com/office/drawing/2014/main" id="{DB0EA86B-3A25-44EB-A64C-E5C5AD6C80E2}"/>
-              </a:ext>
-            </a:extLst>
-          </p:cNvPr>
-          <p:cNvSpPr>
-            <a:spLocks xmlns:a="http://schemas.openxmlformats.org/drawingml/2006/main" noGrp="1"/>
-          </p:cNvSpPr>
-          <p:nvPr/>
-        </p:nvSpPr>
-        <p:spPr>
-          <a:xfrm xmlns:a="http://schemas.openxmlformats.org/drawingml/2006/main">
-            <a:off x="8282559" y="2213610"/>
-            <a:ext cx="9186291" cy="7482840"/>
+                <a16:creationId xmlns:a16="http://schemas.microsoft.com/office/drawing/2014/main" id="{90694521-6968-4B97-834F-BAEE44AEF802}"/>
+              </a:ext>
+            </a:extLst>
+          </p:cNvPr>
+          <p:cNvSpPr>
+            <a:spLocks xmlns:a="http://schemas.openxmlformats.org/drawingml/2006/main" noGrp="1"/>
+          </p:cNvSpPr>
+          <p:nvPr/>
+        </p:nvSpPr>
+        <p:spPr>
+          <a:xfrm xmlns:a="http://schemas.openxmlformats.org/drawingml/2006/main">
+            <a:off x="819150" y="4865370"/>
+            <a:ext cx="533400" cy="533400"/>
+          </a:xfrm>
+          <a:prstGeom xmlns:a="http://schemas.openxmlformats.org/drawingml/2006/main" prst="roundRect">
+            <a:avLst>
+              <a:gd name="adj" fmla="val 50000"/>
+            </a:avLst>
+          </a:prstGeom>
+          <a:solidFill xmlns:a="http://schemas.openxmlformats.org/drawingml/2006/main">
+            <a:srgbClr val="E11D48"/>
+          </a:solidFill>
+        </p:spPr>
+      </p:sp>
+      <p:sp>
+        <p:nvSpPr>
+          <p:cNvPr id="16" name="">
+            <a:extLst xmlns:a="http://schemas.openxmlformats.org/drawingml/2006/main">
+              <a:ext uri="{FF2B5EF4-FFF2-40B4-BE49-F238E27FC236}">
+                <a16:creationId xmlns:a16="http://schemas.microsoft.com/office/drawing/2014/main" id="{D4E20644-6583-4738-8596-BB4DCE2E813A}"/>
+              </a:ext>
+            </a:extLst>
+          </p:cNvPr>
+          <p:cNvSpPr>
+            <a:spLocks xmlns:a="http://schemas.openxmlformats.org/drawingml/2006/main" noGrp="1"/>
+          </p:cNvSpPr>
+          <p:nvPr/>
+        </p:nvSpPr>
+        <p:spPr>
+          <a:xfrm xmlns:a="http://schemas.openxmlformats.org/drawingml/2006/main">
+            <a:off x="1028700" y="4991100"/>
+            <a:ext cx="114300" cy="266700"/>
+          </a:xfrm>
+          <a:prstGeom xmlns:a="http://schemas.openxmlformats.org/drawingml/2006/main" prst="rect">
+            <a:avLst/>
+          </a:prstGeom>
+        </p:spPr>
+        <p:txBody>
+          <a:bodyPr xmlns:a="http://schemas.openxmlformats.org/drawingml/2006/main" lIns="0" tIns="0" rIns="0" bIns="0"/>
+          <a:lstStyle xmlns:a="http://schemas.openxmlformats.org/drawingml/2006/main"/>
+          <a:p xmlns:a="http://schemas.openxmlformats.org/drawingml/2006/main">
+            <a:pPr>
+              <a:defRPr sz="1725" b="1">
+                <a:solidFill>
+                  <a:srgbClr val="FFFFFF"/>
+                </a:solidFill>
+              </a:defRPr>
+            </a:pPr>
+            <a:r>
+              <a:rPr sz="1725" b="1">
+                <a:solidFill>
+                  <a:srgbClr val="FFFFFF"/>
+                </a:solidFill>
+              </a:rPr>
+              <a:t>4</a:t>
+            </a:r>
+          </a:p>
+        </p:txBody>
+      </p:sp>
+      <p:sp>
+        <p:nvSpPr>
+          <p:cNvPr id="17" name="">
+            <a:extLst xmlns:a="http://schemas.openxmlformats.org/drawingml/2006/main">
+              <a:ext uri="{FF2B5EF4-FFF2-40B4-BE49-F238E27FC236}">
+                <a16:creationId xmlns:a16="http://schemas.microsoft.com/office/drawing/2014/main" id="{1DF11346-AD77-43FE-8D38-9D7EDB39E663}"/>
+              </a:ext>
+            </a:extLst>
+          </p:cNvPr>
+          <p:cNvSpPr>
+            <a:spLocks xmlns:a="http://schemas.openxmlformats.org/drawingml/2006/main" noGrp="1"/>
+          </p:cNvSpPr>
+          <p:nvPr/>
+        </p:nvSpPr>
+        <p:spPr>
+          <a:xfrm xmlns:a="http://schemas.openxmlformats.org/drawingml/2006/main">
+            <a:off x="1524000" y="4857750"/>
+            <a:ext cx="6953250" cy="285750"/>
+          </a:xfrm>
+          <a:prstGeom xmlns:a="http://schemas.openxmlformats.org/drawingml/2006/main" prst="rect">
+            <a:avLst/>
+          </a:prstGeom>
+        </p:spPr>
+        <p:txBody>
+          <a:bodyPr xmlns:a="http://schemas.openxmlformats.org/drawingml/2006/main" lIns="0" tIns="0" rIns="0" bIns="0"/>
+          <a:lstStyle xmlns:a="http://schemas.openxmlformats.org/drawingml/2006/main"/>
+          <a:p xmlns:a="http://schemas.openxmlformats.org/drawingml/2006/main">
+            <a:pPr>
+              <a:defRPr sz="1875" b="1">
+                <a:solidFill>
+                  <a:srgbClr val="1F2937"/>
+                </a:solidFill>
+              </a:defRPr>
+            </a:pPr>
+            <a:r>
+              <a:rPr sz="1875" b="1">
+                <a:solidFill>
+                  <a:srgbClr val="1F2937"/>
+                </a:solidFill>
+              </a:rPr>
+              <a:t>Reviewer 关闭闭环</a:t>
+            </a:r>
+          </a:p>
+        </p:txBody>
+      </p:sp>
+      <p:sp>
+        <p:nvSpPr>
+          <p:cNvPr id="18" name="">
+            <a:extLst xmlns:a="http://schemas.openxmlformats.org/drawingml/2006/main">
+              <a:ext uri="{FF2B5EF4-FFF2-40B4-BE49-F238E27FC236}">
+                <a16:creationId xmlns:a16="http://schemas.microsoft.com/office/drawing/2014/main" id="{C596C84C-04F6-4D6D-B4F6-43157D979714}"/>
+              </a:ext>
+            </a:extLst>
+          </p:cNvPr>
+          <p:cNvSpPr>
+            <a:spLocks xmlns:a="http://schemas.openxmlformats.org/drawingml/2006/main" noGrp="1"/>
+          </p:cNvSpPr>
+          <p:nvPr/>
+        </p:nvSpPr>
+        <p:spPr>
+          <a:xfrm xmlns:a="http://schemas.openxmlformats.org/drawingml/2006/main">
+            <a:off x="1524000" y="5200650"/>
+            <a:ext cx="3771900" cy="209550"/>
+          </a:xfrm>
+          <a:prstGeom xmlns:a="http://schemas.openxmlformats.org/drawingml/2006/main" prst="rect">
+            <a:avLst/>
+          </a:prstGeom>
+        </p:spPr>
+        <p:txBody>
+          <a:bodyPr xmlns:a="http://schemas.openxmlformats.org/drawingml/2006/main" lIns="0" tIns="0" rIns="0" bIns="0"/>
+          <a:lstStyle xmlns:a="http://schemas.openxmlformats.org/drawingml/2006/main"/>
+          <a:p xmlns:a="http://schemas.openxmlformats.org/drawingml/2006/main">
+            <a:pPr>
+              <a:defRPr sz="1350">
+                <a:solidFill>
+                  <a:srgbClr val="64748B"/>
+                </a:solidFill>
+              </a:defRPr>
+            </a:pPr>
+            <a:r>
+              <a:rPr sz="1350">
+                <a:solidFill>
+                  <a:srgbClr val="64748B"/>
+                </a:solidFill>
+              </a:rPr>
+              <a:t>人工确认、采纳或忽略建议，结果进入团队度量。</a:t>
+            </a:r>
+          </a:p>
+        </p:txBody>
+      </p:sp>
+      <p:sp>
+        <p:nvSpPr>
+          <p:cNvPr id="19" name="">
+            <a:extLst xmlns:a="http://schemas.openxmlformats.org/drawingml/2006/main">
+              <a:ext uri="{FF2B5EF4-FFF2-40B4-BE49-F238E27FC236}">
+                <a16:creationId xmlns:a16="http://schemas.microsoft.com/office/drawing/2014/main" id="{5F339B78-46AA-476B-9D8F-770E356D7631}"/>
+              </a:ext>
+            </a:extLst>
+          </p:cNvPr>
+          <p:cNvSpPr>
+            <a:spLocks xmlns:a="http://schemas.openxmlformats.org/drawingml/2006/main" noGrp="1"/>
+          </p:cNvSpPr>
+          <p:nvPr/>
+        </p:nvSpPr>
+        <p:spPr>
+          <a:xfrm xmlns:a="http://schemas.openxmlformats.org/drawingml/2006/main">
+            <a:off x="8997791" y="2213610"/>
+            <a:ext cx="8471059" cy="7482840"/>
           </a:xfrm>
           <a:prstGeom xmlns:a="http://schemas.openxmlformats.org/drawingml/2006/main" prst="roundRect">
             <a:avLst>
@@ -3388,22 +3576,22 @@
       </p:sp>
       <p:sp>
         <p:nvSpPr>
-          <p:cNvPr id="16" name="">
-            <a:extLst xmlns:a="http://schemas.openxmlformats.org/drawingml/2006/main">
-              <a:ext uri="{FF2B5EF4-FFF2-40B4-BE49-F238E27FC236}">
-                <a16:creationId xmlns:a16="http://schemas.microsoft.com/office/drawing/2014/main" id="{21546E85-3930-4F7F-A600-6DFE05EF01EE}"/>
-              </a:ext>
-            </a:extLst>
-          </p:cNvPr>
-          <p:cNvSpPr>
-            <a:spLocks xmlns:a="http://schemas.openxmlformats.org/drawingml/2006/main" noGrp="1"/>
-          </p:cNvSpPr>
-          <p:nvPr/>
-        </p:nvSpPr>
-        <p:spPr>
-          <a:xfrm xmlns:a="http://schemas.openxmlformats.org/drawingml/2006/main">
-            <a:off x="8629650" y="2552700"/>
-            <a:ext cx="8496300" cy="285750"/>
+          <p:cNvPr id="20" name="">
+            <a:extLst xmlns:a="http://schemas.openxmlformats.org/drawingml/2006/main">
+              <a:ext uri="{FF2B5EF4-FFF2-40B4-BE49-F238E27FC236}">
+                <a16:creationId xmlns:a16="http://schemas.microsoft.com/office/drawing/2014/main" id="{36BDB622-D366-4104-917A-BBA1C7B77CE6}"/>
+              </a:ext>
+            </a:extLst>
+          </p:cNvPr>
+          <p:cNvSpPr>
+            <a:spLocks xmlns:a="http://schemas.openxmlformats.org/drawingml/2006/main" noGrp="1"/>
+          </p:cNvSpPr>
+          <p:nvPr/>
+        </p:nvSpPr>
+        <p:spPr>
+          <a:xfrm xmlns:a="http://schemas.openxmlformats.org/drawingml/2006/main">
+            <a:off x="9334500" y="2552700"/>
+            <a:ext cx="7791450" cy="285750"/>
           </a:xfrm>
           <a:prstGeom xmlns:a="http://schemas.openxmlformats.org/drawingml/2006/main" prst="rect">
             <a:avLst/>
@@ -3426,74 +3614,108 @@
                   <a:srgbClr val="C7D2FE"/>
                 </a:solidFill>
               </a:rPr>
-              <a:t>输出文件</a:t>
-            </a:r>
-          </a:p>
-        </p:txBody>
-      </p:sp>
-      <p:sp>
-        <p:nvSpPr>
-          <p:cNvPr id="17" name="">
-            <a:extLst xmlns:a="http://schemas.openxmlformats.org/drawingml/2006/main">
-              <a:ext uri="{FF2B5EF4-FFF2-40B4-BE49-F238E27FC236}">
-                <a16:creationId xmlns:a16="http://schemas.microsoft.com/office/drawing/2014/main" id="{50023D72-91D8-44A0-8417-FC6073E6A60D}"/>
-              </a:ext>
-            </a:extLst>
-          </p:cNvPr>
-          <p:cNvSpPr>
-            <a:spLocks xmlns:a="http://schemas.openxmlformats.org/drawingml/2006/main" noGrp="1"/>
-          </p:cNvSpPr>
-          <p:nvPr/>
-        </p:nvSpPr>
-        <p:spPr>
-          <a:xfrm xmlns:a="http://schemas.openxmlformats.org/drawingml/2006/main">
-            <a:off x="8629650" y="3009900"/>
-            <a:ext cx="8496300" cy="400050"/>
-          </a:xfrm>
-          <a:prstGeom xmlns:a="http://schemas.openxmlformats.org/drawingml/2006/main" prst="rect">
-            <a:avLst/>
-          </a:prstGeom>
-        </p:spPr>
-        <p:txBody>
-          <a:bodyPr xmlns:a="http://schemas.openxmlformats.org/drawingml/2006/main" lIns="0" tIns="0" rIns="0" bIns="0"/>
-          <a:lstStyle xmlns:a="http://schemas.openxmlformats.org/drawingml/2006/main"/>
-          <a:p xmlns:a="http://schemas.openxmlformats.org/drawingml/2006/main">
-            <a:pPr>
-              <a:defRPr sz="2550" b="1">
-                <a:solidFill>
-                  <a:srgbClr val="FFFFFF"/>
-                </a:solidFill>
-              </a:defRPr>
-            </a:pPr>
-            <a:r>
-              <a:rPr sz="2550" b="1">
-                <a:solidFill>
-                  <a:srgbClr val="FFFFFF"/>
-                </a:solidFill>
-              </a:rPr>
-              <a:t>reports\demo_review.md</a:t>
-            </a:r>
-          </a:p>
-        </p:txBody>
-      </p:sp>
-      <p:sp>
-        <p:nvSpPr>
-          <p:cNvPr id="18" name="">
-            <a:extLst xmlns:a="http://schemas.openxmlformats.org/drawingml/2006/main">
-              <a:ext uri="{FF2B5EF4-FFF2-40B4-BE49-F238E27FC236}">
-                <a16:creationId xmlns:a16="http://schemas.microsoft.com/office/drawing/2014/main" id="{6DB28D71-C61C-46DD-A793-3E0FA01440E0}"/>
-              </a:ext>
-            </a:extLst>
-          </p:cNvPr>
-          <p:cNvSpPr>
-            <a:spLocks xmlns:a="http://schemas.openxmlformats.org/drawingml/2006/main" noGrp="1"/>
-          </p:cNvSpPr>
-          <p:nvPr/>
-        </p:nvSpPr>
-        <p:spPr>
-          <a:xfrm xmlns:a="http://schemas.openxmlformats.org/drawingml/2006/main">
-            <a:off x="8629650" y="3562350"/>
-            <a:ext cx="8496300" cy="19050"/>
+              <a:t>本地演示命令</a:t>
+            </a:r>
+          </a:p>
+        </p:txBody>
+      </p:sp>
+      <p:sp>
+        <p:nvSpPr>
+          <p:cNvPr id="21" name="">
+            <a:extLst xmlns:a="http://schemas.openxmlformats.org/drawingml/2006/main">
+              <a:ext uri="{FF2B5EF4-FFF2-40B4-BE49-F238E27FC236}">
+                <a16:creationId xmlns:a16="http://schemas.microsoft.com/office/drawing/2014/main" id="{01860FAB-06F5-4198-BEB0-7327F5B659BE}"/>
+              </a:ext>
+            </a:extLst>
+          </p:cNvPr>
+          <p:cNvSpPr>
+            <a:spLocks xmlns:a="http://schemas.openxmlformats.org/drawingml/2006/main" noGrp="1"/>
+          </p:cNvSpPr>
+          <p:nvPr/>
+        </p:nvSpPr>
+        <p:spPr>
+          <a:xfrm xmlns:a="http://schemas.openxmlformats.org/drawingml/2006/main">
+            <a:off x="9334500" y="3009900"/>
+            <a:ext cx="5600700" cy="1314450"/>
+          </a:xfrm>
+          <a:prstGeom xmlns:a="http://schemas.openxmlformats.org/drawingml/2006/main" prst="rect">
+            <a:avLst/>
+          </a:prstGeom>
+        </p:spPr>
+        <p:txBody>
+          <a:bodyPr xmlns:a="http://schemas.openxmlformats.org/drawingml/2006/main" lIns="0" tIns="0" rIns="0" bIns="0"/>
+          <a:lstStyle xmlns:a="http://schemas.openxmlformats.org/drawingml/2006/main"/>
+          <a:p xmlns:a="http://schemas.openxmlformats.org/drawingml/2006/main">
+            <a:pPr>
+              <a:defRPr sz="1725">
+                <a:solidFill>
+                  <a:srgbClr val="F8FAFC"/>
+                </a:solidFill>
+              </a:defRPr>
+            </a:pPr>
+            <a:r>
+              <a:rPr sz="1725">
+                <a:solidFill>
+                  <a:srgbClr val="F8FAFC"/>
+                </a:solidFill>
+              </a:rPr>
+              <a:t>cd D:\person-follow-ai-reviewer-demo</a:t>
+            </a:r>
+          </a:p>
+          <a:p xmlns:a="http://schemas.openxmlformats.org/drawingml/2006/main">
+            <a:pPr>
+              <a:defRPr sz="1725">
+                <a:solidFill>
+                  <a:srgbClr val="F8FAFC"/>
+                </a:solidFill>
+              </a:defRPr>
+            </a:pPr>
+            <a:r>
+              <a:rPr sz="1725">
+                <a:solidFill>
+                  <a:srgbClr val="F8FAFC"/>
+                </a:solidFill>
+              </a:rPr>
+              <a:t>python -m unittest discover -s tests</a:t>
+            </a:r>
+          </a:p>
+          <a:p xmlns:a="http://schemas.openxmlformats.org/drawingml/2006/main">
+            <a:pPr>
+              <a:defRPr sz="1725">
+                <a:solidFill>
+                  <a:srgbClr val="F8FAFC"/>
+                </a:solidFill>
+              </a:defRPr>
+            </a:pPr>
+            <a:r>
+              <a:rPr sz="1725">
+                <a:solidFill>
+                  <a:srgbClr val="F8FAFC"/>
+                </a:solidFill>
+              </a:rPr>
+              <a:t>python -m ai_review_bot.cli --repo sample_repo --diff examples\risky_person_follow.patch --include-prompt --output reports\demo_review.md</a:t>
+            </a:r>
+          </a:p>
+        </p:txBody>
+      </p:sp>
+      <p:sp>
+        <p:nvSpPr>
+          <p:cNvPr id="22" name="">
+            <a:extLst xmlns:a="http://schemas.openxmlformats.org/drawingml/2006/main">
+              <a:ext uri="{FF2B5EF4-FFF2-40B4-BE49-F238E27FC236}">
+                <a16:creationId xmlns:a16="http://schemas.microsoft.com/office/drawing/2014/main" id="{B33DEB8C-2AF5-495F-AE31-9414F3991DA4}"/>
+              </a:ext>
+            </a:extLst>
+          </p:cNvPr>
+          <p:cNvSpPr>
+            <a:spLocks xmlns:a="http://schemas.openxmlformats.org/drawingml/2006/main" noGrp="1"/>
+          </p:cNvSpPr>
+          <p:nvPr/>
+        </p:nvSpPr>
+        <p:spPr>
+          <a:xfrm xmlns:a="http://schemas.openxmlformats.org/drawingml/2006/main">
+            <a:off x="9334500" y="4495800"/>
+            <a:ext cx="7791450" cy="19050"/>
           </a:xfrm>
           <a:prstGeom xmlns:a="http://schemas.openxmlformats.org/drawingml/2006/main" prst="rect">
             <a:avLst/>
@@ -3511,141 +3733,90 @@
       </p:sp>
       <p:sp>
         <p:nvSpPr>
-          <p:cNvPr id="19" name="">
-            <a:extLst xmlns:a="http://schemas.openxmlformats.org/drawingml/2006/main">
-              <a:ext uri="{FF2B5EF4-FFF2-40B4-BE49-F238E27FC236}">
-                <a16:creationId xmlns:a16="http://schemas.microsoft.com/office/drawing/2014/main" id="{B2AA4C8E-491D-4D82-8E18-4420D9E83F2D}"/>
-              </a:ext>
-            </a:extLst>
-          </p:cNvPr>
-          <p:cNvSpPr>
-            <a:spLocks xmlns:a="http://schemas.openxmlformats.org/drawingml/2006/main" noGrp="1"/>
-          </p:cNvSpPr>
-          <p:nvPr/>
-        </p:nvSpPr>
-        <p:spPr>
-          <a:xfrm xmlns:a="http://schemas.openxmlformats.org/drawingml/2006/main">
-            <a:off x="8629650" y="3752850"/>
-            <a:ext cx="8496300" cy="266700"/>
-          </a:xfrm>
-          <a:prstGeom xmlns:a="http://schemas.openxmlformats.org/drawingml/2006/main" prst="rect">
-            <a:avLst/>
-          </a:prstGeom>
-        </p:spPr>
-        <p:txBody>
-          <a:bodyPr xmlns:a="http://schemas.openxmlformats.org/drawingml/2006/main" lIns="0" tIns="0" rIns="0" bIns="0"/>
-          <a:lstStyle xmlns:a="http://schemas.openxmlformats.org/drawingml/2006/main"/>
-          <a:p xmlns:a="http://schemas.openxmlformats.org/drawingml/2006/main">
-            <a:pPr>
-              <a:defRPr sz="1650">
-                <a:solidFill>
-                  <a:srgbClr val="CBD5E1"/>
-                </a:solidFill>
-              </a:defRPr>
-            </a:pPr>
-            <a:r>
-              <a:rPr sz="1650">
-                <a:solidFill>
-                  <a:srgbClr val="CBD5E1"/>
-                </a:solidFill>
-              </a:rPr>
-              <a:t>报告里直接展示：</a:t>
-            </a:r>
-          </a:p>
-        </p:txBody>
-      </p:sp>
-      <p:sp>
-        <p:nvSpPr>
-          <p:cNvPr id="20" name="">
-            <a:extLst xmlns:a="http://schemas.openxmlformats.org/drawingml/2006/main">
-              <a:ext uri="{FF2B5EF4-FFF2-40B4-BE49-F238E27FC236}">
-                <a16:creationId xmlns:a16="http://schemas.microsoft.com/office/drawing/2014/main" id="{4DD79ACC-22FA-4776-BF25-E169F7754BFA}"/>
-              </a:ext>
-            </a:extLst>
-          </p:cNvPr>
-          <p:cNvSpPr>
-            <a:spLocks xmlns:a="http://schemas.openxmlformats.org/drawingml/2006/main" noGrp="1"/>
-          </p:cNvSpPr>
-          <p:nvPr/>
-        </p:nvSpPr>
-        <p:spPr>
-          <a:xfrm xmlns:a="http://schemas.openxmlformats.org/drawingml/2006/main">
-            <a:off x="8629650" y="4171950"/>
-            <a:ext cx="5581650" cy="1104900"/>
-          </a:xfrm>
-          <a:prstGeom xmlns:a="http://schemas.openxmlformats.org/drawingml/2006/main" prst="rect">
-            <a:avLst/>
-          </a:prstGeom>
-        </p:spPr>
-        <p:txBody>
-          <a:bodyPr xmlns:a="http://schemas.openxmlformats.org/drawingml/2006/main" lIns="0" tIns="0" rIns="0" bIns="0"/>
-          <a:lstStyle xmlns:a="http://schemas.openxmlformats.org/drawingml/2006/main"/>
-          <a:p xmlns:a="http://schemas.openxmlformats.org/drawingml/2006/main">
-            <a:pPr>
-              <a:defRPr sz="1800">
+          <p:cNvPr id="23" name="">
+            <a:extLst xmlns:a="http://schemas.openxmlformats.org/drawingml/2006/main">
+              <a:ext uri="{FF2B5EF4-FFF2-40B4-BE49-F238E27FC236}">
+                <a16:creationId xmlns:a16="http://schemas.microsoft.com/office/drawing/2014/main" id="{AA140C20-3531-4443-93D0-F81DF98947AD}"/>
+              </a:ext>
+            </a:extLst>
+          </p:cNvPr>
+          <p:cNvSpPr>
+            <a:spLocks xmlns:a="http://schemas.openxmlformats.org/drawingml/2006/main" noGrp="1"/>
+          </p:cNvSpPr>
+          <p:nvPr/>
+        </p:nvSpPr>
+        <p:spPr>
+          <a:xfrm xmlns:a="http://schemas.openxmlformats.org/drawingml/2006/main">
+            <a:off x="9334500" y="4686300"/>
+            <a:ext cx="7791450" cy="285750"/>
+          </a:xfrm>
+          <a:prstGeom xmlns:a="http://schemas.openxmlformats.org/drawingml/2006/main" prst="rect">
+            <a:avLst/>
+          </a:prstGeom>
+        </p:spPr>
+        <p:txBody>
+          <a:bodyPr xmlns:a="http://schemas.openxmlformats.org/drawingml/2006/main" lIns="0" tIns="0" rIns="0" bIns="0"/>
+          <a:lstStyle xmlns:a="http://schemas.openxmlformats.org/drawingml/2006/main"/>
+          <a:p xmlns:a="http://schemas.openxmlformats.org/drawingml/2006/main">
+            <a:pPr>
+              <a:defRPr sz="1800" b="1">
+                <a:solidFill>
+                  <a:srgbClr val="C7D2FE"/>
+                </a:solidFill>
+              </a:defRPr>
+            </a:pPr>
+            <a:r>
+              <a:rPr sz="1800" b="1">
+                <a:solidFill>
+                  <a:srgbClr val="C7D2FE"/>
+                </a:solidFill>
+              </a:rPr>
+              <a:t>部门试点接入</a:t>
+            </a:r>
+          </a:p>
+        </p:txBody>
+      </p:sp>
+      <p:sp>
+        <p:nvSpPr>
+          <p:cNvPr id="24" name="">
+            <a:extLst xmlns:a="http://schemas.openxmlformats.org/drawingml/2006/main">
+              <a:ext uri="{FF2B5EF4-FFF2-40B4-BE49-F238E27FC236}">
+                <a16:creationId xmlns:a16="http://schemas.microsoft.com/office/drawing/2014/main" id="{B4E4E6F0-389E-4F67-B1CB-B209FE1B8D86}"/>
+              </a:ext>
+            </a:extLst>
+          </p:cNvPr>
+          <p:cNvSpPr>
+            <a:spLocks xmlns:a="http://schemas.openxmlformats.org/drawingml/2006/main" noGrp="1"/>
+          </p:cNvSpPr>
+          <p:nvPr/>
+        </p:nvSpPr>
+        <p:spPr>
+          <a:xfrm xmlns:a="http://schemas.openxmlformats.org/drawingml/2006/main">
+            <a:off x="9334500" y="5124450"/>
+            <a:ext cx="4476750" cy="533400"/>
+          </a:xfrm>
+          <a:prstGeom xmlns:a="http://schemas.openxmlformats.org/drawingml/2006/main" prst="rect">
+            <a:avLst/>
+          </a:prstGeom>
+        </p:spPr>
+        <p:txBody>
+          <a:bodyPr xmlns:a="http://schemas.openxmlformats.org/drawingml/2006/main" lIns="0" tIns="0" rIns="0" bIns="0"/>
+          <a:lstStyle xmlns:a="http://schemas.openxmlformats.org/drawingml/2006/main"/>
+          <a:p xmlns:a="http://schemas.openxmlformats.org/drawingml/2006/main">
+            <a:pPr>
+              <a:defRPr sz="1725">
                 <a:solidFill>
                   <a:srgbClr val="F8FAFC"/>
                 </a:solidFill>
               </a:defRPr>
             </a:pPr>
             <a:r>
-              <a:rPr sz="1800">
+              <a:rPr sz="1725">
                 <a:solidFill>
                   <a:srgbClr val="F8FAFC"/>
                 </a:solidFill>
               </a:rPr>
-              <a:t>综合风险等级：高</a:t>
-            </a:r>
-          </a:p>
-          <a:p xmlns:a="http://schemas.openxmlformats.org/drawingml/2006/main">
-            <a:pPr>
-              <a:defRPr sz="1800">
-                <a:solidFill>
-                  <a:srgbClr val="F8FAFC"/>
-                </a:solidFill>
-              </a:defRPr>
-            </a:pPr>
-            <a:r>
-              <a:rPr sz="1800">
-                <a:solidFill>
-                  <a:srgbClr val="F8FAFC"/>
-                </a:solidFill>
-              </a:rPr>
-              <a:t>命中函数：_handle_lost / _parse_action_name</a:t>
-            </a:r>
-          </a:p>
-          <a:p xmlns:a="http://schemas.openxmlformats.org/drawingml/2006/main">
-            <a:pPr>
-              <a:defRPr sz="1800">
-                <a:solidFill>
-                  <a:srgbClr val="F8FAFC"/>
-                </a:solidFill>
-              </a:defRPr>
-            </a:pPr>
-            <a:r>
-              <a:rPr sz="1800">
-                <a:solidFill>
-                  <a:srgbClr val="F8FAFC"/>
-                </a:solidFill>
-              </a:rPr>
-              <a:t>风险依据：运动安全 + Action 契约</a:t>
-            </a:r>
-          </a:p>
-          <a:p xmlns:a="http://schemas.openxmlformats.org/drawingml/2006/main">
-            <a:pPr>
-              <a:defRPr sz="1800">
-                <a:solidFill>
-                  <a:srgbClr val="F8FAFC"/>
-                </a:solidFill>
-              </a:defRPr>
-            </a:pPr>
-            <a:r>
-              <a:rPr sz="1800">
-                <a:solidFill>
-                  <a:srgbClr val="F8FAFC"/>
-                </a:solidFill>
-              </a:rPr>
-              <a:t>测试建议：vx/wz 置 0、start:person、start:72、stop 状态</a:t>
+              <a:t>PR opened / updated -&gt; 触发分析 -&gt; 评论到 PR -&gt; 采纳率与缺陷前置率进入看板</a:t>
             </a:r>
           </a:p>
         </p:txBody>
@@ -3653,7 +3824,7 @@
     </p:spTree>
     <p:extLst>
       <p:ext uri="{BB962C8B-B14F-4D97-AF65-F5344CB8AC3E}">
-        <p14:creationId xmlns:p14="http://schemas.microsoft.com/office/powerpoint/2010/main" val="539268902"/>
+        <p14:creationId xmlns:p14="http://schemas.microsoft.com/office/powerpoint/2010/main" val="479373620"/>
       </p:ext>
     </p:extLst>
   </p:cSld>
@@ -3677,7 +3848,7 @@
           <p:cNvPr id="1" name="">
             <a:extLst xmlns:a="http://schemas.openxmlformats.org/drawingml/2006/main">
               <a:ext uri="{FF2B5EF4-FFF2-40B4-BE49-F238E27FC236}">
-                <a16:creationId xmlns:a16="http://schemas.microsoft.com/office/drawing/2014/main" id="{3491854C-C1AB-4BC9-946D-6745AE2161A2}"/>
+                <a16:creationId xmlns:a16="http://schemas.microsoft.com/office/drawing/2014/main" id="{451EB078-3E2E-4E1B-897C-E13ED020BB77}"/>
               </a:ext>
             </a:extLst>
           </p:cNvPr>
@@ -3689,7 +3860,7 @@
         <p:spPr>
           <a:xfrm xmlns:a="http://schemas.openxmlformats.org/drawingml/2006/main">
             <a:off x="819150" y="590550"/>
-            <a:ext cx="6229350" cy="1238250"/>
+            <a:ext cx="3600450" cy="628650"/>
           </a:xfrm>
           <a:prstGeom xmlns:a="http://schemas.openxmlformats.org/drawingml/2006/main" prst="rect">
             <a:avLst/>
@@ -3712,7 +3883,7 @@
                   <a:srgbClr val="17223B"/>
                 </a:solidFill>
               </a:rPr>
-              <a:t>AI 先做初筛，人做最终判断</a:t>
+              <a:t>从研发痛点出发</a:t>
             </a:r>
           </a:p>
         </p:txBody>
@@ -3722,19 +3893,19 @@
           <p:cNvPr id="2" name="">
             <a:extLst xmlns:a="http://schemas.openxmlformats.org/drawingml/2006/main">
               <a:ext uri="{FF2B5EF4-FFF2-40B4-BE49-F238E27FC236}">
-                <a16:creationId xmlns:a16="http://schemas.microsoft.com/office/drawing/2014/main" id="{8B12D3A3-458D-4803-A3AF-6A38B241EDCE}"/>
-              </a:ext>
-            </a:extLst>
-          </p:cNvPr>
-          <p:cNvSpPr>
-            <a:spLocks xmlns:a="http://schemas.openxmlformats.org/drawingml/2006/main" noGrp="1"/>
-          </p:cNvSpPr>
-          <p:nvPr/>
-        </p:nvSpPr>
-        <p:spPr>
-          <a:xfrm xmlns:a="http://schemas.openxmlformats.org/drawingml/2006/main">
-            <a:off x="819150" y="1962150"/>
-            <a:ext cx="7562850" cy="552450"/>
+                <a16:creationId xmlns:a16="http://schemas.microsoft.com/office/drawing/2014/main" id="{E3FE8D54-24FD-41E9-BC27-CFAA452E39F3}"/>
+              </a:ext>
+            </a:extLst>
+          </p:cNvPr>
+          <p:cNvSpPr>
+            <a:spLocks xmlns:a="http://schemas.openxmlformats.org/drawingml/2006/main" noGrp="1"/>
+          </p:cNvSpPr>
+          <p:nvPr/>
+        </p:nvSpPr>
+        <p:spPr>
+          <a:xfrm xmlns:a="http://schemas.openxmlformats.org/drawingml/2006/main">
+            <a:off x="819150" y="1333500"/>
+            <a:ext cx="8877300" cy="552450"/>
           </a:xfrm>
           <a:prstGeom xmlns:a="http://schemas.openxmlformats.org/drawingml/2006/main" prst="rect">
             <a:avLst/>
@@ -3757,7 +3928,7 @@
                   <a:srgbClr val="64748B"/>
                 </a:solidFill>
               </a:rPr>
-              <a:t>AI 负责召回高风险上下文和测试建议，人负责取舍、代码判断和实机验证。</a:t>
+              <a:t>这个工具解决的是 PR 阶段的重复性认知负担和质量前置问题，而不是为了用 AI 而用 AI。</a:t>
             </a:r>
           </a:p>
         </p:txBody>
@@ -3767,19 +3938,19 @@
           <p:cNvPr id="3" name="">
             <a:extLst xmlns:a="http://schemas.openxmlformats.org/drawingml/2006/main">
               <a:ext uri="{FF2B5EF4-FFF2-40B4-BE49-F238E27FC236}">
-                <a16:creationId xmlns:a16="http://schemas.microsoft.com/office/drawing/2014/main" id="{0FDB0D03-4B75-41B2-9AAC-51D722776A70}"/>
-              </a:ext>
-            </a:extLst>
-          </p:cNvPr>
-          <p:cNvSpPr>
-            <a:spLocks xmlns:a="http://schemas.openxmlformats.org/drawingml/2006/main" noGrp="1"/>
-          </p:cNvSpPr>
-          <p:nvPr/>
-        </p:nvSpPr>
-        <p:spPr>
-          <a:xfrm xmlns:a="http://schemas.openxmlformats.org/drawingml/2006/main">
-            <a:off x="819150" y="2868930"/>
-            <a:ext cx="3990975" cy="4095750"/>
+                <a16:creationId xmlns:a16="http://schemas.microsoft.com/office/drawing/2014/main" id="{C69F56D3-AC4F-4314-96E2-46574B2C5BA4}"/>
+              </a:ext>
+            </a:extLst>
+          </p:cNvPr>
+          <p:cNvSpPr>
+            <a:spLocks xmlns:a="http://schemas.openxmlformats.org/drawingml/2006/main" noGrp="1"/>
+          </p:cNvSpPr>
+          <p:nvPr/>
+        </p:nvSpPr>
+        <p:spPr>
+          <a:xfrm xmlns:a="http://schemas.openxmlformats.org/drawingml/2006/main">
+            <a:off x="819150" y="2251710"/>
+            <a:ext cx="3990975" cy="4762500"/>
           </a:xfrm>
           <a:prstGeom xmlns:a="http://schemas.openxmlformats.org/drawingml/2006/main" prst="roundRect">
             <a:avLst>
@@ -3802,18 +3973,18 @@
           <p:cNvPr id="4" name="">
             <a:extLst xmlns:a="http://schemas.openxmlformats.org/drawingml/2006/main">
               <a:ext uri="{FF2B5EF4-FFF2-40B4-BE49-F238E27FC236}">
-                <a16:creationId xmlns:a16="http://schemas.microsoft.com/office/drawing/2014/main" id="{DB1EF235-ACFF-42C1-8A61-24DA02AD6390}"/>
-              </a:ext>
-            </a:extLst>
-          </p:cNvPr>
-          <p:cNvSpPr>
-            <a:spLocks xmlns:a="http://schemas.openxmlformats.org/drawingml/2006/main" noGrp="1"/>
-          </p:cNvSpPr>
-          <p:nvPr/>
-        </p:nvSpPr>
-        <p:spPr>
-          <a:xfrm xmlns:a="http://schemas.openxmlformats.org/drawingml/2006/main">
-            <a:off x="1085850" y="3135630"/>
+                <a16:creationId xmlns:a16="http://schemas.microsoft.com/office/drawing/2014/main" id="{95DFF8CE-B323-4BA3-BDEB-851D29603D6C}"/>
+              </a:ext>
+            </a:extLst>
+          </p:cNvPr>
+          <p:cNvSpPr>
+            <a:spLocks xmlns:a="http://schemas.openxmlformats.org/drawingml/2006/main" noGrp="1"/>
+          </p:cNvSpPr>
+          <p:nvPr/>
+        </p:nvSpPr>
+        <p:spPr>
+          <a:xfrm xmlns:a="http://schemas.openxmlformats.org/drawingml/2006/main">
+            <a:off x="1085850" y="2518410"/>
             <a:ext cx="533400" cy="533400"/>
           </a:xfrm>
           <a:prstGeom xmlns:a="http://schemas.openxmlformats.org/drawingml/2006/main" prst="roundRect">
@@ -3831,18 +4002,18 @@
           <p:cNvPr id="5" name="">
             <a:extLst xmlns:a="http://schemas.openxmlformats.org/drawingml/2006/main">
               <a:ext uri="{FF2B5EF4-FFF2-40B4-BE49-F238E27FC236}">
-                <a16:creationId xmlns:a16="http://schemas.microsoft.com/office/drawing/2014/main" id="{0C0A8119-E56F-46CC-89FE-01477D94E02D}"/>
-              </a:ext>
-            </a:extLst>
-          </p:cNvPr>
-          <p:cNvSpPr>
-            <a:spLocks xmlns:a="http://schemas.openxmlformats.org/drawingml/2006/main" noGrp="1"/>
-          </p:cNvSpPr>
-          <p:nvPr/>
-        </p:nvSpPr>
-        <p:spPr>
-          <a:xfrm xmlns:a="http://schemas.openxmlformats.org/drawingml/2006/main">
-            <a:off x="1295400" y="3276600"/>
+                <a16:creationId xmlns:a16="http://schemas.microsoft.com/office/drawing/2014/main" id="{E757C660-D461-4D1B-A49A-3D105CB33782}"/>
+              </a:ext>
+            </a:extLst>
+          </p:cNvPr>
+          <p:cNvSpPr>
+            <a:spLocks xmlns:a="http://schemas.openxmlformats.org/drawingml/2006/main" noGrp="1"/>
+          </p:cNvSpPr>
+          <p:nvPr/>
+        </p:nvSpPr>
+        <p:spPr>
+          <a:xfrm xmlns:a="http://schemas.openxmlformats.org/drawingml/2006/main">
+            <a:off x="1295400" y="2647950"/>
             <a:ext cx="114300" cy="266700"/>
           </a:xfrm>
           <a:prstGeom xmlns:a="http://schemas.openxmlformats.org/drawingml/2006/main" prst="rect">
@@ -3866,7 +4037,7 @@
                   <a:srgbClr val="FFFFFF"/>
                 </a:solidFill>
               </a:rPr>
-              <a:t>A</a:t>
+              <a:t>1</a:t>
             </a:r>
           </a:p>
         </p:txBody>
@@ -3876,18 +4047,18 @@
           <p:cNvPr id="6" name="">
             <a:extLst xmlns:a="http://schemas.openxmlformats.org/drawingml/2006/main">
               <a:ext uri="{FF2B5EF4-FFF2-40B4-BE49-F238E27FC236}">
-                <a16:creationId xmlns:a16="http://schemas.microsoft.com/office/drawing/2014/main" id="{43EEC288-DF64-4F27-A85B-533B8043942D}"/>
-              </a:ext>
-            </a:extLst>
-          </p:cNvPr>
-          <p:cNvSpPr>
-            <a:spLocks xmlns:a="http://schemas.openxmlformats.org/drawingml/2006/main" noGrp="1"/>
-          </p:cNvSpPr>
-          <p:nvPr/>
-        </p:nvSpPr>
-        <p:spPr>
-          <a:xfrm xmlns:a="http://schemas.openxmlformats.org/drawingml/2006/main">
-            <a:off x="1790700" y="3143250"/>
+                <a16:creationId xmlns:a16="http://schemas.microsoft.com/office/drawing/2014/main" id="{9205F810-943B-40D0-854E-FA3CFAC6234C}"/>
+              </a:ext>
+            </a:extLst>
+          </p:cNvPr>
+          <p:cNvSpPr>
+            <a:spLocks xmlns:a="http://schemas.openxmlformats.org/drawingml/2006/main" noGrp="1"/>
+          </p:cNvSpPr>
+          <p:nvPr/>
+        </p:nvSpPr>
+        <p:spPr>
+          <a:xfrm xmlns:a="http://schemas.openxmlformats.org/drawingml/2006/main">
+            <a:off x="1790700" y="2514600"/>
             <a:ext cx="2762250" cy="285750"/>
           </a:xfrm>
           <a:prstGeom xmlns:a="http://schemas.openxmlformats.org/drawingml/2006/main" prst="rect">
@@ -3911,7 +4082,7 @@
                   <a:srgbClr val="1F2937"/>
                 </a:solidFill>
               </a:rPr>
-              <a:t>读取 diff</a:t>
+              <a:t>Reviewer 时间碎片化</a:t>
             </a:r>
           </a:p>
         </p:txBody>
@@ -3921,19 +4092,19 @@
           <p:cNvPr id="7" name="">
             <a:extLst xmlns:a="http://schemas.openxmlformats.org/drawingml/2006/main">
               <a:ext uri="{FF2B5EF4-FFF2-40B4-BE49-F238E27FC236}">
-                <a16:creationId xmlns:a16="http://schemas.microsoft.com/office/drawing/2014/main" id="{924AE245-229D-4CF6-84BD-89329B32B794}"/>
-              </a:ext>
-            </a:extLst>
-          </p:cNvPr>
-          <p:cNvSpPr>
-            <a:spLocks xmlns:a="http://schemas.openxmlformats.org/drawingml/2006/main" noGrp="1"/>
-          </p:cNvSpPr>
-          <p:nvPr/>
-        </p:nvSpPr>
-        <p:spPr>
-          <a:xfrm xmlns:a="http://schemas.openxmlformats.org/drawingml/2006/main">
-            <a:off x="1790700" y="3486150"/>
-            <a:ext cx="3028950" cy="419100"/>
+                <a16:creationId xmlns:a16="http://schemas.microsoft.com/office/drawing/2014/main" id="{F4BA4E71-7034-4582-9B6C-B0C5529E2261}"/>
+              </a:ext>
+            </a:extLst>
+          </p:cNvPr>
+          <p:cNvSpPr>
+            <a:spLocks xmlns:a="http://schemas.openxmlformats.org/drawingml/2006/main" noGrp="1"/>
+          </p:cNvSpPr>
+          <p:nvPr/>
+        </p:nvSpPr>
+        <p:spPr>
+          <a:xfrm xmlns:a="http://schemas.openxmlformats.org/drawingml/2006/main">
+            <a:off x="1790700" y="2857500"/>
+            <a:ext cx="3943350" cy="209550"/>
           </a:xfrm>
           <a:prstGeom xmlns:a="http://schemas.openxmlformats.org/drawingml/2006/main" prst="rect">
             <a:avLst/>
@@ -3956,7 +4127,7 @@
                   <a:srgbClr val="64748B"/>
                 </a:solidFill>
               </a:rPr>
-              <a:t>解析变更文件、增量行号和 patch 范围。</a:t>
+              <a:t>人工先找上下文，真正看设计和风险的时间被压缩。</a:t>
             </a:r>
           </a:p>
         </p:txBody>
@@ -3966,19 +4137,19 @@
           <p:cNvPr id="8" name="">
             <a:extLst xmlns:a="http://schemas.openxmlformats.org/drawingml/2006/main">
               <a:ext uri="{FF2B5EF4-FFF2-40B4-BE49-F238E27FC236}">
-                <a16:creationId xmlns:a16="http://schemas.microsoft.com/office/drawing/2014/main" id="{EC49D187-C99C-423A-A765-05DDF5D9A126}"/>
-              </a:ext>
-            </a:extLst>
-          </p:cNvPr>
-          <p:cNvSpPr>
-            <a:spLocks xmlns:a="http://schemas.openxmlformats.org/drawingml/2006/main" noGrp="1"/>
-          </p:cNvSpPr>
-          <p:nvPr/>
-        </p:nvSpPr>
-        <p:spPr>
-          <a:xfrm xmlns:a="http://schemas.openxmlformats.org/drawingml/2006/main">
-            <a:off x="5038725" y="2868930"/>
-            <a:ext cx="3990975" cy="4095750"/>
+                <a16:creationId xmlns:a16="http://schemas.microsoft.com/office/drawing/2014/main" id="{DEA4830F-7C87-4783-A034-35CA8CE99B13}"/>
+              </a:ext>
+            </a:extLst>
+          </p:cNvPr>
+          <p:cNvSpPr>
+            <a:spLocks xmlns:a="http://schemas.openxmlformats.org/drawingml/2006/main" noGrp="1"/>
+          </p:cNvSpPr>
+          <p:nvPr/>
+        </p:nvSpPr>
+        <p:spPr>
+          <a:xfrm xmlns:a="http://schemas.openxmlformats.org/drawingml/2006/main">
+            <a:off x="5038725" y="2251710"/>
+            <a:ext cx="3990975" cy="4762500"/>
           </a:xfrm>
           <a:prstGeom xmlns:a="http://schemas.openxmlformats.org/drawingml/2006/main" prst="roundRect">
             <a:avLst>
@@ -4001,18 +4172,18 @@
           <p:cNvPr id="9" name="">
             <a:extLst xmlns:a="http://schemas.openxmlformats.org/drawingml/2006/main">
               <a:ext uri="{FF2B5EF4-FFF2-40B4-BE49-F238E27FC236}">
-                <a16:creationId xmlns:a16="http://schemas.microsoft.com/office/drawing/2014/main" id="{28502CB1-C757-472B-82B1-855B7B539656}"/>
-              </a:ext>
-            </a:extLst>
-          </p:cNvPr>
-          <p:cNvSpPr>
-            <a:spLocks xmlns:a="http://schemas.openxmlformats.org/drawingml/2006/main" noGrp="1"/>
-          </p:cNvSpPr>
-          <p:nvPr/>
-        </p:nvSpPr>
-        <p:spPr>
-          <a:xfrm xmlns:a="http://schemas.openxmlformats.org/drawingml/2006/main">
-            <a:off x="5305425" y="3135630"/>
+                <a16:creationId xmlns:a16="http://schemas.microsoft.com/office/drawing/2014/main" id="{F8BD42BD-5D22-4A25-B056-7B640381CFB5}"/>
+              </a:ext>
+            </a:extLst>
+          </p:cNvPr>
+          <p:cNvSpPr>
+            <a:spLocks xmlns:a="http://schemas.openxmlformats.org/drawingml/2006/main" noGrp="1"/>
+          </p:cNvSpPr>
+          <p:nvPr/>
+        </p:nvSpPr>
+        <p:spPr>
+          <a:xfrm xmlns:a="http://schemas.openxmlformats.org/drawingml/2006/main">
+            <a:off x="5305425" y="2518410"/>
             <a:ext cx="533400" cy="533400"/>
           </a:xfrm>
           <a:prstGeom xmlns:a="http://schemas.openxmlformats.org/drawingml/2006/main" prst="roundRect">
@@ -4030,18 +4201,18 @@
           <p:cNvPr id="10" name="">
             <a:extLst xmlns:a="http://schemas.openxmlformats.org/drawingml/2006/main">
               <a:ext uri="{FF2B5EF4-FFF2-40B4-BE49-F238E27FC236}">
-                <a16:creationId xmlns:a16="http://schemas.microsoft.com/office/drawing/2014/main" id="{F8817842-FA45-484E-ACE4-4F0CF5584E0F}"/>
-              </a:ext>
-            </a:extLst>
-          </p:cNvPr>
-          <p:cNvSpPr>
-            <a:spLocks xmlns:a="http://schemas.openxmlformats.org/drawingml/2006/main" noGrp="1"/>
-          </p:cNvSpPr>
-          <p:nvPr/>
-        </p:nvSpPr>
-        <p:spPr>
-          <a:xfrm xmlns:a="http://schemas.openxmlformats.org/drawingml/2006/main">
-            <a:off x="5524500" y="3276600"/>
+                <a16:creationId xmlns:a16="http://schemas.microsoft.com/office/drawing/2014/main" id="{63EE5FF3-B5A0-417D-9066-20CDD5F38CC6}"/>
+              </a:ext>
+            </a:extLst>
+          </p:cNvPr>
+          <p:cNvSpPr>
+            <a:spLocks xmlns:a="http://schemas.openxmlformats.org/drawingml/2006/main" noGrp="1"/>
+          </p:cNvSpPr>
+          <p:nvPr/>
+        </p:nvSpPr>
+        <p:spPr>
+          <a:xfrm xmlns:a="http://schemas.openxmlformats.org/drawingml/2006/main">
+            <a:off x="5524500" y="2647950"/>
             <a:ext cx="114300" cy="266700"/>
           </a:xfrm>
           <a:prstGeom xmlns:a="http://schemas.openxmlformats.org/drawingml/2006/main" prst="rect">
@@ -4065,7 +4236,7 @@
                   <a:srgbClr val="FFFFFF"/>
                 </a:solidFill>
               </a:rPr>
-              <a:t>B</a:t>
+              <a:t>2</a:t>
             </a:r>
           </a:p>
         </p:txBody>
@@ -4075,18 +4246,18 @@
           <p:cNvPr id="11" name="">
             <a:extLst xmlns:a="http://schemas.openxmlformats.org/drawingml/2006/main">
               <a:ext uri="{FF2B5EF4-FFF2-40B4-BE49-F238E27FC236}">
-                <a16:creationId xmlns:a16="http://schemas.microsoft.com/office/drawing/2014/main" id="{DD4329C9-94E7-4A83-B889-B7E4674E7326}"/>
-              </a:ext>
-            </a:extLst>
-          </p:cNvPr>
-          <p:cNvSpPr>
-            <a:spLocks xmlns:a="http://schemas.openxmlformats.org/drawingml/2006/main" noGrp="1"/>
-          </p:cNvSpPr>
-          <p:nvPr/>
-        </p:nvSpPr>
-        <p:spPr>
-          <a:xfrm xmlns:a="http://schemas.openxmlformats.org/drawingml/2006/main">
-            <a:off x="6019800" y="3143250"/>
+                <a16:creationId xmlns:a16="http://schemas.microsoft.com/office/drawing/2014/main" id="{E25633D4-90C8-4223-8CD9-36E3E96DF5C3}"/>
+              </a:ext>
+            </a:extLst>
+          </p:cNvPr>
+          <p:cNvSpPr>
+            <a:spLocks xmlns:a="http://schemas.openxmlformats.org/drawingml/2006/main" noGrp="1"/>
+          </p:cNvSpPr>
+          <p:nvPr/>
+        </p:nvSpPr>
+        <p:spPr>
+          <a:xfrm xmlns:a="http://schemas.openxmlformats.org/drawingml/2006/main">
+            <a:off x="6019800" y="2514600"/>
             <a:ext cx="2762250" cy="285750"/>
           </a:xfrm>
           <a:prstGeom xmlns:a="http://schemas.openxmlformats.org/drawingml/2006/main" prst="rect">
@@ -4110,7 +4281,7 @@
                   <a:srgbClr val="1F2937"/>
                 </a:solidFill>
               </a:rPr>
-              <a:t>定位函数</a:t>
+              <a:t>老模块隐性知识多</a:t>
             </a:r>
           </a:p>
         </p:txBody>
@@ -4120,19 +4291,19 @@
           <p:cNvPr id="12" name="">
             <a:extLst xmlns:a="http://schemas.openxmlformats.org/drawingml/2006/main">
               <a:ext uri="{FF2B5EF4-FFF2-40B4-BE49-F238E27FC236}">
-                <a16:creationId xmlns:a16="http://schemas.microsoft.com/office/drawing/2014/main" id="{8609BB1C-4B95-4CE3-9558-46C14BA7E96F}"/>
-              </a:ext>
-            </a:extLst>
-          </p:cNvPr>
-          <p:cNvSpPr>
-            <a:spLocks xmlns:a="http://schemas.openxmlformats.org/drawingml/2006/main" noGrp="1"/>
-          </p:cNvSpPr>
-          <p:nvPr/>
-        </p:nvSpPr>
-        <p:spPr>
-          <a:xfrm xmlns:a="http://schemas.openxmlformats.org/drawingml/2006/main">
-            <a:off x="6019800" y="3486150"/>
-            <a:ext cx="3314700" cy="419100"/>
+                <a16:creationId xmlns:a16="http://schemas.microsoft.com/office/drawing/2014/main" id="{D792FD8D-71EB-4570-B369-B6D9B00FE0C2}"/>
+              </a:ext>
+            </a:extLst>
+          </p:cNvPr>
+          <p:cNvSpPr>
+            <a:spLocks xmlns:a="http://schemas.openxmlformats.org/drawingml/2006/main" noGrp="1"/>
+          </p:cNvSpPr>
+          <p:nvPr/>
+        </p:nvSpPr>
+        <p:spPr>
+          <a:xfrm xmlns:a="http://schemas.openxmlformats.org/drawingml/2006/main">
+            <a:off x="6019800" y="2857500"/>
+            <a:ext cx="4629150" cy="419100"/>
           </a:xfrm>
           <a:prstGeom xmlns:a="http://schemas.openxmlformats.org/drawingml/2006/main" prst="rect">
             <a:avLst/>
@@ -4155,7 +4326,7 @@
                   <a:srgbClr val="64748B"/>
                 </a:solidFill>
               </a:rPr>
-              <a:t>AST 定位到受影响函数，避免只看散乱 diff。</a:t>
+              <a:t>运动控制、Action 契约、手势 FSM 规则散落在代码和文档里。</a:t>
             </a:r>
           </a:p>
         </p:txBody>
@@ -4165,19 +4336,19 @@
           <p:cNvPr id="13" name="">
             <a:extLst xmlns:a="http://schemas.openxmlformats.org/drawingml/2006/main">
               <a:ext uri="{FF2B5EF4-FFF2-40B4-BE49-F238E27FC236}">
-                <a16:creationId xmlns:a16="http://schemas.microsoft.com/office/drawing/2014/main" id="{4245D490-1964-45F7-BD19-83579C941F71}"/>
-              </a:ext>
-            </a:extLst>
-          </p:cNvPr>
-          <p:cNvSpPr>
-            <a:spLocks xmlns:a="http://schemas.openxmlformats.org/drawingml/2006/main" noGrp="1"/>
-          </p:cNvSpPr>
-          <p:nvPr/>
-        </p:nvSpPr>
-        <p:spPr>
-          <a:xfrm xmlns:a="http://schemas.openxmlformats.org/drawingml/2006/main">
-            <a:off x="9258300" y="2868930"/>
-            <a:ext cx="3990975" cy="4095750"/>
+                <a16:creationId xmlns:a16="http://schemas.microsoft.com/office/drawing/2014/main" id="{1FB937DA-FFF2-4CBD-94FD-6AE2236F3F99}"/>
+              </a:ext>
+            </a:extLst>
+          </p:cNvPr>
+          <p:cNvSpPr>
+            <a:spLocks xmlns:a="http://schemas.openxmlformats.org/drawingml/2006/main" noGrp="1"/>
+          </p:cNvSpPr>
+          <p:nvPr/>
+        </p:nvSpPr>
+        <p:spPr>
+          <a:xfrm xmlns:a="http://schemas.openxmlformats.org/drawingml/2006/main">
+            <a:off x="9258300" y="2251710"/>
+            <a:ext cx="3990975" cy="4762500"/>
           </a:xfrm>
           <a:prstGeom xmlns:a="http://schemas.openxmlformats.org/drawingml/2006/main" prst="roundRect">
             <a:avLst>
@@ -4200,18 +4371,18 @@
           <p:cNvPr id="14" name="">
             <a:extLst xmlns:a="http://schemas.openxmlformats.org/drawingml/2006/main">
               <a:ext uri="{FF2B5EF4-FFF2-40B4-BE49-F238E27FC236}">
-                <a16:creationId xmlns:a16="http://schemas.microsoft.com/office/drawing/2014/main" id="{B255D94C-D99B-45AB-B747-0AB2B203D180}"/>
-              </a:ext>
-            </a:extLst>
-          </p:cNvPr>
-          <p:cNvSpPr>
-            <a:spLocks xmlns:a="http://schemas.openxmlformats.org/drawingml/2006/main" noGrp="1"/>
-          </p:cNvSpPr>
-          <p:nvPr/>
-        </p:nvSpPr>
-        <p:spPr>
-          <a:xfrm xmlns:a="http://schemas.openxmlformats.org/drawingml/2006/main">
-            <a:off x="9525000" y="3135630"/>
+                <a16:creationId xmlns:a16="http://schemas.microsoft.com/office/drawing/2014/main" id="{960C7E55-E21F-4699-824D-33CA61B9D244}"/>
+              </a:ext>
+            </a:extLst>
+          </p:cNvPr>
+          <p:cNvSpPr>
+            <a:spLocks xmlns:a="http://schemas.openxmlformats.org/drawingml/2006/main" noGrp="1"/>
+          </p:cNvSpPr>
+          <p:nvPr/>
+        </p:nvSpPr>
+        <p:spPr>
+          <a:xfrm xmlns:a="http://schemas.openxmlformats.org/drawingml/2006/main">
+            <a:off x="9525000" y="2518410"/>
             <a:ext cx="533400" cy="533400"/>
           </a:xfrm>
           <a:prstGeom xmlns:a="http://schemas.openxmlformats.org/drawingml/2006/main" prst="roundRect">
@@ -4229,18 +4400,18 @@
           <p:cNvPr id="15" name="">
             <a:extLst xmlns:a="http://schemas.openxmlformats.org/drawingml/2006/main">
               <a:ext uri="{FF2B5EF4-FFF2-40B4-BE49-F238E27FC236}">
-                <a16:creationId xmlns:a16="http://schemas.microsoft.com/office/drawing/2014/main" id="{A49985B3-D6E3-42FD-AC15-AF01EFC6B1AE}"/>
-              </a:ext>
-            </a:extLst>
-          </p:cNvPr>
-          <p:cNvSpPr>
-            <a:spLocks xmlns:a="http://schemas.openxmlformats.org/drawingml/2006/main" noGrp="1"/>
-          </p:cNvSpPr>
-          <p:nvPr/>
-        </p:nvSpPr>
-        <p:spPr>
-          <a:xfrm xmlns:a="http://schemas.openxmlformats.org/drawingml/2006/main">
-            <a:off x="9734550" y="3276600"/>
+                <a16:creationId xmlns:a16="http://schemas.microsoft.com/office/drawing/2014/main" id="{D4721310-4E4E-4043-BE21-CE89EE662877}"/>
+              </a:ext>
+            </a:extLst>
+          </p:cNvPr>
+          <p:cNvSpPr>
+            <a:spLocks xmlns:a="http://schemas.openxmlformats.org/drawingml/2006/main" noGrp="1"/>
+          </p:cNvSpPr>
+          <p:nvPr/>
+        </p:nvSpPr>
+        <p:spPr>
+          <a:xfrm xmlns:a="http://schemas.openxmlformats.org/drawingml/2006/main">
+            <a:off x="9734550" y="2647950"/>
             <a:ext cx="114300" cy="266700"/>
           </a:xfrm>
           <a:prstGeom xmlns:a="http://schemas.openxmlformats.org/drawingml/2006/main" prst="rect">
@@ -4264,7 +4435,7 @@
                   <a:srgbClr val="FFFFFF"/>
                 </a:solidFill>
               </a:rPr>
-              <a:t>C</a:t>
+              <a:t>3</a:t>
             </a:r>
           </a:p>
         </p:txBody>
@@ -4274,18 +4445,18 @@
           <p:cNvPr id="16" name="">
             <a:extLst xmlns:a="http://schemas.openxmlformats.org/drawingml/2006/main">
               <a:ext uri="{FF2B5EF4-FFF2-40B4-BE49-F238E27FC236}">
-                <a16:creationId xmlns:a16="http://schemas.microsoft.com/office/drawing/2014/main" id="{3E9BAF29-EFF4-4E03-BABA-542CF1D788B4}"/>
-              </a:ext>
-            </a:extLst>
-          </p:cNvPr>
-          <p:cNvSpPr>
-            <a:spLocks xmlns:a="http://schemas.openxmlformats.org/drawingml/2006/main" noGrp="1"/>
-          </p:cNvSpPr>
-          <p:nvPr/>
-        </p:nvSpPr>
-        <p:spPr>
-          <a:xfrm xmlns:a="http://schemas.openxmlformats.org/drawingml/2006/main">
-            <a:off x="10229850" y="3143250"/>
+                <a16:creationId xmlns:a16="http://schemas.microsoft.com/office/drawing/2014/main" id="{A0B2416A-1EF3-4920-A444-603C0A49B3D6}"/>
+              </a:ext>
+            </a:extLst>
+          </p:cNvPr>
+          <p:cNvSpPr>
+            <a:spLocks xmlns:a="http://schemas.openxmlformats.org/drawingml/2006/main" noGrp="1"/>
+          </p:cNvSpPr>
+          <p:nvPr/>
+        </p:nvSpPr>
+        <p:spPr>
+          <a:xfrm xmlns:a="http://schemas.openxmlformats.org/drawingml/2006/main">
+            <a:off x="10229850" y="2514600"/>
             <a:ext cx="2762250" cy="285750"/>
           </a:xfrm>
           <a:prstGeom xmlns:a="http://schemas.openxmlformats.org/drawingml/2006/main" prst="rect">
@@ -4309,7 +4480,7 @@
                   <a:srgbClr val="1F2937"/>
                 </a:solidFill>
               </a:rPr>
-              <a:t>匹配风险</a:t>
+              <a:t>测试补全不稳定</a:t>
             </a:r>
           </a:p>
         </p:txBody>
@@ -4319,19 +4490,19 @@
           <p:cNvPr id="17" name="">
             <a:extLst xmlns:a="http://schemas.openxmlformats.org/drawingml/2006/main">
               <a:ext uri="{FF2B5EF4-FFF2-40B4-BE49-F238E27FC236}">
-                <a16:creationId xmlns:a16="http://schemas.microsoft.com/office/drawing/2014/main" id="{D51CA551-CD2F-4B9E-B041-59946E7CE406}"/>
-              </a:ext>
-            </a:extLst>
-          </p:cNvPr>
-          <p:cNvSpPr>
-            <a:spLocks xmlns:a="http://schemas.openxmlformats.org/drawingml/2006/main" noGrp="1"/>
-          </p:cNvSpPr>
-          <p:nvPr/>
-        </p:nvSpPr>
-        <p:spPr>
-          <a:xfrm xmlns:a="http://schemas.openxmlformats.org/drawingml/2006/main">
-            <a:off x="10229850" y="3486150"/>
-            <a:ext cx="3562350" cy="209550"/>
+                <a16:creationId xmlns:a16="http://schemas.microsoft.com/office/drawing/2014/main" id="{EB999C08-0657-4936-983B-9BC9B5BF530F}"/>
+              </a:ext>
+            </a:extLst>
+          </p:cNvPr>
+          <p:cNvSpPr>
+            <a:spLocks xmlns:a="http://schemas.openxmlformats.org/drawingml/2006/main" noGrp="1"/>
+          </p:cNvSpPr>
+          <p:nvPr/>
+        </p:nvSpPr>
+        <p:spPr>
+          <a:xfrm xmlns:a="http://schemas.openxmlformats.org/drawingml/2006/main">
+            <a:off x="10229850" y="2857500"/>
+            <a:ext cx="3257550" cy="209550"/>
           </a:xfrm>
           <a:prstGeom xmlns:a="http://schemas.openxmlformats.org/drawingml/2006/main" prst="rect">
             <a:avLst/>
@@ -4354,7 +4525,7 @@
                   <a:srgbClr val="64748B"/>
                 </a:solidFill>
               </a:rPr>
-              <a:t>运动安全、深度距离、手势 FSM、Action 契约。</a:t>
+              <a:t>经常知道要补测试，但缺少具体场景清单。</a:t>
             </a:r>
           </a:p>
         </p:txBody>
@@ -4364,19 +4535,19 @@
           <p:cNvPr id="18" name="">
             <a:extLst xmlns:a="http://schemas.openxmlformats.org/drawingml/2006/main">
               <a:ext uri="{FF2B5EF4-FFF2-40B4-BE49-F238E27FC236}">
-                <a16:creationId xmlns:a16="http://schemas.microsoft.com/office/drawing/2014/main" id="{12EA6034-9329-4580-8A6E-1467F02B853B}"/>
-              </a:ext>
-            </a:extLst>
-          </p:cNvPr>
-          <p:cNvSpPr>
-            <a:spLocks xmlns:a="http://schemas.openxmlformats.org/drawingml/2006/main" noGrp="1"/>
-          </p:cNvSpPr>
-          <p:nvPr/>
-        </p:nvSpPr>
-        <p:spPr>
-          <a:xfrm xmlns:a="http://schemas.openxmlformats.org/drawingml/2006/main">
-            <a:off x="13477875" y="2868930"/>
-            <a:ext cx="3990975" cy="4095750"/>
+                <a16:creationId xmlns:a16="http://schemas.microsoft.com/office/drawing/2014/main" id="{1CEBF559-27F5-47B8-95D6-9830D9974A39}"/>
+              </a:ext>
+            </a:extLst>
+          </p:cNvPr>
+          <p:cNvSpPr>
+            <a:spLocks xmlns:a="http://schemas.openxmlformats.org/drawingml/2006/main" noGrp="1"/>
+          </p:cNvSpPr>
+          <p:nvPr/>
+        </p:nvSpPr>
+        <p:spPr>
+          <a:xfrm xmlns:a="http://schemas.openxmlformats.org/drawingml/2006/main">
+            <a:off x="13477875" y="2251710"/>
+            <a:ext cx="3990975" cy="4762500"/>
           </a:xfrm>
           <a:prstGeom xmlns:a="http://schemas.openxmlformats.org/drawingml/2006/main" prst="roundRect">
             <a:avLst>
@@ -4399,18 +4570,18 @@
           <p:cNvPr id="19" name="">
             <a:extLst xmlns:a="http://schemas.openxmlformats.org/drawingml/2006/main">
               <a:ext uri="{FF2B5EF4-FFF2-40B4-BE49-F238E27FC236}">
-                <a16:creationId xmlns:a16="http://schemas.microsoft.com/office/drawing/2014/main" id="{AA005B40-5312-4E5D-9BBB-7AECB64636C7}"/>
-              </a:ext>
-            </a:extLst>
-          </p:cNvPr>
-          <p:cNvSpPr>
-            <a:spLocks xmlns:a="http://schemas.openxmlformats.org/drawingml/2006/main" noGrp="1"/>
-          </p:cNvSpPr>
-          <p:nvPr/>
-        </p:nvSpPr>
-        <p:spPr>
-          <a:xfrm xmlns:a="http://schemas.openxmlformats.org/drawingml/2006/main">
-            <a:off x="13744575" y="3135630"/>
+                <a16:creationId xmlns:a16="http://schemas.microsoft.com/office/drawing/2014/main" id="{35288308-C7D8-4B45-BEA2-A8CF70FB9186}"/>
+              </a:ext>
+            </a:extLst>
+          </p:cNvPr>
+          <p:cNvSpPr>
+            <a:spLocks xmlns:a="http://schemas.openxmlformats.org/drawingml/2006/main" noGrp="1"/>
+          </p:cNvSpPr>
+          <p:nvPr/>
+        </p:nvSpPr>
+        <p:spPr>
+          <a:xfrm xmlns:a="http://schemas.openxmlformats.org/drawingml/2006/main">
+            <a:off x="13744575" y="2518410"/>
             <a:ext cx="533400" cy="533400"/>
           </a:xfrm>
           <a:prstGeom xmlns:a="http://schemas.openxmlformats.org/drawingml/2006/main" prst="roundRect">
@@ -4428,19 +4599,19 @@
           <p:cNvPr id="20" name="">
             <a:extLst xmlns:a="http://schemas.openxmlformats.org/drawingml/2006/main">
               <a:ext uri="{FF2B5EF4-FFF2-40B4-BE49-F238E27FC236}">
-                <a16:creationId xmlns:a16="http://schemas.microsoft.com/office/drawing/2014/main" id="{75325B1E-DE7C-4DDE-A7C4-2550DA612670}"/>
-              </a:ext>
-            </a:extLst>
-          </p:cNvPr>
-          <p:cNvSpPr>
-            <a:spLocks xmlns:a="http://schemas.openxmlformats.org/drawingml/2006/main" noGrp="1"/>
-          </p:cNvSpPr>
-          <p:nvPr/>
-        </p:nvSpPr>
-        <p:spPr>
-          <a:xfrm xmlns:a="http://schemas.openxmlformats.org/drawingml/2006/main">
-            <a:off x="13944600" y="3276600"/>
-            <a:ext cx="152400" cy="266700"/>
+                <a16:creationId xmlns:a16="http://schemas.microsoft.com/office/drawing/2014/main" id="{D24C733A-C2D2-4185-AB55-D0BC003623C3}"/>
+              </a:ext>
+            </a:extLst>
+          </p:cNvPr>
+          <p:cNvSpPr>
+            <a:spLocks xmlns:a="http://schemas.openxmlformats.org/drawingml/2006/main" noGrp="1"/>
+          </p:cNvSpPr>
+          <p:nvPr/>
+        </p:nvSpPr>
+        <p:spPr>
+          <a:xfrm xmlns:a="http://schemas.openxmlformats.org/drawingml/2006/main">
+            <a:off x="13963650" y="2647950"/>
+            <a:ext cx="114300" cy="266700"/>
           </a:xfrm>
           <a:prstGeom xmlns:a="http://schemas.openxmlformats.org/drawingml/2006/main" prst="rect">
             <a:avLst/>
@@ -4463,7 +4634,7 @@
                   <a:srgbClr val="FFFFFF"/>
                 </a:solidFill>
               </a:rPr>
-              <a:t>D</a:t>
+              <a:t>A</a:t>
             </a:r>
           </a:p>
         </p:txBody>
@@ -4473,18 +4644,18 @@
           <p:cNvPr id="21" name="">
             <a:extLst xmlns:a="http://schemas.openxmlformats.org/drawingml/2006/main">
               <a:ext uri="{FF2B5EF4-FFF2-40B4-BE49-F238E27FC236}">
-                <a16:creationId xmlns:a16="http://schemas.microsoft.com/office/drawing/2014/main" id="{3907232A-55F3-4EE0-AF43-70C7825773AE}"/>
-              </a:ext>
-            </a:extLst>
-          </p:cNvPr>
-          <p:cNvSpPr>
-            <a:spLocks xmlns:a="http://schemas.openxmlformats.org/drawingml/2006/main" noGrp="1"/>
-          </p:cNvSpPr>
-          <p:nvPr/>
-        </p:nvSpPr>
-        <p:spPr>
-          <a:xfrm xmlns:a="http://schemas.openxmlformats.org/drawingml/2006/main">
-            <a:off x="14458950" y="3143250"/>
+                <a16:creationId xmlns:a16="http://schemas.microsoft.com/office/drawing/2014/main" id="{3A055DAB-60BB-44D9-901D-BABF325D3994}"/>
+              </a:ext>
+            </a:extLst>
+          </p:cNvPr>
+          <p:cNvSpPr>
+            <a:spLocks xmlns:a="http://schemas.openxmlformats.org/drawingml/2006/main" noGrp="1"/>
+          </p:cNvSpPr>
+          <p:nvPr/>
+        </p:nvSpPr>
+        <p:spPr>
+          <a:xfrm xmlns:a="http://schemas.openxmlformats.org/drawingml/2006/main">
+            <a:off x="14458950" y="2514600"/>
             <a:ext cx="2762250" cy="285750"/>
           </a:xfrm>
           <a:prstGeom xmlns:a="http://schemas.openxmlformats.org/drawingml/2006/main" prst="rect">
@@ -4508,7 +4679,7 @@
                   <a:srgbClr val="1F2937"/>
                 </a:solidFill>
               </a:rPr>
-              <a:t>生成建议</a:t>
+              <a:t>规则 + 上下文 + LLM</a:t>
             </a:r>
           </a:p>
         </p:txBody>
@@ -4518,19 +4689,19 @@
           <p:cNvPr id="22" name="">
             <a:extLst xmlns:a="http://schemas.openxmlformats.org/drawingml/2006/main">
               <a:ext uri="{FF2B5EF4-FFF2-40B4-BE49-F238E27FC236}">
-                <a16:creationId xmlns:a16="http://schemas.microsoft.com/office/drawing/2014/main" id="{54620AD2-0A47-450E-A25F-ED3B3A3BD27D}"/>
-              </a:ext>
-            </a:extLst>
-          </p:cNvPr>
-          <p:cNvSpPr>
-            <a:spLocks xmlns:a="http://schemas.openxmlformats.org/drawingml/2006/main" noGrp="1"/>
-          </p:cNvSpPr>
-          <p:nvPr/>
-        </p:nvSpPr>
-        <p:spPr>
-          <a:xfrm xmlns:a="http://schemas.openxmlformats.org/drawingml/2006/main">
-            <a:off x="14458950" y="3486150"/>
-            <a:ext cx="3143250" cy="209550"/>
+                <a16:creationId xmlns:a16="http://schemas.microsoft.com/office/drawing/2014/main" id="{FDFD1D76-FA57-4C81-BC8C-A75FBAB87BB2}"/>
+              </a:ext>
+            </a:extLst>
+          </p:cNvPr>
+          <p:cNvSpPr>
+            <a:spLocks xmlns:a="http://schemas.openxmlformats.org/drawingml/2006/main" noGrp="1"/>
+          </p:cNvSpPr>
+          <p:nvPr/>
+        </p:nvSpPr>
+        <p:spPr>
+          <a:xfrm xmlns:a="http://schemas.openxmlformats.org/drawingml/2006/main">
+            <a:off x="14458950" y="2857500"/>
+            <a:ext cx="3943350" cy="209550"/>
           </a:xfrm>
           <a:prstGeom xmlns:a="http://schemas.openxmlformats.org/drawingml/2006/main" prst="rect">
             <a:avLst/>
@@ -4553,7 +4724,7 @@
                   <a:srgbClr val="64748B"/>
                 </a:solidFill>
               </a:rPr>
-              <a:t>输出 review 重点、测试点和 LLM prompt。</a:t>
+              <a:t>先召回高风险上下文，再生成 reviewer 可执行建议。</a:t>
             </a:r>
           </a:p>
         </p:txBody>
@@ -4563,19 +4734,19 @@
           <p:cNvPr id="23" name="">
             <a:extLst xmlns:a="http://schemas.openxmlformats.org/drawingml/2006/main">
               <a:ext uri="{FF2B5EF4-FFF2-40B4-BE49-F238E27FC236}">
-                <a16:creationId xmlns:a16="http://schemas.microsoft.com/office/drawing/2014/main" id="{DEE73B04-9B1E-4557-A99E-B65AB150E8BD}"/>
-              </a:ext>
-            </a:extLst>
-          </p:cNvPr>
-          <p:cNvSpPr>
-            <a:spLocks xmlns:a="http://schemas.openxmlformats.org/drawingml/2006/main" noGrp="1"/>
-          </p:cNvSpPr>
-          <p:nvPr/>
-        </p:nvSpPr>
-        <p:spPr>
-          <a:xfrm xmlns:a="http://schemas.openxmlformats.org/drawingml/2006/main">
-            <a:off x="819150" y="7334250"/>
-            <a:ext cx="9124950" cy="419100"/>
+                <a16:creationId xmlns:a16="http://schemas.microsoft.com/office/drawing/2014/main" id="{9DE71FCB-3162-440F-8730-4733C93BF13A}"/>
+              </a:ext>
+            </a:extLst>
+          </p:cNvPr>
+          <p:cNvSpPr>
+            <a:spLocks xmlns:a="http://schemas.openxmlformats.org/drawingml/2006/main" noGrp="1"/>
+          </p:cNvSpPr>
+          <p:nvPr/>
+        </p:nvSpPr>
+        <p:spPr>
+          <a:xfrm xmlns:a="http://schemas.openxmlformats.org/drawingml/2006/main">
+            <a:off x="819150" y="7372350"/>
+            <a:ext cx="6267450" cy="419100"/>
           </a:xfrm>
           <a:prstGeom xmlns:a="http://schemas.openxmlformats.org/drawingml/2006/main" prst="rect">
             <a:avLst/>
@@ -4598,7 +4769,7 @@
                   <a:srgbClr val="64748B"/>
                 </a:solidFill>
               </a:rPr>
-              <a:t>落地扩展：GitHub/GitLab Webhook 触发，报告可自动评论到 PR；LLM 只接收命中的函数上下文，减少幻觉和 token 成本。</a:t>
+              <a:t>部门价值：把个人经验变成可复用的工程规则，让每个 PR 都经过一致的质量门槛。</a:t>
             </a:r>
           </a:p>
         </p:txBody>
@@ -4606,7 +4777,7 @@
     </p:spTree>
     <p:extLst>
       <p:ext uri="{BB962C8B-B14F-4D97-AF65-F5344CB8AC3E}">
-        <p14:creationId xmlns:p14="http://schemas.microsoft.com/office/powerpoint/2010/main" val="212034966"/>
+        <p14:creationId xmlns:p14="http://schemas.microsoft.com/office/powerpoint/2010/main" val="1806828119"/>
       </p:ext>
     </p:extLst>
   </p:cSld>
@@ -4630,7 +4801,7 @@
           <p:cNvPr id="1" name="">
             <a:extLst xmlns:a="http://schemas.openxmlformats.org/drawingml/2006/main">
               <a:ext uri="{FF2B5EF4-FFF2-40B4-BE49-F238E27FC236}">
-                <a16:creationId xmlns:a16="http://schemas.microsoft.com/office/drawing/2014/main" id="{DABA049B-ED38-4904-A5F6-A034648CFC36}"/>
+                <a16:creationId xmlns:a16="http://schemas.microsoft.com/office/drawing/2014/main" id="{2FF4363D-5B94-4D48-985F-3D8874B5EB0B}"/>
               </a:ext>
             </a:extLst>
           </p:cNvPr>
@@ -4642,7 +4813,7 @@
         <p:spPr>
           <a:xfrm xmlns:a="http://schemas.openxmlformats.org/drawingml/2006/main">
             <a:off x="819150" y="590550"/>
-            <a:ext cx="10191750" cy="1238250"/>
+            <a:ext cx="10439400" cy="1238250"/>
           </a:xfrm>
           <a:prstGeom xmlns:a="http://schemas.openxmlformats.org/drawingml/2006/main" prst="rect">
             <a:avLst/>
@@ -4665,7 +4836,7 @@
                   <a:srgbClr val="17223B"/>
                 </a:solidFill>
               </a:rPr>
-              <a:t>提效 1：评审准备从“通读”变成“验证 AI 结论”</a:t>
+              <a:t>提效指标 1：提升 PR 吞吐，减少评审准备成本</a:t>
             </a:r>
           </a:p>
         </p:txBody>
@@ -4675,7 +4846,7 @@
           <p:cNvPr id="2" name="">
             <a:extLst xmlns:a="http://schemas.openxmlformats.org/drawingml/2006/main">
               <a:ext uri="{FF2B5EF4-FFF2-40B4-BE49-F238E27FC236}">
-                <a16:creationId xmlns:a16="http://schemas.microsoft.com/office/drawing/2014/main" id="{E2D7FB4C-FE47-43CD-B126-A9A883A1C2EA}"/>
+                <a16:creationId xmlns:a16="http://schemas.microsoft.com/office/drawing/2014/main" id="{3BC3FC75-1642-4949-86E2-A8CF70F8A13A}"/>
               </a:ext>
             </a:extLst>
           </p:cNvPr>
@@ -4687,7 +4858,7 @@
         <p:spPr>
           <a:xfrm xmlns:a="http://schemas.openxmlformats.org/drawingml/2006/main">
             <a:off x="819150" y="1962150"/>
-            <a:ext cx="8534400" cy="552450"/>
+            <a:ext cx="7829550" cy="552450"/>
           </a:xfrm>
           <a:prstGeom xmlns:a="http://schemas.openxmlformats.org/drawingml/2006/main" prst="rect">
             <a:avLst/>
@@ -4710,7 +4881,7 @@
                   <a:srgbClr val="64748B"/>
                 </a:solidFill>
               </a:rPr>
-              <a:t>演示口径：一次中等规模机器人跟随 PR，人工需要通读上下文，AI 先给出风险锚点。</a:t>
+              <a:t>演示口径：单个中等规模机器人跟随 PR；部门估算按每周 20 个类似 PR 计算。</a:t>
             </a:r>
           </a:p>
         </p:txBody>
@@ -4720,18 +4891,18 @@
           <p:cNvPr id="3" name="">
             <a:extLst xmlns:a="http://schemas.openxmlformats.org/drawingml/2006/main">
               <a:ext uri="{FF2B5EF4-FFF2-40B4-BE49-F238E27FC236}">
-                <a16:creationId xmlns:a16="http://schemas.microsoft.com/office/drawing/2014/main" id="{A00675E1-CE6D-42E1-B581-E09B6FA3DFFE}"/>
-              </a:ext>
-            </a:extLst>
-          </p:cNvPr>
-          <p:cNvSpPr>
-            <a:spLocks xmlns:a="http://schemas.openxmlformats.org/drawingml/2006/main" noGrp="1"/>
-          </p:cNvSpPr>
-          <p:nvPr/>
-        </p:nvSpPr>
-        <p:spPr>
-          <a:xfrm xmlns:a="http://schemas.openxmlformats.org/drawingml/2006/main">
-            <a:off x="819150" y="3371850"/>
+                <a16:creationId xmlns:a16="http://schemas.microsoft.com/office/drawing/2014/main" id="{0D616AA5-FC12-4B62-9DCF-D87E05A55E70}"/>
+              </a:ext>
+            </a:extLst>
+          </p:cNvPr>
+          <p:cNvSpPr>
+            <a:spLocks xmlns:a="http://schemas.openxmlformats.org/drawingml/2006/main" noGrp="1"/>
+          </p:cNvSpPr>
+          <p:nvPr/>
+        </p:nvSpPr>
+        <p:spPr>
+          <a:xfrm xmlns:a="http://schemas.openxmlformats.org/drawingml/2006/main">
+            <a:off x="819150" y="3429000"/>
             <a:ext cx="7600950" cy="266700"/>
           </a:xfrm>
           <a:prstGeom xmlns:a="http://schemas.openxmlformats.org/drawingml/2006/main" prst="rect">
@@ -4765,18 +4936,18 @@
           <p:cNvPr id="4" name="">
             <a:extLst xmlns:a="http://schemas.openxmlformats.org/drawingml/2006/main">
               <a:ext uri="{FF2B5EF4-FFF2-40B4-BE49-F238E27FC236}">
-                <a16:creationId xmlns:a16="http://schemas.microsoft.com/office/drawing/2014/main" id="{7C505BFE-1F7A-4E55-98D0-03A1A510724A}"/>
-              </a:ext>
-            </a:extLst>
-          </p:cNvPr>
-          <p:cNvSpPr>
-            <a:spLocks xmlns:a="http://schemas.openxmlformats.org/drawingml/2006/main" noGrp="1"/>
-          </p:cNvSpPr>
-          <p:nvPr/>
-        </p:nvSpPr>
-        <p:spPr>
-          <a:xfrm xmlns:a="http://schemas.openxmlformats.org/drawingml/2006/main">
-            <a:off x="819150" y="3790950"/>
+                <a16:creationId xmlns:a16="http://schemas.microsoft.com/office/drawing/2014/main" id="{46A0D232-BF6F-4F6E-A757-A4B9826A19B4}"/>
+              </a:ext>
+            </a:extLst>
+          </p:cNvPr>
+          <p:cNvSpPr>
+            <a:spLocks xmlns:a="http://schemas.openxmlformats.org/drawingml/2006/main" noGrp="1"/>
+          </p:cNvSpPr>
+          <p:nvPr/>
+        </p:nvSpPr>
+        <p:spPr>
+          <a:xfrm xmlns:a="http://schemas.openxmlformats.org/drawingml/2006/main">
+            <a:off x="819150" y="3829050"/>
             <a:ext cx="685800" cy="190500"/>
           </a:xfrm>
           <a:prstGeom xmlns:a="http://schemas.openxmlformats.org/drawingml/2006/main" prst="rect">
@@ -4810,18 +4981,18 @@
           <p:cNvPr id="5" name="">
             <a:extLst xmlns:a="http://schemas.openxmlformats.org/drawingml/2006/main">
               <a:ext uri="{FF2B5EF4-FFF2-40B4-BE49-F238E27FC236}">
-                <a16:creationId xmlns:a16="http://schemas.microsoft.com/office/drawing/2014/main" id="{2E8FE580-EE5F-4285-86F6-B04D387459D6}"/>
-              </a:ext>
-            </a:extLst>
-          </p:cNvPr>
-          <p:cNvSpPr>
-            <a:spLocks xmlns:a="http://schemas.openxmlformats.org/drawingml/2006/main" noGrp="1"/>
-          </p:cNvSpPr>
-          <p:nvPr/>
-        </p:nvSpPr>
-        <p:spPr>
-          <a:xfrm xmlns:a="http://schemas.openxmlformats.org/drawingml/2006/main">
-            <a:off x="1600200" y="3810000"/>
+                <a16:creationId xmlns:a16="http://schemas.microsoft.com/office/drawing/2014/main" id="{368CEE6E-2C2A-4F81-A36A-131E3CF55A67}"/>
+              </a:ext>
+            </a:extLst>
+          </p:cNvPr>
+          <p:cNvSpPr>
+            <a:spLocks xmlns:a="http://schemas.openxmlformats.org/drawingml/2006/main" noGrp="1"/>
+          </p:cNvSpPr>
+          <p:nvPr/>
+        </p:nvSpPr>
+        <p:spPr>
+          <a:xfrm xmlns:a="http://schemas.openxmlformats.org/drawingml/2006/main">
+            <a:off x="1600200" y="3886200"/>
             <a:ext cx="4245429" cy="152400"/>
           </a:xfrm>
           <a:prstGeom xmlns:a="http://schemas.openxmlformats.org/drawingml/2006/main" prst="roundRect">
@@ -4839,19 +5010,19 @@
           <p:cNvPr id="6" name="">
             <a:extLst xmlns:a="http://schemas.openxmlformats.org/drawingml/2006/main">
               <a:ext uri="{FF2B5EF4-FFF2-40B4-BE49-F238E27FC236}">
-                <a16:creationId xmlns:a16="http://schemas.microsoft.com/office/drawing/2014/main" id="{A10EB738-96C5-4484-9990-4D7A705B348D}"/>
-              </a:ext>
-            </a:extLst>
-          </p:cNvPr>
-          <p:cNvSpPr>
-            <a:spLocks xmlns:a="http://schemas.openxmlformats.org/drawingml/2006/main" noGrp="1"/>
-          </p:cNvSpPr>
-          <p:nvPr/>
-        </p:nvSpPr>
-        <p:spPr>
-          <a:xfrm xmlns:a="http://schemas.openxmlformats.org/drawingml/2006/main">
-            <a:off x="5981700" y="3790950"/>
-            <a:ext cx="819150" cy="190500"/>
+                <a16:creationId xmlns:a16="http://schemas.microsoft.com/office/drawing/2014/main" id="{04795BC6-3E01-4FAA-933F-7740DB016BE8}"/>
+              </a:ext>
+            </a:extLst>
+          </p:cNvPr>
+          <p:cNvSpPr>
+            <a:spLocks xmlns:a="http://schemas.openxmlformats.org/drawingml/2006/main" noGrp="1"/>
+          </p:cNvSpPr>
+          <p:nvPr/>
+        </p:nvSpPr>
+        <p:spPr>
+          <a:xfrm xmlns:a="http://schemas.openxmlformats.org/drawingml/2006/main">
+            <a:off x="5981700" y="3829050"/>
+            <a:ext cx="876300" cy="190500"/>
           </a:xfrm>
           <a:prstGeom xmlns:a="http://schemas.openxmlformats.org/drawingml/2006/main" prst="rect">
             <a:avLst/>
@@ -4884,18 +5055,18 @@
           <p:cNvPr id="7" name="">
             <a:extLst xmlns:a="http://schemas.openxmlformats.org/drawingml/2006/main">
               <a:ext uri="{FF2B5EF4-FFF2-40B4-BE49-F238E27FC236}">
-                <a16:creationId xmlns:a16="http://schemas.microsoft.com/office/drawing/2014/main" id="{A0053C14-95E1-466F-AB71-B62C429A9793}"/>
-              </a:ext>
-            </a:extLst>
-          </p:cNvPr>
-          <p:cNvSpPr>
-            <a:spLocks xmlns:a="http://schemas.openxmlformats.org/drawingml/2006/main" noGrp="1"/>
-          </p:cNvSpPr>
-          <p:nvPr/>
-        </p:nvSpPr>
-        <p:spPr>
-          <a:xfrm xmlns:a="http://schemas.openxmlformats.org/drawingml/2006/main">
-            <a:off x="819150" y="4210050"/>
+                <a16:creationId xmlns:a16="http://schemas.microsoft.com/office/drawing/2014/main" id="{37BFBAA0-55C4-48DC-BF3D-303242418493}"/>
+              </a:ext>
+            </a:extLst>
+          </p:cNvPr>
+          <p:cNvSpPr>
+            <a:spLocks xmlns:a="http://schemas.openxmlformats.org/drawingml/2006/main" noGrp="1"/>
+          </p:cNvSpPr>
+          <p:nvPr/>
+        </p:nvSpPr>
+        <p:spPr>
+          <a:xfrm xmlns:a="http://schemas.openxmlformats.org/drawingml/2006/main">
+            <a:off x="819150" y="4267200"/>
             <a:ext cx="685800" cy="190500"/>
           </a:xfrm>
           <a:prstGeom xmlns:a="http://schemas.openxmlformats.org/drawingml/2006/main" prst="rect">
@@ -4929,18 +5100,18 @@
           <p:cNvPr id="8" name="">
             <a:extLst xmlns:a="http://schemas.openxmlformats.org/drawingml/2006/main">
               <a:ext uri="{FF2B5EF4-FFF2-40B4-BE49-F238E27FC236}">
-                <a16:creationId xmlns:a16="http://schemas.microsoft.com/office/drawing/2014/main" id="{B11AA03E-4A31-4DD5-8555-7F72E79652EC}"/>
-              </a:ext>
-            </a:extLst>
-          </p:cNvPr>
-          <p:cNvSpPr>
-            <a:spLocks xmlns:a="http://schemas.openxmlformats.org/drawingml/2006/main" noGrp="1"/>
-          </p:cNvSpPr>
-          <p:nvPr/>
-        </p:nvSpPr>
-        <p:spPr>
-          <a:xfrm xmlns:a="http://schemas.openxmlformats.org/drawingml/2006/main">
-            <a:off x="1638300" y="4229100"/>
+                <a16:creationId xmlns:a16="http://schemas.microsoft.com/office/drawing/2014/main" id="{D271E8E5-9731-48BD-B803-043B5B8AA7F3}"/>
+              </a:ext>
+            </a:extLst>
+          </p:cNvPr>
+          <p:cNvSpPr>
+            <a:spLocks xmlns:a="http://schemas.openxmlformats.org/drawingml/2006/main" noGrp="1"/>
+          </p:cNvSpPr>
+          <p:nvPr/>
+        </p:nvSpPr>
+        <p:spPr>
+          <a:xfrm xmlns:a="http://schemas.openxmlformats.org/drawingml/2006/main">
+            <a:off x="1638300" y="4305300"/>
             <a:ext cx="353786" cy="152400"/>
           </a:xfrm>
           <a:prstGeom xmlns:a="http://schemas.openxmlformats.org/drawingml/2006/main" prst="roundRect">
@@ -4958,19 +5129,19 @@
           <p:cNvPr id="9" name="">
             <a:extLst xmlns:a="http://schemas.openxmlformats.org/drawingml/2006/main">
               <a:ext uri="{FF2B5EF4-FFF2-40B4-BE49-F238E27FC236}">
-                <a16:creationId xmlns:a16="http://schemas.microsoft.com/office/drawing/2014/main" id="{53C96C4A-7F17-4146-B568-EDD14904AD4E}"/>
-              </a:ext>
-            </a:extLst>
-          </p:cNvPr>
-          <p:cNvSpPr>
-            <a:spLocks xmlns:a="http://schemas.openxmlformats.org/drawingml/2006/main" noGrp="1"/>
-          </p:cNvSpPr>
-          <p:nvPr/>
-        </p:nvSpPr>
-        <p:spPr>
-          <a:xfrm xmlns:a="http://schemas.openxmlformats.org/drawingml/2006/main">
-            <a:off x="2095500" y="4210050"/>
-            <a:ext cx="819150" cy="190500"/>
+                <a16:creationId xmlns:a16="http://schemas.microsoft.com/office/drawing/2014/main" id="{3C7BEB01-67E9-41A6-BA59-25839B4A1640}"/>
+              </a:ext>
+            </a:extLst>
+          </p:cNvPr>
+          <p:cNvSpPr>
+            <a:spLocks xmlns:a="http://schemas.openxmlformats.org/drawingml/2006/main" noGrp="1"/>
+          </p:cNvSpPr>
+          <p:nvPr/>
+        </p:nvSpPr>
+        <p:spPr>
+          <a:xfrm xmlns:a="http://schemas.openxmlformats.org/drawingml/2006/main">
+            <a:off x="2095500" y="4267200"/>
+            <a:ext cx="876300" cy="190500"/>
           </a:xfrm>
           <a:prstGeom xmlns:a="http://schemas.openxmlformats.org/drawingml/2006/main" prst="rect">
             <a:avLst/>
@@ -5003,18 +5174,18 @@
           <p:cNvPr id="10" name="">
             <a:extLst xmlns:a="http://schemas.openxmlformats.org/drawingml/2006/main">
               <a:ext uri="{FF2B5EF4-FFF2-40B4-BE49-F238E27FC236}">
-                <a16:creationId xmlns:a16="http://schemas.microsoft.com/office/drawing/2014/main" id="{E8BC3FAC-B924-4203-9A56-5E5BFC5E0129}"/>
-              </a:ext>
-            </a:extLst>
-          </p:cNvPr>
-          <p:cNvSpPr>
-            <a:spLocks xmlns:a="http://schemas.openxmlformats.org/drawingml/2006/main" noGrp="1"/>
-          </p:cNvSpPr>
-          <p:nvPr/>
-        </p:nvSpPr>
-        <p:spPr>
-          <a:xfrm xmlns:a="http://schemas.openxmlformats.org/drawingml/2006/main">
-            <a:off x="819150" y="4724400"/>
+                <a16:creationId xmlns:a16="http://schemas.microsoft.com/office/drawing/2014/main" id="{BA685004-F49E-4580-A235-A88D5E874118}"/>
+              </a:ext>
+            </a:extLst>
+          </p:cNvPr>
+          <p:cNvSpPr>
+            <a:spLocks xmlns:a="http://schemas.openxmlformats.org/drawingml/2006/main" noGrp="1"/>
+          </p:cNvSpPr>
+          <p:nvPr/>
+        </p:nvSpPr>
+        <p:spPr>
+          <a:xfrm xmlns:a="http://schemas.openxmlformats.org/drawingml/2006/main">
+            <a:off x="819150" y="4762500"/>
             <a:ext cx="7600950" cy="266700"/>
           </a:xfrm>
           <a:prstGeom xmlns:a="http://schemas.openxmlformats.org/drawingml/2006/main" prst="rect">
@@ -5048,18 +5219,18 @@
           <p:cNvPr id="11" name="">
             <a:extLst xmlns:a="http://schemas.openxmlformats.org/drawingml/2006/main">
               <a:ext uri="{FF2B5EF4-FFF2-40B4-BE49-F238E27FC236}">
-                <a16:creationId xmlns:a16="http://schemas.microsoft.com/office/drawing/2014/main" id="{4EC6BFD3-63E6-4BDB-AE7F-05CBB01D2AF3}"/>
-              </a:ext>
-            </a:extLst>
-          </p:cNvPr>
-          <p:cNvSpPr>
-            <a:spLocks xmlns:a="http://schemas.openxmlformats.org/drawingml/2006/main" noGrp="1"/>
-          </p:cNvSpPr>
-          <p:nvPr/>
-        </p:nvSpPr>
-        <p:spPr>
-          <a:xfrm xmlns:a="http://schemas.openxmlformats.org/drawingml/2006/main">
-            <a:off x="819150" y="5143500"/>
+                <a16:creationId xmlns:a16="http://schemas.microsoft.com/office/drawing/2014/main" id="{A51743CD-613C-4F44-94DE-212D411EB348}"/>
+              </a:ext>
+            </a:extLst>
+          </p:cNvPr>
+          <p:cNvSpPr>
+            <a:spLocks xmlns:a="http://schemas.openxmlformats.org/drawingml/2006/main" noGrp="1"/>
+          </p:cNvSpPr>
+          <p:nvPr/>
+        </p:nvSpPr>
+        <p:spPr>
+          <a:xfrm xmlns:a="http://schemas.openxmlformats.org/drawingml/2006/main">
+            <a:off x="819150" y="5162550"/>
             <a:ext cx="685800" cy="190500"/>
           </a:xfrm>
           <a:prstGeom xmlns:a="http://schemas.openxmlformats.org/drawingml/2006/main" prst="rect">
@@ -5093,7 +5264,7 @@
           <p:cNvPr id="12" name="">
             <a:extLst xmlns:a="http://schemas.openxmlformats.org/drawingml/2006/main">
               <a:ext uri="{FF2B5EF4-FFF2-40B4-BE49-F238E27FC236}">
-                <a16:creationId xmlns:a16="http://schemas.microsoft.com/office/drawing/2014/main" id="{44BD34F7-A2E5-4804-ACBF-45F9DF6069AF}"/>
+                <a16:creationId xmlns:a16="http://schemas.microsoft.com/office/drawing/2014/main" id="{3E0FE75D-4A4C-46D9-930E-E4010324DF89}"/>
               </a:ext>
             </a:extLst>
           </p:cNvPr>
@@ -5122,19 +5293,19 @@
           <p:cNvPr id="13" name="">
             <a:extLst xmlns:a="http://schemas.openxmlformats.org/drawingml/2006/main">
               <a:ext uri="{FF2B5EF4-FFF2-40B4-BE49-F238E27FC236}">
-                <a16:creationId xmlns:a16="http://schemas.microsoft.com/office/drawing/2014/main" id="{7212E50B-6ECE-4197-917A-C3EF5F79CCC7}"/>
-              </a:ext>
-            </a:extLst>
-          </p:cNvPr>
-          <p:cNvSpPr>
-            <a:spLocks xmlns:a="http://schemas.openxmlformats.org/drawingml/2006/main" noGrp="1"/>
-          </p:cNvSpPr>
-          <p:nvPr/>
-        </p:nvSpPr>
-        <p:spPr>
-          <a:xfrm xmlns:a="http://schemas.openxmlformats.org/drawingml/2006/main">
-            <a:off x="4572000" y="5143500"/>
-            <a:ext cx="819150" cy="190500"/>
+                <a16:creationId xmlns:a16="http://schemas.microsoft.com/office/drawing/2014/main" id="{BFB47E43-3971-4EB5-B36F-BC06613D83AE}"/>
+              </a:ext>
+            </a:extLst>
+          </p:cNvPr>
+          <p:cNvSpPr>
+            <a:spLocks xmlns:a="http://schemas.openxmlformats.org/drawingml/2006/main" noGrp="1"/>
+          </p:cNvSpPr>
+          <p:nvPr/>
+        </p:nvSpPr>
+        <p:spPr>
+          <a:xfrm xmlns:a="http://schemas.openxmlformats.org/drawingml/2006/main">
+            <a:off x="4572000" y="5162550"/>
+            <a:ext cx="876300" cy="190500"/>
           </a:xfrm>
           <a:prstGeom xmlns:a="http://schemas.openxmlformats.org/drawingml/2006/main" prst="rect">
             <a:avLst/>
@@ -5167,18 +5338,18 @@
           <p:cNvPr id="14" name="">
             <a:extLst xmlns:a="http://schemas.openxmlformats.org/drawingml/2006/main">
               <a:ext uri="{FF2B5EF4-FFF2-40B4-BE49-F238E27FC236}">
-                <a16:creationId xmlns:a16="http://schemas.microsoft.com/office/drawing/2014/main" id="{DEAAECAD-40CE-4A61-A631-B8E33D24C74D}"/>
-              </a:ext>
-            </a:extLst>
-          </p:cNvPr>
-          <p:cNvSpPr>
-            <a:spLocks xmlns:a="http://schemas.openxmlformats.org/drawingml/2006/main" noGrp="1"/>
-          </p:cNvSpPr>
-          <p:nvPr/>
-        </p:nvSpPr>
-        <p:spPr>
-          <a:xfrm xmlns:a="http://schemas.openxmlformats.org/drawingml/2006/main">
-            <a:off x="819150" y="5581650"/>
+                <a16:creationId xmlns:a16="http://schemas.microsoft.com/office/drawing/2014/main" id="{1F955412-1694-415D-B9B4-89C207DAB0F4}"/>
+              </a:ext>
+            </a:extLst>
+          </p:cNvPr>
+          <p:cNvSpPr>
+            <a:spLocks xmlns:a="http://schemas.openxmlformats.org/drawingml/2006/main" noGrp="1"/>
+          </p:cNvSpPr>
+          <p:nvPr/>
+        </p:nvSpPr>
+        <p:spPr>
+          <a:xfrm xmlns:a="http://schemas.openxmlformats.org/drawingml/2006/main">
+            <a:off x="819150" y="5600700"/>
             <a:ext cx="685800" cy="190500"/>
           </a:xfrm>
           <a:prstGeom xmlns:a="http://schemas.openxmlformats.org/drawingml/2006/main" prst="rect">
@@ -5212,18 +5383,18 @@
           <p:cNvPr id="15" name="">
             <a:extLst xmlns:a="http://schemas.openxmlformats.org/drawingml/2006/main">
               <a:ext uri="{FF2B5EF4-FFF2-40B4-BE49-F238E27FC236}">
-                <a16:creationId xmlns:a16="http://schemas.microsoft.com/office/drawing/2014/main" id="{FD174512-A4D5-4D0C-BE7A-FC1A9062ACD7}"/>
-              </a:ext>
-            </a:extLst>
-          </p:cNvPr>
-          <p:cNvSpPr>
-            <a:spLocks xmlns:a="http://schemas.openxmlformats.org/drawingml/2006/main" noGrp="1"/>
-          </p:cNvSpPr>
-          <p:nvPr/>
-        </p:nvSpPr>
-        <p:spPr>
-          <a:xfrm xmlns:a="http://schemas.openxmlformats.org/drawingml/2006/main">
-            <a:off x="1638300" y="5600700"/>
+                <a16:creationId xmlns:a16="http://schemas.microsoft.com/office/drawing/2014/main" id="{BC2FD5A4-066D-4F89-93A4-DE427096ECA0}"/>
+              </a:ext>
+            </a:extLst>
+          </p:cNvPr>
+          <p:cNvSpPr>
+            <a:spLocks xmlns:a="http://schemas.openxmlformats.org/drawingml/2006/main" noGrp="1"/>
+          </p:cNvSpPr>
+          <p:nvPr/>
+        </p:nvSpPr>
+        <p:spPr>
+          <a:xfrm xmlns:a="http://schemas.openxmlformats.org/drawingml/2006/main">
+            <a:off x="1638300" y="5638800"/>
             <a:ext cx="353786" cy="152400"/>
           </a:xfrm>
           <a:prstGeom xmlns:a="http://schemas.openxmlformats.org/drawingml/2006/main" prst="roundRect">
@@ -5241,19 +5412,19 @@
           <p:cNvPr id="16" name="">
             <a:extLst xmlns:a="http://schemas.openxmlformats.org/drawingml/2006/main">
               <a:ext uri="{FF2B5EF4-FFF2-40B4-BE49-F238E27FC236}">
-                <a16:creationId xmlns:a16="http://schemas.microsoft.com/office/drawing/2014/main" id="{88EC6279-2C1E-4FD6-91AD-7A1F5E2B1A09}"/>
-              </a:ext>
-            </a:extLst>
-          </p:cNvPr>
-          <p:cNvSpPr>
-            <a:spLocks xmlns:a="http://schemas.openxmlformats.org/drawingml/2006/main" noGrp="1"/>
-          </p:cNvSpPr>
-          <p:nvPr/>
-        </p:nvSpPr>
-        <p:spPr>
-          <a:xfrm xmlns:a="http://schemas.openxmlformats.org/drawingml/2006/main">
-            <a:off x="2095500" y="5581650"/>
-            <a:ext cx="819150" cy="190500"/>
+                <a16:creationId xmlns:a16="http://schemas.microsoft.com/office/drawing/2014/main" id="{1E445F01-9169-4692-82D8-4A123BF83E93}"/>
+              </a:ext>
+            </a:extLst>
+          </p:cNvPr>
+          <p:cNvSpPr>
+            <a:spLocks xmlns:a="http://schemas.openxmlformats.org/drawingml/2006/main" noGrp="1"/>
+          </p:cNvSpPr>
+          <p:nvPr/>
+        </p:nvSpPr>
+        <p:spPr>
+          <a:xfrm xmlns:a="http://schemas.openxmlformats.org/drawingml/2006/main">
+            <a:off x="2095500" y="5600700"/>
+            <a:ext cx="876300" cy="190500"/>
           </a:xfrm>
           <a:prstGeom xmlns:a="http://schemas.openxmlformats.org/drawingml/2006/main" prst="rect">
             <a:avLst/>
@@ -5286,7 +5457,7 @@
           <p:cNvPr id="17" name="">
             <a:extLst xmlns:a="http://schemas.openxmlformats.org/drawingml/2006/main">
               <a:ext uri="{FF2B5EF4-FFF2-40B4-BE49-F238E27FC236}">
-                <a16:creationId xmlns:a16="http://schemas.microsoft.com/office/drawing/2014/main" id="{B15AA77E-1F8A-447E-9DB5-E4DEA5027224}"/>
+                <a16:creationId xmlns:a16="http://schemas.microsoft.com/office/drawing/2014/main" id="{1979A727-1F22-419C-AAE4-6AC6BD818C0F}"/>
               </a:ext>
             </a:extLst>
           </p:cNvPr>
@@ -5331,18 +5502,18 @@
           <p:cNvPr id="18" name="">
             <a:extLst xmlns:a="http://schemas.openxmlformats.org/drawingml/2006/main">
               <a:ext uri="{FF2B5EF4-FFF2-40B4-BE49-F238E27FC236}">
-                <a16:creationId xmlns:a16="http://schemas.microsoft.com/office/drawing/2014/main" id="{818C76E8-A4D7-4EF8-BD0F-889E4CD69013}"/>
-              </a:ext>
-            </a:extLst>
-          </p:cNvPr>
-          <p:cNvSpPr>
-            <a:spLocks xmlns:a="http://schemas.openxmlformats.org/drawingml/2006/main" noGrp="1"/>
-          </p:cNvSpPr>
-          <p:nvPr/>
-        </p:nvSpPr>
-        <p:spPr>
-          <a:xfrm xmlns:a="http://schemas.openxmlformats.org/drawingml/2006/main">
-            <a:off x="819150" y="6496050"/>
+                <a16:creationId xmlns:a16="http://schemas.microsoft.com/office/drawing/2014/main" id="{31B890E3-862A-440E-8E65-0290C200CE56}"/>
+              </a:ext>
+            </a:extLst>
+          </p:cNvPr>
+          <p:cNvSpPr>
+            <a:spLocks xmlns:a="http://schemas.openxmlformats.org/drawingml/2006/main" noGrp="1"/>
+          </p:cNvSpPr>
+          <p:nvPr/>
+        </p:nvSpPr>
+        <p:spPr>
+          <a:xfrm xmlns:a="http://schemas.openxmlformats.org/drawingml/2006/main">
+            <a:off x="819150" y="6515100"/>
             <a:ext cx="685800" cy="190500"/>
           </a:xfrm>
           <a:prstGeom xmlns:a="http://schemas.openxmlformats.org/drawingml/2006/main" prst="rect">
@@ -5376,7 +5547,7 @@
           <p:cNvPr id="19" name="">
             <a:extLst xmlns:a="http://schemas.openxmlformats.org/drawingml/2006/main">
               <a:ext uri="{FF2B5EF4-FFF2-40B4-BE49-F238E27FC236}">
-                <a16:creationId xmlns:a16="http://schemas.microsoft.com/office/drawing/2014/main" id="{627C879E-2809-4072-80C2-C15B5CBC3C1A}"/>
+                <a16:creationId xmlns:a16="http://schemas.microsoft.com/office/drawing/2014/main" id="{FB2331D1-6188-4D6F-A39D-9520B9137590}"/>
               </a:ext>
             </a:extLst>
           </p:cNvPr>
@@ -5405,19 +5576,19 @@
           <p:cNvPr id="20" name="">
             <a:extLst xmlns:a="http://schemas.openxmlformats.org/drawingml/2006/main">
               <a:ext uri="{FF2B5EF4-FFF2-40B4-BE49-F238E27FC236}">
-                <a16:creationId xmlns:a16="http://schemas.microsoft.com/office/drawing/2014/main" id="{38FFF9A0-512C-4218-A321-71C511998F2F}"/>
-              </a:ext>
-            </a:extLst>
-          </p:cNvPr>
-          <p:cNvSpPr>
-            <a:spLocks xmlns:a="http://schemas.openxmlformats.org/drawingml/2006/main" noGrp="1"/>
-          </p:cNvSpPr>
-          <p:nvPr/>
-        </p:nvSpPr>
-        <p:spPr>
-          <a:xfrm xmlns:a="http://schemas.openxmlformats.org/drawingml/2006/main">
-            <a:off x="3505200" y="6496050"/>
-            <a:ext cx="819150" cy="190500"/>
+                <a16:creationId xmlns:a16="http://schemas.microsoft.com/office/drawing/2014/main" id="{0B43E5D8-D7A3-4D47-A8F1-F8863BA3A6DB}"/>
+              </a:ext>
+            </a:extLst>
+          </p:cNvPr>
+          <p:cNvSpPr>
+            <a:spLocks xmlns:a="http://schemas.openxmlformats.org/drawingml/2006/main" noGrp="1"/>
+          </p:cNvSpPr>
+          <p:nvPr/>
+        </p:nvSpPr>
+        <p:spPr>
+          <a:xfrm xmlns:a="http://schemas.openxmlformats.org/drawingml/2006/main">
+            <a:off x="3505200" y="6515100"/>
+            <a:ext cx="876300" cy="190500"/>
           </a:xfrm>
           <a:prstGeom xmlns:a="http://schemas.openxmlformats.org/drawingml/2006/main" prst="rect">
             <a:avLst/>
@@ -5450,7 +5621,7 @@
           <p:cNvPr id="21" name="">
             <a:extLst xmlns:a="http://schemas.openxmlformats.org/drawingml/2006/main">
               <a:ext uri="{FF2B5EF4-FFF2-40B4-BE49-F238E27FC236}">
-                <a16:creationId xmlns:a16="http://schemas.microsoft.com/office/drawing/2014/main" id="{01BF8FA6-435D-4F2C-A572-F8713B7E79F0}"/>
+                <a16:creationId xmlns:a16="http://schemas.microsoft.com/office/drawing/2014/main" id="{9DAEBD3B-47C1-4E9A-BC4B-79C2D4293A91}"/>
               </a:ext>
             </a:extLst>
           </p:cNvPr>
@@ -5495,7 +5666,7 @@
           <p:cNvPr id="22" name="">
             <a:extLst xmlns:a="http://schemas.openxmlformats.org/drawingml/2006/main">
               <a:ext uri="{FF2B5EF4-FFF2-40B4-BE49-F238E27FC236}">
-                <a16:creationId xmlns:a16="http://schemas.microsoft.com/office/drawing/2014/main" id="{73F6ED89-E09F-4657-B0CF-F9B94E27AB30}"/>
+                <a16:creationId xmlns:a16="http://schemas.microsoft.com/office/drawing/2014/main" id="{C1E1A3BD-D5EF-4AEA-94D1-8DF2283F369C}"/>
               </a:ext>
             </a:extLst>
           </p:cNvPr>
@@ -5524,7 +5695,7 @@
           <p:cNvPr id="23" name="">
             <a:extLst xmlns:a="http://schemas.openxmlformats.org/drawingml/2006/main">
               <a:ext uri="{FF2B5EF4-FFF2-40B4-BE49-F238E27FC236}">
-                <a16:creationId xmlns:a16="http://schemas.microsoft.com/office/drawing/2014/main" id="{C626574D-30F0-4A52-8A7F-3D2E119852A9}"/>
+                <a16:creationId xmlns:a16="http://schemas.microsoft.com/office/drawing/2014/main" id="{A52D120D-678B-4A45-B1C2-1D302FC9BE4D}"/>
               </a:ext>
             </a:extLst>
           </p:cNvPr>
@@ -5536,7 +5707,7 @@
         <p:spPr>
           <a:xfrm xmlns:a="http://schemas.openxmlformats.org/drawingml/2006/main">
             <a:off x="2095500" y="6934200"/>
-            <a:ext cx="819150" cy="190500"/>
+            <a:ext cx="876300" cy="190500"/>
           </a:xfrm>
           <a:prstGeom xmlns:a="http://schemas.openxmlformats.org/drawingml/2006/main" prst="rect">
             <a:avLst/>
@@ -5569,23 +5740,23 @@
           <p:cNvPr id="24" name="">
             <a:extLst xmlns:a="http://schemas.openxmlformats.org/drawingml/2006/main">
               <a:ext uri="{FF2B5EF4-FFF2-40B4-BE49-F238E27FC236}">
-                <a16:creationId xmlns:a16="http://schemas.microsoft.com/office/drawing/2014/main" id="{EA9B9B64-C033-4CE6-B339-5929198E942E}"/>
-              </a:ext>
-            </a:extLst>
-          </p:cNvPr>
-          <p:cNvSpPr>
-            <a:spLocks xmlns:a="http://schemas.openxmlformats.org/drawingml/2006/main" noGrp="1"/>
-          </p:cNvSpPr>
-          <p:nvPr/>
-        </p:nvSpPr>
-        <p:spPr>
-          <a:xfrm xmlns:a="http://schemas.openxmlformats.org/drawingml/2006/main">
-            <a:off x="819150" y="7444740"/>
-            <a:ext cx="3662934" cy="1706880"/>
+                <a16:creationId xmlns:a16="http://schemas.microsoft.com/office/drawing/2014/main" id="{B00D556F-7F1C-4782-8138-B97EFB29A9A3}"/>
+              </a:ext>
+            </a:extLst>
+          </p:cNvPr>
+          <p:cNvSpPr>
+            <a:spLocks xmlns:a="http://schemas.openxmlformats.org/drawingml/2006/main" noGrp="1"/>
+          </p:cNvSpPr>
+          <p:nvPr/>
+        </p:nvSpPr>
+        <p:spPr>
+          <a:xfrm xmlns:a="http://schemas.openxmlformats.org/drawingml/2006/main">
+            <a:off x="819150" y="7433310"/>
+            <a:ext cx="3691509" cy="1672590"/>
           </a:xfrm>
           <a:prstGeom xmlns:a="http://schemas.openxmlformats.org/drawingml/2006/main" prst="roundRect">
             <a:avLst>
-              <a:gd name="adj" fmla="val 6696"/>
+              <a:gd name="adj" fmla="val 6834"/>
             </a:avLst>
           </a:prstGeom>
           <a:solidFill xmlns:a="http://schemas.openxmlformats.org/drawingml/2006/main">
@@ -5604,120 +5775,132 @@
           <p:cNvPr id="25" name="">
             <a:extLst xmlns:a="http://schemas.openxmlformats.org/drawingml/2006/main">
               <a:ext uri="{FF2B5EF4-FFF2-40B4-BE49-F238E27FC236}">
-                <a16:creationId xmlns:a16="http://schemas.microsoft.com/office/drawing/2014/main" id="{495201B7-F0E8-481D-BAC6-C1C2CA832A2E}"/>
-              </a:ext>
-            </a:extLst>
-          </p:cNvPr>
-          <p:cNvSpPr>
-            <a:spLocks xmlns:a="http://schemas.openxmlformats.org/drawingml/2006/main" noGrp="1"/>
-          </p:cNvSpPr>
-          <p:nvPr/>
-        </p:nvSpPr>
-        <p:spPr>
-          <a:xfrm xmlns:a="http://schemas.openxmlformats.org/drawingml/2006/main">
-            <a:off x="1085850" y="7677150"/>
-            <a:ext cx="3124200" cy="647700"/>
-          </a:xfrm>
-          <a:prstGeom xmlns:a="http://schemas.openxmlformats.org/drawingml/2006/main" prst="rect">
-            <a:avLst/>
-          </a:prstGeom>
-        </p:spPr>
-        <p:txBody>
-          <a:bodyPr xmlns:a="http://schemas.openxmlformats.org/drawingml/2006/main" lIns="0" tIns="0" rIns="0" bIns="0"/>
-          <a:lstStyle xmlns:a="http://schemas.openxmlformats.org/drawingml/2006/main"/>
-          <a:p xmlns:a="http://schemas.openxmlformats.org/drawingml/2006/main">
-            <a:pPr>
-              <a:defRPr sz="4200" b="1">
+                <a16:creationId xmlns:a16="http://schemas.microsoft.com/office/drawing/2014/main" id="{77BF0DBA-19ED-4AC8-B2F0-C78A55B104E3}"/>
+              </a:ext>
+            </a:extLst>
+          </p:cNvPr>
+          <p:cNvSpPr>
+            <a:spLocks xmlns:a="http://schemas.openxmlformats.org/drawingml/2006/main" noGrp="1"/>
+          </p:cNvSpPr>
+          <p:nvPr/>
+        </p:nvSpPr>
+        <p:spPr>
+          <a:xfrm xmlns:a="http://schemas.openxmlformats.org/drawingml/2006/main">
+            <a:off x="1085850" y="7658100"/>
+            <a:ext cx="3162300" cy="628650"/>
+          </a:xfrm>
+          <a:prstGeom xmlns:a="http://schemas.openxmlformats.org/drawingml/2006/main" prst="rect">
+            <a:avLst/>
+          </a:prstGeom>
+        </p:spPr>
+        <p:txBody>
+          <a:bodyPr xmlns:a="http://schemas.openxmlformats.org/drawingml/2006/main" lIns="0" tIns="0" rIns="0" bIns="0"/>
+          <a:lstStyle xmlns:a="http://schemas.openxmlformats.org/drawingml/2006/main"/>
+          <a:p xmlns:a="http://schemas.openxmlformats.org/drawingml/2006/main">
+            <a:pPr>
+              <a:defRPr sz="4050" b="1">
+                <a:solidFill>
+                  <a:srgbClr val="16A34A"/>
+                </a:solidFill>
+              </a:defRPr>
+            </a:pPr>
+            <a:r>
+              <a:rPr sz="4050" b="1">
+                <a:solidFill>
+                  <a:srgbClr val="16A34A"/>
+                </a:solidFill>
+              </a:rPr>
+              <a:t>22 min</a:t>
+            </a:r>
+          </a:p>
+        </p:txBody>
+      </p:sp>
+      <p:sp>
+        <p:nvSpPr>
+          <p:cNvPr id="26" name="">
+            <a:extLst xmlns:a="http://schemas.openxmlformats.org/drawingml/2006/main">
+              <a:ext uri="{FF2B5EF4-FFF2-40B4-BE49-F238E27FC236}">
+                <a16:creationId xmlns:a16="http://schemas.microsoft.com/office/drawing/2014/main" id="{C95608B6-F83E-4158-912C-566015B256FC}"/>
+              </a:ext>
+            </a:extLst>
+          </p:cNvPr>
+          <p:cNvSpPr>
+            <a:spLocks xmlns:a="http://schemas.openxmlformats.org/drawingml/2006/main" noGrp="1"/>
+          </p:cNvSpPr>
+          <p:nvPr/>
+        </p:nvSpPr>
+        <p:spPr>
+          <a:xfrm xmlns:a="http://schemas.openxmlformats.org/drawingml/2006/main">
+            <a:off x="1085850" y="8362950"/>
+            <a:ext cx="3162300" cy="266700"/>
+          </a:xfrm>
+          <a:prstGeom xmlns:a="http://schemas.openxmlformats.org/drawingml/2006/main" prst="rect">
+            <a:avLst/>
+          </a:prstGeom>
+        </p:spPr>
+        <p:txBody>
+          <a:bodyPr xmlns:a="http://schemas.openxmlformats.org/drawingml/2006/main" lIns="0" tIns="0" rIns="0" bIns="0"/>
+          <a:lstStyle xmlns:a="http://schemas.openxmlformats.org/drawingml/2006/main"/>
+          <a:p xmlns:a="http://schemas.openxmlformats.org/drawingml/2006/main">
+            <a:pPr>
+              <a:defRPr sz="1650" b="1">
+                <a:solidFill>
+                  <a:srgbClr val="1F2937"/>
+                </a:solidFill>
+              </a:defRPr>
+            </a:pPr>
+            <a:r>
+              <a:rPr sz="1650" b="1">
+                <a:solidFill>
+                  <a:srgbClr val="1F2937"/>
+                </a:solidFill>
+              </a:rPr>
+              <a:t>单 PR 节省</a:t>
+            </a:r>
+          </a:p>
+        </p:txBody>
+      </p:sp>
+      <p:sp>
+        <p:nvSpPr>
+          <p:cNvPr id="27" name="">
+            <a:extLst xmlns:a="http://schemas.openxmlformats.org/drawingml/2006/main">
+              <a:ext uri="{FF2B5EF4-FFF2-40B4-BE49-F238E27FC236}">
+                <a16:creationId xmlns:a16="http://schemas.microsoft.com/office/drawing/2014/main" id="{FDC63860-8D96-4F1B-BE57-3BE179DBB8C0}"/>
+              </a:ext>
+            </a:extLst>
+          </p:cNvPr>
+          <p:cNvSpPr>
+            <a:spLocks xmlns:a="http://schemas.openxmlformats.org/drawingml/2006/main" noGrp="1"/>
+          </p:cNvSpPr>
+          <p:nvPr/>
+        </p:nvSpPr>
+        <p:spPr>
+          <a:xfrm xmlns:a="http://schemas.openxmlformats.org/drawingml/2006/main">
+            <a:off x="1085850" y="8686800"/>
+            <a:ext cx="3162300" cy="209550"/>
+          </a:xfrm>
+          <a:prstGeom xmlns:a="http://schemas.openxmlformats.org/drawingml/2006/main" prst="rect">
+            <a:avLst/>
+          </a:prstGeom>
+        </p:spPr>
+        <p:txBody>
+          <a:bodyPr xmlns:a="http://schemas.openxmlformats.org/drawingml/2006/main" lIns="0" tIns="0" rIns="0" bIns="0"/>
+          <a:lstStyle xmlns:a="http://schemas.openxmlformats.org/drawingml/2006/main"/>
+          <a:p xmlns:a="http://schemas.openxmlformats.org/drawingml/2006/main">
+            <a:pPr>
+              <a:defRPr sz="1275">
                 <a:solidFill>
                   <a:srgbClr val="64748B"/>
                 </a:solidFill>
               </a:defRPr>
             </a:pPr>
             <a:r>
-              <a:rPr sz="4200" b="1">
+              <a:rPr sz="1275">
                 <a:solidFill>
                   <a:srgbClr val="64748B"/>
                 </a:solidFill>
               </a:rPr>
-              <a:t>25 min</a:t>
-            </a:r>
-          </a:p>
-        </p:txBody>
-      </p:sp>
-      <p:sp>
-        <p:nvSpPr>
-          <p:cNvPr id="26" name="">
-            <a:extLst xmlns:a="http://schemas.openxmlformats.org/drawingml/2006/main">
-              <a:ext uri="{FF2B5EF4-FFF2-40B4-BE49-F238E27FC236}">
-                <a16:creationId xmlns:a16="http://schemas.microsoft.com/office/drawing/2014/main" id="{67798CA9-63B7-4221-84BE-7F7C9BAEF0FE}"/>
-              </a:ext>
-            </a:extLst>
-          </p:cNvPr>
-          <p:cNvSpPr>
-            <a:spLocks xmlns:a="http://schemas.openxmlformats.org/drawingml/2006/main" noGrp="1"/>
-          </p:cNvSpPr>
-          <p:nvPr/>
-        </p:nvSpPr>
-        <p:spPr>
-          <a:xfrm xmlns:a="http://schemas.openxmlformats.org/drawingml/2006/main">
-            <a:off x="1085850" y="8382000"/>
-            <a:ext cx="3124200" cy="266700"/>
-          </a:xfrm>
-          <a:prstGeom xmlns:a="http://schemas.openxmlformats.org/drawingml/2006/main" prst="rect">
-            <a:avLst/>
-          </a:prstGeom>
-        </p:spPr>
-        <p:txBody>
-          <a:bodyPr xmlns:a="http://schemas.openxmlformats.org/drawingml/2006/main" lIns="0" tIns="0" rIns="0" bIns="0"/>
-          <a:lstStyle xmlns:a="http://schemas.openxmlformats.org/drawingml/2006/main"/>
-          <a:p xmlns:a="http://schemas.openxmlformats.org/drawingml/2006/main">
-            <a:pPr>
-              <a:defRPr sz="1725" b="1">
-                <a:solidFill>
-                  <a:srgbClr val="1F2937"/>
-                </a:solidFill>
-              </a:defRPr>
-            </a:pPr>
-            <a:r>
-              <a:rPr sz="1725" b="1">
-                <a:solidFill>
-                  <a:srgbClr val="1F2937"/>
-                </a:solidFill>
-              </a:rPr>
-              <a:t>人工准备</a:t>
-            </a:r>
-          </a:p>
-        </p:txBody>
-      </p:sp>
-      <p:sp>
-        <p:nvSpPr>
-          <p:cNvPr id="27" name="">
-            <a:extLst xmlns:a="http://schemas.openxmlformats.org/drawingml/2006/main">
-              <a:ext uri="{FF2B5EF4-FFF2-40B4-BE49-F238E27FC236}">
-                <a16:creationId xmlns:a16="http://schemas.microsoft.com/office/drawing/2014/main" id="{159FD483-4195-4850-888A-B15544D3E228}"/>
-              </a:ext>
-            </a:extLst>
-          </p:cNvPr>
-          <p:cNvSpPr>
-            <a:spLocks xmlns:a="http://schemas.openxmlformats.org/drawingml/2006/main" noGrp="1"/>
-          </p:cNvSpPr>
-          <p:nvPr/>
-        </p:nvSpPr>
-        <p:spPr>
-          <a:xfrm xmlns:a="http://schemas.openxmlformats.org/drawingml/2006/main">
-            <a:off x="1085850" y="8724900"/>
-            <a:ext cx="3124200" cy="209550"/>
-          </a:xfrm>
-          <a:prstGeom xmlns:a="http://schemas.openxmlformats.org/drawingml/2006/main" prst="rect">
-            <a:avLst/>
-          </a:prstGeom>
-        </p:spPr>
-        <p:txBody>
-          <a:bodyPr xmlns:a="http://schemas.openxmlformats.org/drawingml/2006/main" lIns="0" tIns="0" rIns="0" bIns="0"/>
-          <a:lstStyle xmlns:a="http://schemas.openxmlformats.org/drawingml/2006/main"/>
-          <a:p xmlns:a="http://schemas.openxmlformats.org/drawingml/2006/main">
-            <a:r>
-              <a:t/>
+              <a:t>25 -&gt; 3 min</a:t>
             </a:r>
           </a:p>
         </p:txBody>
@@ -5727,23 +5910,23 @@
           <p:cNvPr id="28" name="">
             <a:extLst xmlns:a="http://schemas.openxmlformats.org/drawingml/2006/main">
               <a:ext uri="{FF2B5EF4-FFF2-40B4-BE49-F238E27FC236}">
-                <a16:creationId xmlns:a16="http://schemas.microsoft.com/office/drawing/2014/main" id="{0A7AC6EF-89A8-4339-A341-90B1AF8FA0F8}"/>
-              </a:ext>
-            </a:extLst>
-          </p:cNvPr>
-          <p:cNvSpPr>
-            <a:spLocks xmlns:a="http://schemas.openxmlformats.org/drawingml/2006/main" noGrp="1"/>
-          </p:cNvSpPr>
-          <p:nvPr/>
-        </p:nvSpPr>
-        <p:spPr>
-          <a:xfrm xmlns:a="http://schemas.openxmlformats.org/drawingml/2006/main">
-            <a:off x="4748784" y="7444740"/>
-            <a:ext cx="3662934" cy="1706880"/>
+                <a16:creationId xmlns:a16="http://schemas.microsoft.com/office/drawing/2014/main" id="{BE84FEDA-6171-45E9-B8A4-72DDCA01E92E}"/>
+              </a:ext>
+            </a:extLst>
+          </p:cNvPr>
+          <p:cNvSpPr>
+            <a:spLocks xmlns:a="http://schemas.openxmlformats.org/drawingml/2006/main" noGrp="1"/>
+          </p:cNvSpPr>
+          <p:nvPr/>
+        </p:nvSpPr>
+        <p:spPr>
+          <a:xfrm xmlns:a="http://schemas.openxmlformats.org/drawingml/2006/main">
+            <a:off x="4720209" y="7433310"/>
+            <a:ext cx="3691509" cy="1672590"/>
           </a:xfrm>
           <a:prstGeom xmlns:a="http://schemas.openxmlformats.org/drawingml/2006/main" prst="roundRect">
             <a:avLst>
-              <a:gd name="adj" fmla="val 6696"/>
+              <a:gd name="adj" fmla="val 6834"/>
             </a:avLst>
           </a:prstGeom>
           <a:solidFill xmlns:a="http://schemas.openxmlformats.org/drawingml/2006/main">
@@ -5762,42 +5945,42 @@
           <p:cNvPr id="29" name="">
             <a:extLst xmlns:a="http://schemas.openxmlformats.org/drawingml/2006/main">
               <a:ext uri="{FF2B5EF4-FFF2-40B4-BE49-F238E27FC236}">
-                <a16:creationId xmlns:a16="http://schemas.microsoft.com/office/drawing/2014/main" id="{06DBE911-79FE-49D7-874A-C6F36A1496B3}"/>
-              </a:ext>
-            </a:extLst>
-          </p:cNvPr>
-          <p:cNvSpPr>
-            <a:spLocks xmlns:a="http://schemas.openxmlformats.org/drawingml/2006/main" noGrp="1"/>
-          </p:cNvSpPr>
-          <p:nvPr/>
-        </p:nvSpPr>
-        <p:spPr>
-          <a:xfrm xmlns:a="http://schemas.openxmlformats.org/drawingml/2006/main">
-            <a:off x="5010150" y="7677150"/>
-            <a:ext cx="3124200" cy="647700"/>
-          </a:xfrm>
-          <a:prstGeom xmlns:a="http://schemas.openxmlformats.org/drawingml/2006/main" prst="rect">
-            <a:avLst/>
-          </a:prstGeom>
-        </p:spPr>
-        <p:txBody>
-          <a:bodyPr xmlns:a="http://schemas.openxmlformats.org/drawingml/2006/main" lIns="0" tIns="0" rIns="0" bIns="0"/>
-          <a:lstStyle xmlns:a="http://schemas.openxmlformats.org/drawingml/2006/main"/>
-          <a:p xmlns:a="http://schemas.openxmlformats.org/drawingml/2006/main">
-            <a:pPr>
-              <a:defRPr sz="4200" b="1">
-                <a:solidFill>
-                  <a:srgbClr val="16A34A"/>
-                </a:solidFill>
-              </a:defRPr>
-            </a:pPr>
-            <a:r>
-              <a:rPr sz="4200" b="1">
-                <a:solidFill>
-                  <a:srgbClr val="16A34A"/>
-                </a:solidFill>
-              </a:rPr>
-              <a:t>3 min</a:t>
+                <a16:creationId xmlns:a16="http://schemas.microsoft.com/office/drawing/2014/main" id="{4F616446-FA4F-4A98-8EA3-AA7A5C7C0B43}"/>
+              </a:ext>
+            </a:extLst>
+          </p:cNvPr>
+          <p:cNvSpPr>
+            <a:spLocks xmlns:a="http://schemas.openxmlformats.org/drawingml/2006/main" noGrp="1"/>
+          </p:cNvSpPr>
+          <p:nvPr/>
+        </p:nvSpPr>
+        <p:spPr>
+          <a:xfrm xmlns:a="http://schemas.openxmlformats.org/drawingml/2006/main">
+            <a:off x="4991100" y="7658100"/>
+            <a:ext cx="3162300" cy="628650"/>
+          </a:xfrm>
+          <a:prstGeom xmlns:a="http://schemas.openxmlformats.org/drawingml/2006/main" prst="rect">
+            <a:avLst/>
+          </a:prstGeom>
+        </p:spPr>
+        <p:txBody>
+          <a:bodyPr xmlns:a="http://schemas.openxmlformats.org/drawingml/2006/main" lIns="0" tIns="0" rIns="0" bIns="0"/>
+          <a:lstStyle xmlns:a="http://schemas.openxmlformats.org/drawingml/2006/main"/>
+          <a:p xmlns:a="http://schemas.openxmlformats.org/drawingml/2006/main">
+            <a:pPr>
+              <a:defRPr sz="4050" b="1">
+                <a:solidFill>
+                  <a:srgbClr val="2563EB"/>
+                </a:solidFill>
+              </a:defRPr>
+            </a:pPr>
+            <a:r>
+              <a:rPr sz="4050" b="1">
+                <a:solidFill>
+                  <a:srgbClr val="2563EB"/>
+                </a:solidFill>
+              </a:rPr>
+              <a:t>7.3 h</a:t>
             </a:r>
           </a:p>
         </p:txBody>
@@ -5807,42 +5990,42 @@
           <p:cNvPr id="30" name="">
             <a:extLst xmlns:a="http://schemas.openxmlformats.org/drawingml/2006/main">
               <a:ext uri="{FF2B5EF4-FFF2-40B4-BE49-F238E27FC236}">
-                <a16:creationId xmlns:a16="http://schemas.microsoft.com/office/drawing/2014/main" id="{8EDC6261-40EA-4FE9-8254-D050D5BD349B}"/>
-              </a:ext>
-            </a:extLst>
-          </p:cNvPr>
-          <p:cNvSpPr>
-            <a:spLocks xmlns:a="http://schemas.openxmlformats.org/drawingml/2006/main" noGrp="1"/>
-          </p:cNvSpPr>
-          <p:nvPr/>
-        </p:nvSpPr>
-        <p:spPr>
-          <a:xfrm xmlns:a="http://schemas.openxmlformats.org/drawingml/2006/main">
-            <a:off x="5010150" y="8382000"/>
-            <a:ext cx="3124200" cy="266700"/>
-          </a:xfrm>
-          <a:prstGeom xmlns:a="http://schemas.openxmlformats.org/drawingml/2006/main" prst="rect">
-            <a:avLst/>
-          </a:prstGeom>
-        </p:spPr>
-        <p:txBody>
-          <a:bodyPr xmlns:a="http://schemas.openxmlformats.org/drawingml/2006/main" lIns="0" tIns="0" rIns="0" bIns="0"/>
-          <a:lstStyle xmlns:a="http://schemas.openxmlformats.org/drawingml/2006/main"/>
-          <a:p xmlns:a="http://schemas.openxmlformats.org/drawingml/2006/main">
-            <a:pPr>
-              <a:defRPr sz="1725" b="1">
+                <a16:creationId xmlns:a16="http://schemas.microsoft.com/office/drawing/2014/main" id="{DE85FF9C-7B2E-4995-A8E2-EF6F39689A91}"/>
+              </a:ext>
+            </a:extLst>
+          </p:cNvPr>
+          <p:cNvSpPr>
+            <a:spLocks xmlns:a="http://schemas.openxmlformats.org/drawingml/2006/main" noGrp="1"/>
+          </p:cNvSpPr>
+          <p:nvPr/>
+        </p:nvSpPr>
+        <p:spPr>
+          <a:xfrm xmlns:a="http://schemas.openxmlformats.org/drawingml/2006/main">
+            <a:off x="4991100" y="8362950"/>
+            <a:ext cx="3162300" cy="266700"/>
+          </a:xfrm>
+          <a:prstGeom xmlns:a="http://schemas.openxmlformats.org/drawingml/2006/main" prst="rect">
+            <a:avLst/>
+          </a:prstGeom>
+        </p:spPr>
+        <p:txBody>
+          <a:bodyPr xmlns:a="http://schemas.openxmlformats.org/drawingml/2006/main" lIns="0" tIns="0" rIns="0" bIns="0"/>
+          <a:lstStyle xmlns:a="http://schemas.openxmlformats.org/drawingml/2006/main"/>
+          <a:p xmlns:a="http://schemas.openxmlformats.org/drawingml/2006/main">
+            <a:pPr>
+              <a:defRPr sz="1650" b="1">
                 <a:solidFill>
                   <a:srgbClr val="1F2937"/>
                 </a:solidFill>
               </a:defRPr>
             </a:pPr>
             <a:r>
-              <a:rPr sz="1725" b="1">
+              <a:rPr sz="1650" b="1">
                 <a:solidFill>
                   <a:srgbClr val="1F2937"/>
                 </a:solidFill>
               </a:rPr>
-              <a:t>AI 初筛</a:t>
+              <a:t>每周节省</a:t>
             </a:r>
           </a:p>
         </p:txBody>
@@ -5852,30 +6035,42 @@
           <p:cNvPr id="31" name="">
             <a:extLst xmlns:a="http://schemas.openxmlformats.org/drawingml/2006/main">
               <a:ext uri="{FF2B5EF4-FFF2-40B4-BE49-F238E27FC236}">
-                <a16:creationId xmlns:a16="http://schemas.microsoft.com/office/drawing/2014/main" id="{7716148B-E40E-4225-BCE0-0D7FBF32882F}"/>
-              </a:ext>
-            </a:extLst>
-          </p:cNvPr>
-          <p:cNvSpPr>
-            <a:spLocks xmlns:a="http://schemas.openxmlformats.org/drawingml/2006/main" noGrp="1"/>
-          </p:cNvSpPr>
-          <p:nvPr/>
-        </p:nvSpPr>
-        <p:spPr>
-          <a:xfrm xmlns:a="http://schemas.openxmlformats.org/drawingml/2006/main">
-            <a:off x="5010150" y="8724900"/>
-            <a:ext cx="3124200" cy="209550"/>
-          </a:xfrm>
-          <a:prstGeom xmlns:a="http://schemas.openxmlformats.org/drawingml/2006/main" prst="rect">
-            <a:avLst/>
-          </a:prstGeom>
-        </p:spPr>
-        <p:txBody>
-          <a:bodyPr xmlns:a="http://schemas.openxmlformats.org/drawingml/2006/main" lIns="0" tIns="0" rIns="0" bIns="0"/>
-          <a:lstStyle xmlns:a="http://schemas.openxmlformats.org/drawingml/2006/main"/>
-          <a:p xmlns:a="http://schemas.openxmlformats.org/drawingml/2006/main">
-            <a:r>
-              <a:t/>
+                <a16:creationId xmlns:a16="http://schemas.microsoft.com/office/drawing/2014/main" id="{A7CCB8FA-5C62-4570-A238-6F3AA1C1F6CD}"/>
+              </a:ext>
+            </a:extLst>
+          </p:cNvPr>
+          <p:cNvSpPr>
+            <a:spLocks xmlns:a="http://schemas.openxmlformats.org/drawingml/2006/main" noGrp="1"/>
+          </p:cNvSpPr>
+          <p:nvPr/>
+        </p:nvSpPr>
+        <p:spPr>
+          <a:xfrm xmlns:a="http://schemas.openxmlformats.org/drawingml/2006/main">
+            <a:off x="4991100" y="8686800"/>
+            <a:ext cx="3162300" cy="209550"/>
+          </a:xfrm>
+          <a:prstGeom xmlns:a="http://schemas.openxmlformats.org/drawingml/2006/main" prst="rect">
+            <a:avLst/>
+          </a:prstGeom>
+        </p:spPr>
+        <p:txBody>
+          <a:bodyPr xmlns:a="http://schemas.openxmlformats.org/drawingml/2006/main" lIns="0" tIns="0" rIns="0" bIns="0"/>
+          <a:lstStyle xmlns:a="http://schemas.openxmlformats.org/drawingml/2006/main"/>
+          <a:p xmlns:a="http://schemas.openxmlformats.org/drawingml/2006/main">
+            <a:pPr>
+              <a:defRPr sz="1275">
+                <a:solidFill>
+                  <a:srgbClr val="64748B"/>
+                </a:solidFill>
+              </a:defRPr>
+            </a:pPr>
+            <a:r>
+              <a:rPr sz="1275">
+                <a:solidFill>
+                  <a:srgbClr val="64748B"/>
+                </a:solidFill>
+              </a:rPr>
+              <a:t>20 个 PR 估算</a:t>
             </a:r>
           </a:p>
         </p:txBody>
@@ -5892,14 +6087,14 @@
         </p:xfrm>
         <a:graphic xmlns:a="http://schemas.openxmlformats.org/drawingml/2006/main">
           <a:graphicData uri="http://schemas.openxmlformats.org/drawingml/2006/chart">
-            <c:chart xmlns:r="http://schemas.openxmlformats.org/officeDocument/2006/relationships" xmlns:c="http://schemas.openxmlformats.org/drawingml/2006/chart" r:id="Rc4498f12de094c00"/>
+            <c:chart xmlns:r="http://schemas.openxmlformats.org/officeDocument/2006/relationships" xmlns:c="http://schemas.openxmlformats.org/drawingml/2006/chart" r:id="Rdbdc99cd5e3244fe"/>
           </a:graphicData>
         </a:graphic>
       </p:graphicFrame>
     </p:spTree>
     <p:extLst>
       <p:ext uri="{BB962C8B-B14F-4D97-AF65-F5344CB8AC3E}">
-        <p14:creationId xmlns:p14="http://schemas.microsoft.com/office/powerpoint/2010/main" val="1029638435"/>
+        <p14:creationId xmlns:p14="http://schemas.microsoft.com/office/powerpoint/2010/main" val="816972686"/>
       </p:ext>
     </p:extLst>
   </p:cSld>
@@ -5923,7 +6118,7 @@
           <p:cNvPr id="1" name="">
             <a:extLst xmlns:a="http://schemas.openxmlformats.org/drawingml/2006/main">
               <a:ext uri="{FF2B5EF4-FFF2-40B4-BE49-F238E27FC236}">
-                <a16:creationId xmlns:a16="http://schemas.microsoft.com/office/drawing/2014/main" id="{B19D87BD-3A89-46DD-93E4-62693DD001E3}"/>
+                <a16:creationId xmlns:a16="http://schemas.microsoft.com/office/drawing/2014/main" id="{844B7E49-2E8C-49E7-BF29-64229615FFEC}"/>
               </a:ext>
             </a:extLst>
           </p:cNvPr>
@@ -5935,7 +6130,7 @@
         <p:spPr>
           <a:xfrm xmlns:a="http://schemas.openxmlformats.org/drawingml/2006/main">
             <a:off x="819150" y="590550"/>
-            <a:ext cx="10153650" cy="1238250"/>
+            <a:ext cx="8610600" cy="1238250"/>
           </a:xfrm>
           <a:prstGeom xmlns:a="http://schemas.openxmlformats.org/drawingml/2006/main" prst="rect">
             <a:avLst/>
@@ -5958,7 +6153,7 @@
                   <a:srgbClr val="17223B"/>
                 </a:solidFill>
               </a:rPr>
-              <a:t>提效 2：不只是省时间，而是让风险更早暴露</a:t>
+              <a:t>提效指标 2：质量前置，减少后置返工</a:t>
             </a:r>
           </a:p>
         </p:txBody>
@@ -5968,7 +6163,7 @@
           <p:cNvPr id="2" name="">
             <a:extLst xmlns:a="http://schemas.openxmlformats.org/drawingml/2006/main">
               <a:ext uri="{FF2B5EF4-FFF2-40B4-BE49-F238E27FC236}">
-                <a16:creationId xmlns:a16="http://schemas.microsoft.com/office/drawing/2014/main" id="{259B1E5F-8170-4AFB-A78A-B72D087802D9}"/>
+                <a16:creationId xmlns:a16="http://schemas.microsoft.com/office/drawing/2014/main" id="{FBFD6534-6FF2-4646-AFF3-CD436C96166A}"/>
               </a:ext>
             </a:extLst>
           </p:cNvPr>
@@ -5980,7 +6175,7 @@
         <p:spPr>
           <a:xfrm xmlns:a="http://schemas.openxmlformats.org/drawingml/2006/main">
             <a:off x="819150" y="1962150"/>
-            <a:ext cx="8515350" cy="552450"/>
+            <a:ext cx="6762750" cy="552450"/>
           </a:xfrm>
           <a:prstGeom xmlns:a="http://schemas.openxmlformats.org/drawingml/2006/main" prst="rect">
             <a:avLst/>
@@ -6003,7 +6198,7 @@
                   <a:srgbClr val="64748B"/>
                 </a:solidFill>
               </a:rPr>
-              <a:t>人工 review 易受经验和疲劳影响；AI 的价值是稳定覆盖项目规则中的高风险检查项。</a:t>
+              <a:t>AI 的收益不只是省时间，更是让高风险改动在 PR 阶段被稳定检查。</a:t>
             </a:r>
           </a:p>
         </p:txBody>
@@ -6020,7 +6215,7 @@
         </p:xfrm>
         <a:graphic xmlns:a="http://schemas.openxmlformats.org/drawingml/2006/main">
           <a:graphicData uri="http://schemas.openxmlformats.org/drawingml/2006/chart">
-            <c:chart xmlns:r="http://schemas.openxmlformats.org/officeDocument/2006/relationships" xmlns:c="http://schemas.openxmlformats.org/drawingml/2006/chart" r:id="R9b2f8e62ad7849b9"/>
+            <c:chart xmlns:r="http://schemas.openxmlformats.org/officeDocument/2006/relationships" xmlns:c="http://schemas.openxmlformats.org/drawingml/2006/chart" r:id="R7c5ee627a3a04554"/>
           </a:graphicData>
         </a:graphic>
       </p:graphicFrame>
@@ -6029,37 +6224,37 @@
           <p:cNvPr id="4" name="">
             <a:extLst xmlns:a="http://schemas.openxmlformats.org/drawingml/2006/main">
               <a:ext uri="{FF2B5EF4-FFF2-40B4-BE49-F238E27FC236}">
-                <a16:creationId xmlns:a16="http://schemas.microsoft.com/office/drawing/2014/main" id="{54FDE2EF-B739-4866-AE24-9D5AD5EDE90D}"/>
-              </a:ext>
-            </a:extLst>
-          </p:cNvPr>
-          <p:cNvSpPr>
-            <a:spLocks xmlns:a="http://schemas.openxmlformats.org/drawingml/2006/main" noGrp="1"/>
-          </p:cNvSpPr>
-          <p:nvPr/>
-        </p:nvSpPr>
-        <p:spPr>
-          <a:xfrm xmlns:a="http://schemas.openxmlformats.org/drawingml/2006/main">
-            <a:off x="9410700" y="3886200"/>
-            <a:ext cx="8077200" cy="647700"/>
-          </a:xfrm>
-          <a:prstGeom xmlns:a="http://schemas.openxmlformats.org/drawingml/2006/main" prst="rect">
-            <a:avLst/>
-          </a:prstGeom>
-        </p:spPr>
-        <p:txBody>
-          <a:bodyPr xmlns:a="http://schemas.openxmlformats.org/drawingml/2006/main" lIns="0" tIns="0" rIns="0" bIns="0"/>
-          <a:lstStyle xmlns:a="http://schemas.openxmlformats.org/drawingml/2006/main"/>
-          <a:p xmlns:a="http://schemas.openxmlformats.org/drawingml/2006/main">
-            <a:pPr>
-              <a:defRPr sz="4200" b="1">
+                <a16:creationId xmlns:a16="http://schemas.microsoft.com/office/drawing/2014/main" id="{DD5321B5-102A-4459-9AD9-1EAA666262BE}"/>
+              </a:ext>
+            </a:extLst>
+          </p:cNvPr>
+          <p:cNvSpPr>
+            <a:spLocks xmlns:a="http://schemas.openxmlformats.org/drawingml/2006/main" noGrp="1"/>
+          </p:cNvSpPr>
+          <p:nvPr/>
+        </p:nvSpPr>
+        <p:spPr>
+          <a:xfrm xmlns:a="http://schemas.openxmlformats.org/drawingml/2006/main">
+            <a:off x="9410700" y="3924300"/>
+            <a:ext cx="8077200" cy="628650"/>
+          </a:xfrm>
+          <a:prstGeom xmlns:a="http://schemas.openxmlformats.org/drawingml/2006/main" prst="rect">
+            <a:avLst/>
+          </a:prstGeom>
+        </p:spPr>
+        <p:txBody>
+          <a:bodyPr xmlns:a="http://schemas.openxmlformats.org/drawingml/2006/main" lIns="0" tIns="0" rIns="0" bIns="0"/>
+          <a:lstStyle xmlns:a="http://schemas.openxmlformats.org/drawingml/2006/main"/>
+          <a:p xmlns:a="http://schemas.openxmlformats.org/drawingml/2006/main">
+            <a:pPr>
+              <a:defRPr sz="4050" b="1">
                 <a:solidFill>
                   <a:srgbClr val="16A34A"/>
                 </a:solidFill>
               </a:defRPr>
             </a:pPr>
             <a:r>
-              <a:rPr sz="4200" b="1">
+              <a:rPr sz="4050" b="1">
                 <a:solidFill>
                   <a:srgbClr val="16A34A"/>
                 </a:solidFill>
@@ -6074,18 +6269,18 @@
           <p:cNvPr id="5" name="">
             <a:extLst xmlns:a="http://schemas.openxmlformats.org/drawingml/2006/main">
               <a:ext uri="{FF2B5EF4-FFF2-40B4-BE49-F238E27FC236}">
-                <a16:creationId xmlns:a16="http://schemas.microsoft.com/office/drawing/2014/main" id="{F6383D66-F2ED-4732-B8D7-01BB24EFE362}"/>
-              </a:ext>
-            </a:extLst>
-          </p:cNvPr>
-          <p:cNvSpPr>
-            <a:spLocks xmlns:a="http://schemas.openxmlformats.org/drawingml/2006/main" noGrp="1"/>
-          </p:cNvSpPr>
-          <p:nvPr/>
-        </p:nvSpPr>
-        <p:spPr>
-          <a:xfrm xmlns:a="http://schemas.openxmlformats.org/drawingml/2006/main">
-            <a:off x="9410700" y="4591050"/>
+                <a16:creationId xmlns:a16="http://schemas.microsoft.com/office/drawing/2014/main" id="{E665009A-8B4A-46A5-87A3-747F0805920E}"/>
+              </a:ext>
+            </a:extLst>
+          </p:cNvPr>
+          <p:cNvSpPr>
+            <a:spLocks xmlns:a="http://schemas.openxmlformats.org/drawingml/2006/main" noGrp="1"/>
+          </p:cNvSpPr>
+          <p:nvPr/>
+        </p:nvSpPr>
+        <p:spPr>
+          <a:xfrm xmlns:a="http://schemas.openxmlformats.org/drawingml/2006/main">
+            <a:off x="9410700" y="4629150"/>
             <a:ext cx="8077200" cy="266700"/>
           </a:xfrm>
           <a:prstGeom xmlns:a="http://schemas.openxmlformats.org/drawingml/2006/main" prst="rect">
@@ -6097,14 +6292,14 @@
           <a:lstStyle xmlns:a="http://schemas.openxmlformats.org/drawingml/2006/main"/>
           <a:p xmlns:a="http://schemas.openxmlformats.org/drawingml/2006/main">
             <a:pPr>
-              <a:defRPr sz="1725" b="1">
+              <a:defRPr sz="1650" b="1">
                 <a:solidFill>
                   <a:srgbClr val="1F2937"/>
                 </a:solidFill>
               </a:defRPr>
             </a:pPr>
             <a:r>
-              <a:rPr sz="1725" b="1">
+              <a:rPr sz="1650" b="1">
                 <a:solidFill>
                   <a:srgbClr val="1F2937"/>
                 </a:solidFill>
@@ -6119,18 +6314,18 @@
           <p:cNvPr id="6" name="">
             <a:extLst xmlns:a="http://schemas.openxmlformats.org/drawingml/2006/main">
               <a:ext uri="{FF2B5EF4-FFF2-40B4-BE49-F238E27FC236}">
-                <a16:creationId xmlns:a16="http://schemas.microsoft.com/office/drawing/2014/main" id="{BFD37B24-C8A4-4A38-9754-4DF8850CE1D7}"/>
-              </a:ext>
-            </a:extLst>
-          </p:cNvPr>
-          <p:cNvSpPr>
-            <a:spLocks xmlns:a="http://schemas.openxmlformats.org/drawingml/2006/main" noGrp="1"/>
-          </p:cNvSpPr>
-          <p:nvPr/>
-        </p:nvSpPr>
-        <p:spPr>
-          <a:xfrm xmlns:a="http://schemas.openxmlformats.org/drawingml/2006/main">
-            <a:off x="9410700" y="4933950"/>
+                <a16:creationId xmlns:a16="http://schemas.microsoft.com/office/drawing/2014/main" id="{D6DD1C90-1ADF-46B8-B736-5135117B55B3}"/>
+              </a:ext>
+            </a:extLst>
+          </p:cNvPr>
+          <p:cNvSpPr>
+            <a:spLocks xmlns:a="http://schemas.openxmlformats.org/drawingml/2006/main" noGrp="1"/>
+          </p:cNvSpPr>
+          <p:nvPr/>
+        </p:nvSpPr>
+        <p:spPr>
+          <a:xfrm xmlns:a="http://schemas.openxmlformats.org/drawingml/2006/main">
+            <a:off x="9410700" y="4953000"/>
             <a:ext cx="8077200" cy="209550"/>
           </a:xfrm>
           <a:prstGeom xmlns:a="http://schemas.openxmlformats.org/drawingml/2006/main" prst="rect">
@@ -6164,37 +6359,37 @@
           <p:cNvPr id="7" name="">
             <a:extLst xmlns:a="http://schemas.openxmlformats.org/drawingml/2006/main">
               <a:ext uri="{FF2B5EF4-FFF2-40B4-BE49-F238E27FC236}">
-                <a16:creationId xmlns:a16="http://schemas.microsoft.com/office/drawing/2014/main" id="{2359B20F-F002-4C98-B6A7-3C7E5CA6ACFB}"/>
-              </a:ext>
-            </a:extLst>
-          </p:cNvPr>
-          <p:cNvSpPr>
-            <a:spLocks xmlns:a="http://schemas.openxmlformats.org/drawingml/2006/main" noGrp="1"/>
-          </p:cNvSpPr>
-          <p:nvPr/>
-        </p:nvSpPr>
-        <p:spPr>
-          <a:xfrm xmlns:a="http://schemas.openxmlformats.org/drawingml/2006/main">
-            <a:off x="9410700" y="5391150"/>
-            <a:ext cx="8077200" cy="647700"/>
-          </a:xfrm>
-          <a:prstGeom xmlns:a="http://schemas.openxmlformats.org/drawingml/2006/main" prst="rect">
-            <a:avLst/>
-          </a:prstGeom>
-        </p:spPr>
-        <p:txBody>
-          <a:bodyPr xmlns:a="http://schemas.openxmlformats.org/drawingml/2006/main" lIns="0" tIns="0" rIns="0" bIns="0"/>
-          <a:lstStyle xmlns:a="http://schemas.openxmlformats.org/drawingml/2006/main"/>
-          <a:p xmlns:a="http://schemas.openxmlformats.org/drawingml/2006/main">
-            <a:pPr>
-              <a:defRPr sz="4200" b="1">
+                <a16:creationId xmlns:a16="http://schemas.microsoft.com/office/drawing/2014/main" id="{1E00EFBE-60DE-4CC5-863D-2744CAEC503E}"/>
+              </a:ext>
+            </a:extLst>
+          </p:cNvPr>
+          <p:cNvSpPr>
+            <a:spLocks xmlns:a="http://schemas.openxmlformats.org/drawingml/2006/main" noGrp="1"/>
+          </p:cNvSpPr>
+          <p:nvPr/>
+        </p:nvSpPr>
+        <p:spPr>
+          <a:xfrm xmlns:a="http://schemas.openxmlformats.org/drawingml/2006/main">
+            <a:off x="9410700" y="5410200"/>
+            <a:ext cx="8077200" cy="628650"/>
+          </a:xfrm>
+          <a:prstGeom xmlns:a="http://schemas.openxmlformats.org/drawingml/2006/main" prst="rect">
+            <a:avLst/>
+          </a:prstGeom>
+        </p:spPr>
+        <p:txBody>
+          <a:bodyPr xmlns:a="http://schemas.openxmlformats.org/drawingml/2006/main" lIns="0" tIns="0" rIns="0" bIns="0"/>
+          <a:lstStyle xmlns:a="http://schemas.openxmlformats.org/drawingml/2006/main"/>
+          <a:p xmlns:a="http://schemas.openxmlformats.org/drawingml/2006/main">
+            <a:pPr>
+              <a:defRPr sz="4050" b="1">
                 <a:solidFill>
                   <a:srgbClr val="2563EB"/>
                 </a:solidFill>
               </a:defRPr>
             </a:pPr>
             <a:r>
-              <a:rPr sz="4200" b="1">
+              <a:rPr sz="4050" b="1">
                 <a:solidFill>
                   <a:srgbClr val="2563EB"/>
                 </a:solidFill>
@@ -6209,18 +6404,18 @@
           <p:cNvPr id="8" name="">
             <a:extLst xmlns:a="http://schemas.openxmlformats.org/drawingml/2006/main">
               <a:ext uri="{FF2B5EF4-FFF2-40B4-BE49-F238E27FC236}">
-                <a16:creationId xmlns:a16="http://schemas.microsoft.com/office/drawing/2014/main" id="{15EEC513-11E5-4EF4-B838-C8CC6CB9A96F}"/>
-              </a:ext>
-            </a:extLst>
-          </p:cNvPr>
-          <p:cNvSpPr>
-            <a:spLocks xmlns:a="http://schemas.openxmlformats.org/drawingml/2006/main" noGrp="1"/>
-          </p:cNvSpPr>
-          <p:nvPr/>
-        </p:nvSpPr>
-        <p:spPr>
-          <a:xfrm xmlns:a="http://schemas.openxmlformats.org/drawingml/2006/main">
-            <a:off x="9410700" y="6115050"/>
+                <a16:creationId xmlns:a16="http://schemas.microsoft.com/office/drawing/2014/main" id="{C0EFB41C-EA55-4C03-8468-7F7FCB15F4A2}"/>
+              </a:ext>
+            </a:extLst>
+          </p:cNvPr>
+          <p:cNvSpPr>
+            <a:spLocks xmlns:a="http://schemas.openxmlformats.org/drawingml/2006/main" noGrp="1"/>
+          </p:cNvSpPr>
+          <p:nvPr/>
+        </p:nvSpPr>
+        <p:spPr>
+          <a:xfrm xmlns:a="http://schemas.openxmlformats.org/drawingml/2006/main">
+            <a:off x="9410700" y="6096000"/>
             <a:ext cx="8077200" cy="266700"/>
           </a:xfrm>
           <a:prstGeom xmlns:a="http://schemas.openxmlformats.org/drawingml/2006/main" prst="rect">
@@ -6232,14 +6427,14 @@
           <a:lstStyle xmlns:a="http://schemas.openxmlformats.org/drawingml/2006/main"/>
           <a:p xmlns:a="http://schemas.openxmlformats.org/drawingml/2006/main">
             <a:pPr>
-              <a:defRPr sz="1725" b="1">
+              <a:defRPr sz="1650" b="1">
                 <a:solidFill>
                   <a:srgbClr val="1F2937"/>
                 </a:solidFill>
               </a:defRPr>
             </a:pPr>
             <a:r>
-              <a:rPr sz="1725" b="1">
+              <a:rPr sz="1650" b="1">
                 <a:solidFill>
                   <a:srgbClr val="1F2937"/>
                 </a:solidFill>
@@ -6254,18 +6449,18 @@
           <p:cNvPr id="9" name="">
             <a:extLst xmlns:a="http://schemas.openxmlformats.org/drawingml/2006/main">
               <a:ext uri="{FF2B5EF4-FFF2-40B4-BE49-F238E27FC236}">
-                <a16:creationId xmlns:a16="http://schemas.microsoft.com/office/drawing/2014/main" id="{94E91D06-D703-4087-96DF-CBB59ED1CC1C}"/>
-              </a:ext>
-            </a:extLst>
-          </p:cNvPr>
-          <p:cNvSpPr>
-            <a:spLocks xmlns:a="http://schemas.openxmlformats.org/drawingml/2006/main" noGrp="1"/>
-          </p:cNvSpPr>
-          <p:nvPr/>
-        </p:nvSpPr>
-        <p:spPr>
-          <a:xfrm xmlns:a="http://schemas.openxmlformats.org/drawingml/2006/main">
-            <a:off x="9410700" y="6457950"/>
+                <a16:creationId xmlns:a16="http://schemas.microsoft.com/office/drawing/2014/main" id="{CC520247-1A0F-4E7C-B7B0-B00B01995A31}"/>
+              </a:ext>
+            </a:extLst>
+          </p:cNvPr>
+          <p:cNvSpPr>
+            <a:spLocks xmlns:a="http://schemas.openxmlformats.org/drawingml/2006/main" noGrp="1"/>
+          </p:cNvSpPr>
+          <p:nvPr/>
+        </p:nvSpPr>
+        <p:spPr>
+          <a:xfrm xmlns:a="http://schemas.openxmlformats.org/drawingml/2006/main">
+            <a:off x="9410700" y="6438900"/>
             <a:ext cx="8077200" cy="209550"/>
           </a:xfrm>
           <a:prstGeom xmlns:a="http://schemas.openxmlformats.org/drawingml/2006/main" prst="rect">
@@ -6299,37 +6494,37 @@
           <p:cNvPr id="10" name="">
             <a:extLst xmlns:a="http://schemas.openxmlformats.org/drawingml/2006/main">
               <a:ext uri="{FF2B5EF4-FFF2-40B4-BE49-F238E27FC236}">
-                <a16:creationId xmlns:a16="http://schemas.microsoft.com/office/drawing/2014/main" id="{CB27635E-5641-4197-80A8-6D88FC77765E}"/>
-              </a:ext>
-            </a:extLst>
-          </p:cNvPr>
-          <p:cNvSpPr>
-            <a:spLocks xmlns:a="http://schemas.openxmlformats.org/drawingml/2006/main" noGrp="1"/>
-          </p:cNvSpPr>
-          <p:nvPr/>
-        </p:nvSpPr>
-        <p:spPr>
-          <a:xfrm xmlns:a="http://schemas.openxmlformats.org/drawingml/2006/main">
-            <a:off x="9410700" y="6915150"/>
-            <a:ext cx="8077200" cy="647700"/>
-          </a:xfrm>
-          <a:prstGeom xmlns:a="http://schemas.openxmlformats.org/drawingml/2006/main" prst="rect">
-            <a:avLst/>
-          </a:prstGeom>
-        </p:spPr>
-        <p:txBody>
-          <a:bodyPr xmlns:a="http://schemas.openxmlformats.org/drawingml/2006/main" lIns="0" tIns="0" rIns="0" bIns="0"/>
-          <a:lstStyle xmlns:a="http://schemas.openxmlformats.org/drawingml/2006/main"/>
-          <a:p xmlns:a="http://schemas.openxmlformats.org/drawingml/2006/main">
-            <a:pPr>
-              <a:defRPr sz="4200" b="1">
+                <a16:creationId xmlns:a16="http://schemas.microsoft.com/office/drawing/2014/main" id="{E9B36F95-5A68-40FC-9225-47B5B1A88A72}"/>
+              </a:ext>
+            </a:extLst>
+          </p:cNvPr>
+          <p:cNvSpPr>
+            <a:spLocks xmlns:a="http://schemas.openxmlformats.org/drawingml/2006/main" noGrp="1"/>
+          </p:cNvSpPr>
+          <p:nvPr/>
+        </p:nvSpPr>
+        <p:spPr>
+          <a:xfrm xmlns:a="http://schemas.openxmlformats.org/drawingml/2006/main">
+            <a:off x="9410700" y="6896100"/>
+            <a:ext cx="8077200" cy="628650"/>
+          </a:xfrm>
+          <a:prstGeom xmlns:a="http://schemas.openxmlformats.org/drawingml/2006/main" prst="rect">
+            <a:avLst/>
+          </a:prstGeom>
+        </p:spPr>
+        <p:txBody>
+          <a:bodyPr xmlns:a="http://schemas.openxmlformats.org/drawingml/2006/main" lIns="0" tIns="0" rIns="0" bIns="0"/>
+          <a:lstStyle xmlns:a="http://schemas.openxmlformats.org/drawingml/2006/main"/>
+          <a:p xmlns:a="http://schemas.openxmlformats.org/drawingml/2006/main">
+            <a:pPr>
+              <a:defRPr sz="4050" b="1">
                 <a:solidFill>
                   <a:srgbClr val="0F9F8F"/>
                 </a:solidFill>
               </a:defRPr>
             </a:pPr>
             <a:r>
-              <a:rPr sz="4200" b="1">
+              <a:rPr sz="4050" b="1">
                 <a:solidFill>
                   <a:srgbClr val="0F9F8F"/>
                 </a:solidFill>
@@ -6344,18 +6539,18 @@
           <p:cNvPr id="11" name="">
             <a:extLst xmlns:a="http://schemas.openxmlformats.org/drawingml/2006/main">
               <a:ext uri="{FF2B5EF4-FFF2-40B4-BE49-F238E27FC236}">
-                <a16:creationId xmlns:a16="http://schemas.microsoft.com/office/drawing/2014/main" id="{4E96247F-4866-43D5-9B6F-89586D4DD9F4}"/>
-              </a:ext>
-            </a:extLst>
-          </p:cNvPr>
-          <p:cNvSpPr>
-            <a:spLocks xmlns:a="http://schemas.openxmlformats.org/drawingml/2006/main" noGrp="1"/>
-          </p:cNvSpPr>
-          <p:nvPr/>
-        </p:nvSpPr>
-        <p:spPr>
-          <a:xfrm xmlns:a="http://schemas.openxmlformats.org/drawingml/2006/main">
-            <a:off x="9410700" y="7620000"/>
+                <a16:creationId xmlns:a16="http://schemas.microsoft.com/office/drawing/2014/main" id="{C126E6EC-0AC9-4E10-8AD3-2DB52CDC278B}"/>
+              </a:ext>
+            </a:extLst>
+          </p:cNvPr>
+          <p:cNvSpPr>
+            <a:spLocks xmlns:a="http://schemas.openxmlformats.org/drawingml/2006/main" noGrp="1"/>
+          </p:cNvSpPr>
+          <p:nvPr/>
+        </p:nvSpPr>
+        <p:spPr>
+          <a:xfrm xmlns:a="http://schemas.openxmlformats.org/drawingml/2006/main">
+            <a:off x="9410700" y="7581900"/>
             <a:ext cx="8077200" cy="266700"/>
           </a:xfrm>
           <a:prstGeom xmlns:a="http://schemas.openxmlformats.org/drawingml/2006/main" prst="rect">
@@ -6367,14 +6562,14 @@
           <a:lstStyle xmlns:a="http://schemas.openxmlformats.org/drawingml/2006/main"/>
           <a:p xmlns:a="http://schemas.openxmlformats.org/drawingml/2006/main">
             <a:pPr>
-              <a:defRPr sz="1725" b="1">
+              <a:defRPr sz="1650" b="1">
                 <a:solidFill>
                   <a:srgbClr val="1F2937"/>
                 </a:solidFill>
               </a:defRPr>
             </a:pPr>
             <a:r>
-              <a:rPr sz="1725" b="1">
+              <a:rPr sz="1650" b="1">
                 <a:solidFill>
                   <a:srgbClr val="1F2937"/>
                 </a:solidFill>
@@ -6389,18 +6584,18 @@
           <p:cNvPr id="12" name="">
             <a:extLst xmlns:a="http://schemas.openxmlformats.org/drawingml/2006/main">
               <a:ext uri="{FF2B5EF4-FFF2-40B4-BE49-F238E27FC236}">
-                <a16:creationId xmlns:a16="http://schemas.microsoft.com/office/drawing/2014/main" id="{E7ED4002-1B14-4085-99EC-55171BFA60C0}"/>
-              </a:ext>
-            </a:extLst>
-          </p:cNvPr>
-          <p:cNvSpPr>
-            <a:spLocks xmlns:a="http://schemas.openxmlformats.org/drawingml/2006/main" noGrp="1"/>
-          </p:cNvSpPr>
-          <p:nvPr/>
-        </p:nvSpPr>
-        <p:spPr>
-          <a:xfrm xmlns:a="http://schemas.openxmlformats.org/drawingml/2006/main">
-            <a:off x="9410700" y="7962900"/>
+                <a16:creationId xmlns:a16="http://schemas.microsoft.com/office/drawing/2014/main" id="{44868053-2B6A-43F2-A07B-1FB1795A82F9}"/>
+              </a:ext>
+            </a:extLst>
+          </p:cNvPr>
+          <p:cNvSpPr>
+            <a:spLocks xmlns:a="http://schemas.openxmlformats.org/drawingml/2006/main" noGrp="1"/>
+          </p:cNvSpPr>
+          <p:nvPr/>
+        </p:nvSpPr>
+        <p:spPr>
+          <a:xfrm xmlns:a="http://schemas.openxmlformats.org/drawingml/2006/main">
+            <a:off x="9410700" y="7905750"/>
             <a:ext cx="8077200" cy="209550"/>
           </a:xfrm>
           <a:prstGeom xmlns:a="http://schemas.openxmlformats.org/drawingml/2006/main" prst="rect">
@@ -6434,19 +6629,19 @@
           <p:cNvPr id="13" name="">
             <a:extLst xmlns:a="http://schemas.openxmlformats.org/drawingml/2006/main">
               <a:ext uri="{FF2B5EF4-FFF2-40B4-BE49-F238E27FC236}">
-                <a16:creationId xmlns:a16="http://schemas.microsoft.com/office/drawing/2014/main" id="{1E95D41A-F357-496C-898F-A53D3C61C1D0}"/>
-              </a:ext>
-            </a:extLst>
-          </p:cNvPr>
-          <p:cNvSpPr>
-            <a:spLocks xmlns:a="http://schemas.openxmlformats.org/drawingml/2006/main" noGrp="1"/>
-          </p:cNvSpPr>
-          <p:nvPr/>
-        </p:nvSpPr>
-        <p:spPr>
-          <a:xfrm xmlns:a="http://schemas.openxmlformats.org/drawingml/2006/main">
-            <a:off x="9410700" y="8420100"/>
-            <a:ext cx="10001250" cy="209550"/>
+                <a16:creationId xmlns:a16="http://schemas.microsoft.com/office/drawing/2014/main" id="{B75EE41E-7041-42AF-8C71-F607ED6FC2C7}"/>
+              </a:ext>
+            </a:extLst>
+          </p:cNvPr>
+          <p:cNvSpPr>
+            <a:spLocks xmlns:a="http://schemas.openxmlformats.org/drawingml/2006/main" noGrp="1"/>
+          </p:cNvSpPr>
+          <p:nvPr/>
+        </p:nvSpPr>
+        <p:spPr>
+          <a:xfrm xmlns:a="http://schemas.openxmlformats.org/drawingml/2006/main">
+            <a:off x="9410700" y="8382000"/>
+            <a:ext cx="9620250" cy="209550"/>
           </a:xfrm>
           <a:prstGeom xmlns:a="http://schemas.openxmlformats.org/drawingml/2006/main" prst="rect">
             <a:avLst/>
@@ -6469,7 +6664,7 @@
                   <a:srgbClr val="64748B"/>
                 </a:solidFill>
               </a:rPr>
-              <a:t>说明：这里是面试 demo 的可复现实验口径，不宣称生产收益；生产环境可统计 PR 周期、AI 评论采纳率、缺陷逃逸率和测试补充率。</a:t>
+              <a:t>说明：这里是 demo 的可复现实验口径。生产环境应持续统计 AI 评论采纳率、缺陷前置发现率、回归缺陷逃逸率和测试补充率。</a:t>
             </a:r>
           </a:p>
         </p:txBody>
@@ -6477,7 +6672,7 @@
     </p:spTree>
     <p:extLst>
       <p:ext uri="{BB962C8B-B14F-4D97-AF65-F5344CB8AC3E}">
-        <p14:creationId xmlns:p14="http://schemas.microsoft.com/office/powerpoint/2010/main" val="384001102"/>
+        <p14:creationId xmlns:p14="http://schemas.microsoft.com/office/powerpoint/2010/main" val="2050140481"/>
       </p:ext>
     </p:extLst>
   </p:cSld>
@@ -6501,7 +6696,7 @@
           <p:cNvPr id="1" name="">
             <a:extLst xmlns:a="http://schemas.openxmlformats.org/drawingml/2006/main">
               <a:ext uri="{FF2B5EF4-FFF2-40B4-BE49-F238E27FC236}">
-                <a16:creationId xmlns:a16="http://schemas.microsoft.com/office/drawing/2014/main" id="{967B6E74-D3BD-4972-AF61-BFE7C36C73C6}"/>
+                <a16:creationId xmlns:a16="http://schemas.microsoft.com/office/drawing/2014/main" id="{E88E1045-A267-459F-99D5-8ADF1548F671}"/>
               </a:ext>
             </a:extLst>
           </p:cNvPr>
@@ -6513,7 +6708,7 @@
         <p:spPr>
           <a:xfrm xmlns:a="http://schemas.openxmlformats.org/drawingml/2006/main">
             <a:off x="819150" y="590550"/>
-            <a:ext cx="8820150" cy="1238250"/>
+            <a:ext cx="5657850" cy="628650"/>
           </a:xfrm>
           <a:prstGeom xmlns:a="http://schemas.openxmlformats.org/drawingml/2006/main" prst="rect">
             <a:avLst/>
@@ -6536,7 +6731,7 @@
                   <a:srgbClr val="17223B"/>
                 </a:solidFill>
               </a:rPr>
-              <a:t>人工 vs AI：提效体现在 4 个可量化指标</a:t>
+              <a:t>给研发部门看的度量闭环</a:t>
             </a:r>
           </a:p>
         </p:txBody>
@@ -6546,19 +6741,19 @@
           <p:cNvPr id="2" name="">
             <a:extLst xmlns:a="http://schemas.openxmlformats.org/drawingml/2006/main">
               <a:ext uri="{FF2B5EF4-FFF2-40B4-BE49-F238E27FC236}">
-                <a16:creationId xmlns:a16="http://schemas.microsoft.com/office/drawing/2014/main" id="{70A0B97A-4514-4842-9F6F-53C117AC88BA}"/>
-              </a:ext>
-            </a:extLst>
-          </p:cNvPr>
-          <p:cNvSpPr>
-            <a:spLocks xmlns:a="http://schemas.openxmlformats.org/drawingml/2006/main" noGrp="1"/>
-          </p:cNvSpPr>
-          <p:nvPr/>
-        </p:nvSpPr>
-        <p:spPr>
-          <a:xfrm xmlns:a="http://schemas.openxmlformats.org/drawingml/2006/main">
-            <a:off x="819150" y="1962150"/>
-            <a:ext cx="5676900" cy="285750"/>
+                <a16:creationId xmlns:a16="http://schemas.microsoft.com/office/drawing/2014/main" id="{0401C472-E03A-4280-AE2F-FCAAA0D451BD}"/>
+              </a:ext>
+            </a:extLst>
+          </p:cNvPr>
+          <p:cNvSpPr>
+            <a:spLocks xmlns:a="http://schemas.openxmlformats.org/drawingml/2006/main" noGrp="1"/>
+          </p:cNvSpPr>
+          <p:nvPr/>
+        </p:nvSpPr>
+        <p:spPr>
+          <a:xfrm xmlns:a="http://schemas.openxmlformats.org/drawingml/2006/main">
+            <a:off x="819150" y="1333500"/>
+            <a:ext cx="5943600" cy="285750"/>
           </a:xfrm>
           <a:prstGeom xmlns:a="http://schemas.openxmlformats.org/drawingml/2006/main" prst="rect">
             <a:avLst/>
@@ -6581,7 +6776,7 @@
                   <a:srgbClr val="64748B"/>
                 </a:solidFill>
               </a:rPr>
-              <a:t>面试时建议先讲 demo 数据，再讲上线后如何持续度量。</a:t>
+              <a:t>先做小范围试点，用数据判断是否扩大到更多仓库和团队。</a:t>
             </a:r>
           </a:p>
         </p:txBody>
@@ -6591,23 +6786,23 @@
           <p:cNvPr id="3" name="">
             <a:extLst xmlns:a="http://schemas.openxmlformats.org/drawingml/2006/main">
               <a:ext uri="{FF2B5EF4-FFF2-40B4-BE49-F238E27FC236}">
-                <a16:creationId xmlns:a16="http://schemas.microsoft.com/office/drawing/2014/main" id="{D853658A-33DE-4ABD-A8C0-B24825A83F10}"/>
-              </a:ext>
-            </a:extLst>
-          </p:cNvPr>
-          <p:cNvSpPr>
-            <a:spLocks xmlns:a="http://schemas.openxmlformats.org/drawingml/2006/main" noGrp="1"/>
-          </p:cNvSpPr>
-          <p:nvPr/>
-        </p:nvSpPr>
-        <p:spPr>
-          <a:xfrm xmlns:a="http://schemas.openxmlformats.org/drawingml/2006/main">
-            <a:off x="819150" y="3670935"/>
-            <a:ext cx="4144804" cy="1706880"/>
+                <a16:creationId xmlns:a16="http://schemas.microsoft.com/office/drawing/2014/main" id="{7D1CCA3D-AB41-4744-916D-B4AA2C2879D5}"/>
+              </a:ext>
+            </a:extLst>
+          </p:cNvPr>
+          <p:cNvSpPr>
+            <a:spLocks xmlns:a="http://schemas.openxmlformats.org/drawingml/2006/main" noGrp="1"/>
+          </p:cNvSpPr>
+          <p:nvPr/>
+        </p:nvSpPr>
+        <p:spPr>
+          <a:xfrm xmlns:a="http://schemas.openxmlformats.org/drawingml/2006/main">
+            <a:off x="819150" y="3425190"/>
+            <a:ext cx="4275963" cy="1672590"/>
           </a:xfrm>
           <a:prstGeom xmlns:a="http://schemas.openxmlformats.org/drawingml/2006/main" prst="roundRect">
             <a:avLst>
-              <a:gd name="adj" fmla="val 6696"/>
+              <a:gd name="adj" fmla="val 6834"/>
             </a:avLst>
           </a:prstGeom>
           <a:solidFill xmlns:a="http://schemas.openxmlformats.org/drawingml/2006/main">
@@ -6626,37 +6821,37 @@
           <p:cNvPr id="4" name="">
             <a:extLst xmlns:a="http://schemas.openxmlformats.org/drawingml/2006/main">
               <a:ext uri="{FF2B5EF4-FFF2-40B4-BE49-F238E27FC236}">
-                <a16:creationId xmlns:a16="http://schemas.microsoft.com/office/drawing/2014/main" id="{42D3974E-6085-47D4-8EBE-3094D1FCE2FF}"/>
-              </a:ext>
-            </a:extLst>
-          </p:cNvPr>
-          <p:cNvSpPr>
-            <a:spLocks xmlns:a="http://schemas.openxmlformats.org/drawingml/2006/main" noGrp="1"/>
-          </p:cNvSpPr>
-          <p:nvPr/>
-        </p:nvSpPr>
-        <p:spPr>
-          <a:xfrm xmlns:a="http://schemas.openxmlformats.org/drawingml/2006/main">
-            <a:off x="1085850" y="3905250"/>
-            <a:ext cx="3619500" cy="647700"/>
-          </a:xfrm>
-          <a:prstGeom xmlns:a="http://schemas.openxmlformats.org/drawingml/2006/main" prst="rect">
-            <a:avLst/>
-          </a:prstGeom>
-        </p:spPr>
-        <p:txBody>
-          <a:bodyPr xmlns:a="http://schemas.openxmlformats.org/drawingml/2006/main" lIns="0" tIns="0" rIns="0" bIns="0"/>
-          <a:lstStyle xmlns:a="http://schemas.openxmlformats.org/drawingml/2006/main"/>
-          <a:p xmlns:a="http://schemas.openxmlformats.org/drawingml/2006/main">
-            <a:pPr>
-              <a:defRPr sz="4200" b="1">
+                <a16:creationId xmlns:a16="http://schemas.microsoft.com/office/drawing/2014/main" id="{31549CA0-59FD-40D6-B4A1-49ACAABFF909}"/>
+              </a:ext>
+            </a:extLst>
+          </p:cNvPr>
+          <p:cNvSpPr>
+            <a:spLocks xmlns:a="http://schemas.openxmlformats.org/drawingml/2006/main" noGrp="1"/>
+          </p:cNvSpPr>
+          <p:nvPr/>
+        </p:nvSpPr>
+        <p:spPr>
+          <a:xfrm xmlns:a="http://schemas.openxmlformats.org/drawingml/2006/main">
+            <a:off x="1085850" y="3657600"/>
+            <a:ext cx="3733800" cy="628650"/>
+          </a:xfrm>
+          <a:prstGeom xmlns:a="http://schemas.openxmlformats.org/drawingml/2006/main" prst="rect">
+            <a:avLst/>
+          </a:prstGeom>
+        </p:spPr>
+        <p:txBody>
+          <a:bodyPr xmlns:a="http://schemas.openxmlformats.org/drawingml/2006/main" lIns="0" tIns="0" rIns="0" bIns="0"/>
+          <a:lstStyle xmlns:a="http://schemas.openxmlformats.org/drawingml/2006/main"/>
+          <a:p xmlns:a="http://schemas.openxmlformats.org/drawingml/2006/main">
+            <a:pPr>
+              <a:defRPr sz="4050" b="1">
                 <a:solidFill>
                   <a:srgbClr val="16A34A"/>
                 </a:solidFill>
               </a:defRPr>
             </a:pPr>
             <a:r>
-              <a:rPr sz="4200" b="1">
+              <a:rPr sz="4050" b="1">
                 <a:solidFill>
                   <a:srgbClr val="16A34A"/>
                 </a:solidFill>
@@ -6671,42 +6866,42 @@
           <p:cNvPr id="5" name="">
             <a:extLst xmlns:a="http://schemas.openxmlformats.org/drawingml/2006/main">
               <a:ext uri="{FF2B5EF4-FFF2-40B4-BE49-F238E27FC236}">
-                <a16:creationId xmlns:a16="http://schemas.microsoft.com/office/drawing/2014/main" id="{BAABCD63-C172-45D2-BEC6-4E322AF130A3}"/>
-              </a:ext>
-            </a:extLst>
-          </p:cNvPr>
-          <p:cNvSpPr>
-            <a:spLocks xmlns:a="http://schemas.openxmlformats.org/drawingml/2006/main" noGrp="1"/>
-          </p:cNvSpPr>
-          <p:nvPr/>
-        </p:nvSpPr>
-        <p:spPr>
-          <a:xfrm xmlns:a="http://schemas.openxmlformats.org/drawingml/2006/main">
-            <a:off x="1085850" y="4610100"/>
-            <a:ext cx="3619500" cy="266700"/>
-          </a:xfrm>
-          <a:prstGeom xmlns:a="http://schemas.openxmlformats.org/drawingml/2006/main" prst="rect">
-            <a:avLst/>
-          </a:prstGeom>
-        </p:spPr>
-        <p:txBody>
-          <a:bodyPr xmlns:a="http://schemas.openxmlformats.org/drawingml/2006/main" lIns="0" tIns="0" rIns="0" bIns="0"/>
-          <a:lstStyle xmlns:a="http://schemas.openxmlformats.org/drawingml/2006/main"/>
-          <a:p xmlns:a="http://schemas.openxmlformats.org/drawingml/2006/main">
-            <a:pPr>
-              <a:defRPr sz="1725" b="1">
+                <a16:creationId xmlns:a16="http://schemas.microsoft.com/office/drawing/2014/main" id="{21A4ECB6-E826-46CE-82D0-E2118C221CD8}"/>
+              </a:ext>
+            </a:extLst>
+          </p:cNvPr>
+          <p:cNvSpPr>
+            <a:spLocks xmlns:a="http://schemas.openxmlformats.org/drawingml/2006/main" noGrp="1"/>
+          </p:cNvSpPr>
+          <p:nvPr/>
+        </p:nvSpPr>
+        <p:spPr>
+          <a:xfrm xmlns:a="http://schemas.openxmlformats.org/drawingml/2006/main">
+            <a:off x="1085850" y="4343400"/>
+            <a:ext cx="3733800" cy="266700"/>
+          </a:xfrm>
+          <a:prstGeom xmlns:a="http://schemas.openxmlformats.org/drawingml/2006/main" prst="rect">
+            <a:avLst/>
+          </a:prstGeom>
+        </p:spPr>
+        <p:txBody>
+          <a:bodyPr xmlns:a="http://schemas.openxmlformats.org/drawingml/2006/main" lIns="0" tIns="0" rIns="0" bIns="0"/>
+          <a:lstStyle xmlns:a="http://schemas.openxmlformats.org/drawingml/2006/main"/>
+          <a:p xmlns:a="http://schemas.openxmlformats.org/drawingml/2006/main">
+            <a:pPr>
+              <a:defRPr sz="1650" b="1">
                 <a:solidFill>
                   <a:srgbClr val="1F2937"/>
                 </a:solidFill>
               </a:defRPr>
             </a:pPr>
             <a:r>
-              <a:rPr sz="1725" b="1">
+              <a:rPr sz="1650" b="1">
                 <a:solidFill>
                   <a:srgbClr val="1F2937"/>
                 </a:solidFill>
               </a:rPr>
-              <a:t>评审准备时间</a:t>
+              <a:t>PR 首轮准备</a:t>
             </a:r>
           </a:p>
         </p:txBody>
@@ -6716,30 +6911,42 @@
           <p:cNvPr id="6" name="">
             <a:extLst xmlns:a="http://schemas.openxmlformats.org/drawingml/2006/main">
               <a:ext uri="{FF2B5EF4-FFF2-40B4-BE49-F238E27FC236}">
-                <a16:creationId xmlns:a16="http://schemas.microsoft.com/office/drawing/2014/main" id="{2C1FC787-F347-4CC3-AF7F-42A79F10E2CB}"/>
-              </a:ext>
-            </a:extLst>
-          </p:cNvPr>
-          <p:cNvSpPr>
-            <a:spLocks xmlns:a="http://schemas.openxmlformats.org/drawingml/2006/main" noGrp="1"/>
-          </p:cNvSpPr>
-          <p:nvPr/>
-        </p:nvSpPr>
-        <p:spPr>
-          <a:xfrm xmlns:a="http://schemas.openxmlformats.org/drawingml/2006/main">
-            <a:off x="1085850" y="4953000"/>
-            <a:ext cx="3619500" cy="209550"/>
-          </a:xfrm>
-          <a:prstGeom xmlns:a="http://schemas.openxmlformats.org/drawingml/2006/main" prst="rect">
-            <a:avLst/>
-          </a:prstGeom>
-        </p:spPr>
-        <p:txBody>
-          <a:bodyPr xmlns:a="http://schemas.openxmlformats.org/drawingml/2006/main" lIns="0" tIns="0" rIns="0" bIns="0"/>
-          <a:lstStyle xmlns:a="http://schemas.openxmlformats.org/drawingml/2006/main"/>
-          <a:p xmlns:a="http://schemas.openxmlformats.org/drawingml/2006/main">
-            <a:r>
-              <a:t/>
+                <a16:creationId xmlns:a16="http://schemas.microsoft.com/office/drawing/2014/main" id="{AFFB2C92-10AF-49A5-831F-CD7B7EB592AC}"/>
+              </a:ext>
+            </a:extLst>
+          </p:cNvPr>
+          <p:cNvSpPr>
+            <a:spLocks xmlns:a="http://schemas.openxmlformats.org/drawingml/2006/main" noGrp="1"/>
+          </p:cNvSpPr>
+          <p:nvPr/>
+        </p:nvSpPr>
+        <p:spPr>
+          <a:xfrm xmlns:a="http://schemas.openxmlformats.org/drawingml/2006/main">
+            <a:off x="1085850" y="4667250"/>
+            <a:ext cx="3733800" cy="209550"/>
+          </a:xfrm>
+          <a:prstGeom xmlns:a="http://schemas.openxmlformats.org/drawingml/2006/main" prst="rect">
+            <a:avLst/>
+          </a:prstGeom>
+        </p:spPr>
+        <p:txBody>
+          <a:bodyPr xmlns:a="http://schemas.openxmlformats.org/drawingml/2006/main" lIns="0" tIns="0" rIns="0" bIns="0"/>
+          <a:lstStyle xmlns:a="http://schemas.openxmlformats.org/drawingml/2006/main"/>
+          <a:p xmlns:a="http://schemas.openxmlformats.org/drawingml/2006/main">
+            <a:pPr>
+              <a:defRPr sz="1275">
+                <a:solidFill>
+                  <a:srgbClr val="64748B"/>
+                </a:solidFill>
+              </a:defRPr>
+            </a:pPr>
+            <a:r>
+              <a:rPr sz="1275">
+                <a:solidFill>
+                  <a:srgbClr val="64748B"/>
+                </a:solidFill>
+              </a:rPr>
+              <a:t>效率指标</a:t>
             </a:r>
           </a:p>
         </p:txBody>
@@ -6749,23 +6956,23 @@
           <p:cNvPr id="7" name="">
             <a:extLst xmlns:a="http://schemas.openxmlformats.org/drawingml/2006/main">
               <a:ext uri="{FF2B5EF4-FFF2-40B4-BE49-F238E27FC236}">
-                <a16:creationId xmlns:a16="http://schemas.microsoft.com/office/drawing/2014/main" id="{D3B9D87C-04E2-4C19-970C-1522A6A75235}"/>
-              </a:ext>
-            </a:extLst>
-          </p:cNvPr>
-          <p:cNvSpPr>
-            <a:spLocks xmlns:a="http://schemas.openxmlformats.org/drawingml/2006/main" noGrp="1"/>
-          </p:cNvSpPr>
-          <p:nvPr/>
-        </p:nvSpPr>
-        <p:spPr>
-          <a:xfrm xmlns:a="http://schemas.openxmlformats.org/drawingml/2006/main">
-            <a:off x="5135404" y="3670935"/>
-            <a:ext cx="4144804" cy="1706880"/>
+                <a16:creationId xmlns:a16="http://schemas.microsoft.com/office/drawing/2014/main" id="{87BFE16A-5F5B-4001-A962-DE6D7AC27857}"/>
+              </a:ext>
+            </a:extLst>
+          </p:cNvPr>
+          <p:cNvSpPr>
+            <a:spLocks xmlns:a="http://schemas.openxmlformats.org/drawingml/2006/main" noGrp="1"/>
+          </p:cNvSpPr>
+          <p:nvPr/>
+        </p:nvSpPr>
+        <p:spPr>
+          <a:xfrm xmlns:a="http://schemas.openxmlformats.org/drawingml/2006/main">
+            <a:off x="5266563" y="3425190"/>
+            <a:ext cx="4275963" cy="1672590"/>
           </a:xfrm>
           <a:prstGeom xmlns:a="http://schemas.openxmlformats.org/drawingml/2006/main" prst="roundRect">
             <a:avLst>
-              <a:gd name="adj" fmla="val 6696"/>
+              <a:gd name="adj" fmla="val 6834"/>
             </a:avLst>
           </a:prstGeom>
           <a:solidFill xmlns:a="http://schemas.openxmlformats.org/drawingml/2006/main">
@@ -6784,37 +6991,37 @@
           <p:cNvPr id="8" name="">
             <a:extLst xmlns:a="http://schemas.openxmlformats.org/drawingml/2006/main">
               <a:ext uri="{FF2B5EF4-FFF2-40B4-BE49-F238E27FC236}">
-                <a16:creationId xmlns:a16="http://schemas.microsoft.com/office/drawing/2014/main" id="{C13D7DB8-D2DA-4393-9F51-C0328408AD70}"/>
-              </a:ext>
-            </a:extLst>
-          </p:cNvPr>
-          <p:cNvSpPr>
-            <a:spLocks xmlns:a="http://schemas.openxmlformats.org/drawingml/2006/main" noGrp="1"/>
-          </p:cNvSpPr>
-          <p:nvPr/>
-        </p:nvSpPr>
-        <p:spPr>
-          <a:xfrm xmlns:a="http://schemas.openxmlformats.org/drawingml/2006/main">
-            <a:off x="5410200" y="3905250"/>
-            <a:ext cx="3619500" cy="647700"/>
-          </a:xfrm>
-          <a:prstGeom xmlns:a="http://schemas.openxmlformats.org/drawingml/2006/main" prst="rect">
-            <a:avLst/>
-          </a:prstGeom>
-        </p:spPr>
-        <p:txBody>
-          <a:bodyPr xmlns:a="http://schemas.openxmlformats.org/drawingml/2006/main" lIns="0" tIns="0" rIns="0" bIns="0"/>
-          <a:lstStyle xmlns:a="http://schemas.openxmlformats.org/drawingml/2006/main"/>
-          <a:p xmlns:a="http://schemas.openxmlformats.org/drawingml/2006/main">
-            <a:pPr>
-              <a:defRPr sz="4200" b="1">
+                <a16:creationId xmlns:a16="http://schemas.microsoft.com/office/drawing/2014/main" id="{92F59699-8821-4525-984E-1256672215B1}"/>
+              </a:ext>
+            </a:extLst>
+          </p:cNvPr>
+          <p:cNvSpPr>
+            <a:spLocks xmlns:a="http://schemas.openxmlformats.org/drawingml/2006/main" noGrp="1"/>
+          </p:cNvSpPr>
+          <p:nvPr/>
+        </p:nvSpPr>
+        <p:spPr>
+          <a:xfrm xmlns:a="http://schemas.openxmlformats.org/drawingml/2006/main">
+            <a:off x="5524500" y="3657600"/>
+            <a:ext cx="3733800" cy="628650"/>
+          </a:xfrm>
+          <a:prstGeom xmlns:a="http://schemas.openxmlformats.org/drawingml/2006/main" prst="rect">
+            <a:avLst/>
+          </a:prstGeom>
+        </p:spPr>
+        <p:txBody>
+          <a:bodyPr xmlns:a="http://schemas.openxmlformats.org/drawingml/2006/main" lIns="0" tIns="0" rIns="0" bIns="0"/>
+          <a:lstStyle xmlns:a="http://schemas.openxmlformats.org/drawingml/2006/main"/>
+          <a:p xmlns:a="http://schemas.openxmlformats.org/drawingml/2006/main">
+            <a:pPr>
+              <a:defRPr sz="4050" b="1">
                 <a:solidFill>
                   <a:srgbClr val="2563EB"/>
                 </a:solidFill>
               </a:defRPr>
             </a:pPr>
             <a:r>
-              <a:rPr sz="4200" b="1">
+              <a:rPr sz="4050" b="1">
                 <a:solidFill>
                   <a:srgbClr val="2563EB"/>
                 </a:solidFill>
@@ -6829,37 +7036,37 @@
           <p:cNvPr id="9" name="">
             <a:extLst xmlns:a="http://schemas.openxmlformats.org/drawingml/2006/main">
               <a:ext uri="{FF2B5EF4-FFF2-40B4-BE49-F238E27FC236}">
-                <a16:creationId xmlns:a16="http://schemas.microsoft.com/office/drawing/2014/main" id="{E1C5ACFD-CF26-46BE-989A-49EC08C17E9D}"/>
-              </a:ext>
-            </a:extLst>
-          </p:cNvPr>
-          <p:cNvSpPr>
-            <a:spLocks xmlns:a="http://schemas.openxmlformats.org/drawingml/2006/main" noGrp="1"/>
-          </p:cNvSpPr>
-          <p:nvPr/>
-        </p:nvSpPr>
-        <p:spPr>
-          <a:xfrm xmlns:a="http://schemas.openxmlformats.org/drawingml/2006/main">
-            <a:off x="5410200" y="4610100"/>
-            <a:ext cx="3619500" cy="266700"/>
-          </a:xfrm>
-          <a:prstGeom xmlns:a="http://schemas.openxmlformats.org/drawingml/2006/main" prst="rect">
-            <a:avLst/>
-          </a:prstGeom>
-        </p:spPr>
-        <p:txBody>
-          <a:bodyPr xmlns:a="http://schemas.openxmlformats.org/drawingml/2006/main" lIns="0" tIns="0" rIns="0" bIns="0"/>
-          <a:lstStyle xmlns:a="http://schemas.openxmlformats.org/drawingml/2006/main"/>
-          <a:p xmlns:a="http://schemas.openxmlformats.org/drawingml/2006/main">
-            <a:pPr>
-              <a:defRPr sz="1725" b="1">
+                <a16:creationId xmlns:a16="http://schemas.microsoft.com/office/drawing/2014/main" id="{4F2616AB-3A1D-41C5-B762-2D23A53FA443}"/>
+              </a:ext>
+            </a:extLst>
+          </p:cNvPr>
+          <p:cNvSpPr>
+            <a:spLocks xmlns:a="http://schemas.openxmlformats.org/drawingml/2006/main" noGrp="1"/>
+          </p:cNvSpPr>
+          <p:nvPr/>
+        </p:nvSpPr>
+        <p:spPr>
+          <a:xfrm xmlns:a="http://schemas.openxmlformats.org/drawingml/2006/main">
+            <a:off x="5524500" y="4343400"/>
+            <a:ext cx="3733800" cy="266700"/>
+          </a:xfrm>
+          <a:prstGeom xmlns:a="http://schemas.openxmlformats.org/drawingml/2006/main" prst="rect">
+            <a:avLst/>
+          </a:prstGeom>
+        </p:spPr>
+        <p:txBody>
+          <a:bodyPr xmlns:a="http://schemas.openxmlformats.org/drawingml/2006/main" lIns="0" tIns="0" rIns="0" bIns="0"/>
+          <a:lstStyle xmlns:a="http://schemas.openxmlformats.org/drawingml/2006/main"/>
+          <a:p xmlns:a="http://schemas.openxmlformats.org/drawingml/2006/main">
+            <a:pPr>
+              <a:defRPr sz="1650" b="1">
                 <a:solidFill>
                   <a:srgbClr val="1F2937"/>
                 </a:solidFill>
               </a:defRPr>
             </a:pPr>
             <a:r>
-              <a:rPr sz="1725" b="1">
+              <a:rPr sz="1650" b="1">
                 <a:solidFill>
                   <a:srgbClr val="1F2937"/>
                 </a:solidFill>
@@ -6874,30 +7081,42 @@
           <p:cNvPr id="10" name="">
             <a:extLst xmlns:a="http://schemas.openxmlformats.org/drawingml/2006/main">
               <a:ext uri="{FF2B5EF4-FFF2-40B4-BE49-F238E27FC236}">
-                <a16:creationId xmlns:a16="http://schemas.microsoft.com/office/drawing/2014/main" id="{250C39E4-CE4C-471B-870B-9605A5B36B6A}"/>
-              </a:ext>
-            </a:extLst>
-          </p:cNvPr>
-          <p:cNvSpPr>
-            <a:spLocks xmlns:a="http://schemas.openxmlformats.org/drawingml/2006/main" noGrp="1"/>
-          </p:cNvSpPr>
-          <p:nvPr/>
-        </p:nvSpPr>
-        <p:spPr>
-          <a:xfrm xmlns:a="http://schemas.openxmlformats.org/drawingml/2006/main">
-            <a:off x="5410200" y="4953000"/>
-            <a:ext cx="3619500" cy="209550"/>
-          </a:xfrm>
-          <a:prstGeom xmlns:a="http://schemas.openxmlformats.org/drawingml/2006/main" prst="rect">
-            <a:avLst/>
-          </a:prstGeom>
-        </p:spPr>
-        <p:txBody>
-          <a:bodyPr xmlns:a="http://schemas.openxmlformats.org/drawingml/2006/main" lIns="0" tIns="0" rIns="0" bIns="0"/>
-          <a:lstStyle xmlns:a="http://schemas.openxmlformats.org/drawingml/2006/main"/>
-          <a:p xmlns:a="http://schemas.openxmlformats.org/drawingml/2006/main">
-            <a:r>
-              <a:t/>
+                <a16:creationId xmlns:a16="http://schemas.microsoft.com/office/drawing/2014/main" id="{F5985B06-69FF-42B9-9942-883E673F34D9}"/>
+              </a:ext>
+            </a:extLst>
+          </p:cNvPr>
+          <p:cNvSpPr>
+            <a:spLocks xmlns:a="http://schemas.openxmlformats.org/drawingml/2006/main" noGrp="1"/>
+          </p:cNvSpPr>
+          <p:nvPr/>
+        </p:nvSpPr>
+        <p:spPr>
+          <a:xfrm xmlns:a="http://schemas.openxmlformats.org/drawingml/2006/main">
+            <a:off x="5524500" y="4667250"/>
+            <a:ext cx="3733800" cy="209550"/>
+          </a:xfrm>
+          <a:prstGeom xmlns:a="http://schemas.openxmlformats.org/drawingml/2006/main" prst="rect">
+            <a:avLst/>
+          </a:prstGeom>
+        </p:spPr>
+        <p:txBody>
+          <a:bodyPr xmlns:a="http://schemas.openxmlformats.org/drawingml/2006/main" lIns="0" tIns="0" rIns="0" bIns="0"/>
+          <a:lstStyle xmlns:a="http://schemas.openxmlformats.org/drawingml/2006/main"/>
+          <a:p xmlns:a="http://schemas.openxmlformats.org/drawingml/2006/main">
+            <a:pPr>
+              <a:defRPr sz="1275">
+                <a:solidFill>
+                  <a:srgbClr val="64748B"/>
+                </a:solidFill>
+              </a:defRPr>
+            </a:pPr>
+            <a:r>
+              <a:rPr sz="1275">
+                <a:solidFill>
+                  <a:srgbClr val="64748B"/>
+                </a:solidFill>
+              </a:rPr>
+              <a:t>质量指标</a:t>
             </a:r>
           </a:p>
         </p:txBody>
@@ -6907,23 +7126,23 @@
           <p:cNvPr id="11" name="">
             <a:extLst xmlns:a="http://schemas.openxmlformats.org/drawingml/2006/main">
               <a:ext uri="{FF2B5EF4-FFF2-40B4-BE49-F238E27FC236}">
-                <a16:creationId xmlns:a16="http://schemas.microsoft.com/office/drawing/2014/main" id="{D7BEF628-7B3A-44CC-97E7-C20888E39458}"/>
-              </a:ext>
-            </a:extLst>
-          </p:cNvPr>
-          <p:cNvSpPr>
-            <a:spLocks xmlns:a="http://schemas.openxmlformats.org/drawingml/2006/main" noGrp="1"/>
-          </p:cNvSpPr>
-          <p:nvPr/>
-        </p:nvSpPr>
-        <p:spPr>
-          <a:xfrm xmlns:a="http://schemas.openxmlformats.org/drawingml/2006/main">
-            <a:off x="819150" y="5587365"/>
-            <a:ext cx="4144804" cy="1706880"/>
+                <a16:creationId xmlns:a16="http://schemas.microsoft.com/office/drawing/2014/main" id="{B1B117D2-9D23-407B-9DE2-125228806C99}"/>
+              </a:ext>
+            </a:extLst>
+          </p:cNvPr>
+          <p:cNvSpPr>
+            <a:spLocks xmlns:a="http://schemas.openxmlformats.org/drawingml/2006/main" noGrp="1"/>
+          </p:cNvSpPr>
+          <p:nvPr/>
+        </p:nvSpPr>
+        <p:spPr>
+          <a:xfrm xmlns:a="http://schemas.openxmlformats.org/drawingml/2006/main">
+            <a:off x="819150" y="5288280"/>
+            <a:ext cx="4275963" cy="1672590"/>
           </a:xfrm>
           <a:prstGeom xmlns:a="http://schemas.openxmlformats.org/drawingml/2006/main" prst="roundRect">
             <a:avLst>
-              <a:gd name="adj" fmla="val 6696"/>
+              <a:gd name="adj" fmla="val 6834"/>
             </a:avLst>
           </a:prstGeom>
           <a:solidFill xmlns:a="http://schemas.openxmlformats.org/drawingml/2006/main">
@@ -6942,37 +7161,37 @@
           <p:cNvPr id="12" name="">
             <a:extLst xmlns:a="http://schemas.openxmlformats.org/drawingml/2006/main">
               <a:ext uri="{FF2B5EF4-FFF2-40B4-BE49-F238E27FC236}">
-                <a16:creationId xmlns:a16="http://schemas.microsoft.com/office/drawing/2014/main" id="{21D3B334-5C25-45A7-91ED-1CBBFBF3999E}"/>
-              </a:ext>
-            </a:extLst>
-          </p:cNvPr>
-          <p:cNvSpPr>
-            <a:spLocks xmlns:a="http://schemas.openxmlformats.org/drawingml/2006/main" noGrp="1"/>
-          </p:cNvSpPr>
-          <p:nvPr/>
-        </p:nvSpPr>
-        <p:spPr>
-          <a:xfrm xmlns:a="http://schemas.openxmlformats.org/drawingml/2006/main">
-            <a:off x="1085850" y="5810250"/>
-            <a:ext cx="3619500" cy="647700"/>
-          </a:xfrm>
-          <a:prstGeom xmlns:a="http://schemas.openxmlformats.org/drawingml/2006/main" prst="rect">
-            <a:avLst/>
-          </a:prstGeom>
-        </p:spPr>
-        <p:txBody>
-          <a:bodyPr xmlns:a="http://schemas.openxmlformats.org/drawingml/2006/main" lIns="0" tIns="0" rIns="0" bIns="0"/>
-          <a:lstStyle xmlns:a="http://schemas.openxmlformats.org/drawingml/2006/main"/>
-          <a:p xmlns:a="http://schemas.openxmlformats.org/drawingml/2006/main">
-            <a:pPr>
-              <a:defRPr sz="4200" b="1">
+                <a16:creationId xmlns:a16="http://schemas.microsoft.com/office/drawing/2014/main" id="{3AD4E320-6C45-4EAF-BD8F-2D968954BA54}"/>
+              </a:ext>
+            </a:extLst>
+          </p:cNvPr>
+          <p:cNvSpPr>
+            <a:spLocks xmlns:a="http://schemas.openxmlformats.org/drawingml/2006/main" noGrp="1"/>
+          </p:cNvSpPr>
+          <p:nvPr/>
+        </p:nvSpPr>
+        <p:spPr>
+          <a:xfrm xmlns:a="http://schemas.openxmlformats.org/drawingml/2006/main">
+            <a:off x="1085850" y="5524500"/>
+            <a:ext cx="3733800" cy="628650"/>
+          </a:xfrm>
+          <a:prstGeom xmlns:a="http://schemas.openxmlformats.org/drawingml/2006/main" prst="rect">
+            <a:avLst/>
+          </a:prstGeom>
+        </p:spPr>
+        <p:txBody>
+          <a:bodyPr xmlns:a="http://schemas.openxmlformats.org/drawingml/2006/main" lIns="0" tIns="0" rIns="0" bIns="0"/>
+          <a:lstStyle xmlns:a="http://schemas.openxmlformats.org/drawingml/2006/main"/>
+          <a:p xmlns:a="http://schemas.openxmlformats.org/drawingml/2006/main">
+            <a:pPr>
+              <a:defRPr sz="4050" b="1">
                 <a:solidFill>
                   <a:srgbClr val="0F9F8F"/>
                 </a:solidFill>
               </a:defRPr>
             </a:pPr>
             <a:r>
-              <a:rPr sz="4200" b="1">
+              <a:rPr sz="4050" b="1">
                 <a:solidFill>
                   <a:srgbClr val="0F9F8F"/>
                 </a:solidFill>
@@ -6987,7 +7206,52 @@
           <p:cNvPr id="13" name="">
             <a:extLst xmlns:a="http://schemas.openxmlformats.org/drawingml/2006/main">
               <a:ext uri="{FF2B5EF4-FFF2-40B4-BE49-F238E27FC236}">
-                <a16:creationId xmlns:a16="http://schemas.microsoft.com/office/drawing/2014/main" id="{30874D09-6E29-4CCF-93A6-D6F0244F6D2B}"/>
+                <a16:creationId xmlns:a16="http://schemas.microsoft.com/office/drawing/2014/main" id="{E76F500E-7089-4BF2-8883-F7F6C416C670}"/>
+              </a:ext>
+            </a:extLst>
+          </p:cNvPr>
+          <p:cNvSpPr>
+            <a:spLocks xmlns:a="http://schemas.openxmlformats.org/drawingml/2006/main" noGrp="1"/>
+          </p:cNvSpPr>
+          <p:nvPr/>
+        </p:nvSpPr>
+        <p:spPr>
+          <a:xfrm xmlns:a="http://schemas.openxmlformats.org/drawingml/2006/main">
+            <a:off x="1085850" y="6210300"/>
+            <a:ext cx="3733800" cy="266700"/>
+          </a:xfrm>
+          <a:prstGeom xmlns:a="http://schemas.openxmlformats.org/drawingml/2006/main" prst="rect">
+            <a:avLst/>
+          </a:prstGeom>
+        </p:spPr>
+        <p:txBody>
+          <a:bodyPr xmlns:a="http://schemas.openxmlformats.org/drawingml/2006/main" lIns="0" tIns="0" rIns="0" bIns="0"/>
+          <a:lstStyle xmlns:a="http://schemas.openxmlformats.org/drawingml/2006/main"/>
+          <a:p xmlns:a="http://schemas.openxmlformats.org/drawingml/2006/main">
+            <a:pPr>
+              <a:defRPr sz="1650" b="1">
+                <a:solidFill>
+                  <a:srgbClr val="1F2937"/>
+                </a:solidFill>
+              </a:defRPr>
+            </a:pPr>
+            <a:r>
+              <a:rPr sz="1650" b="1">
+                <a:solidFill>
+                  <a:srgbClr val="1F2937"/>
+                </a:solidFill>
+              </a:rPr>
+              <a:t>测试建议</a:t>
+            </a:r>
+          </a:p>
+        </p:txBody>
+      </p:sp>
+      <p:sp>
+        <p:nvSpPr>
+          <p:cNvPr id="14" name="">
+            <a:extLst xmlns:a="http://schemas.openxmlformats.org/drawingml/2006/main">
+              <a:ext uri="{FF2B5EF4-FFF2-40B4-BE49-F238E27FC236}">
+                <a16:creationId xmlns:a16="http://schemas.microsoft.com/office/drawing/2014/main" id="{88B6153A-001E-4C29-8715-6B9AB46344F1}"/>
               </a:ext>
             </a:extLst>
           </p:cNvPr>
@@ -6999,63 +7263,30 @@
         <p:spPr>
           <a:xfrm xmlns:a="http://schemas.openxmlformats.org/drawingml/2006/main">
             <a:off x="1085850" y="6534150"/>
-            <a:ext cx="3619500" cy="266700"/>
-          </a:xfrm>
-          <a:prstGeom xmlns:a="http://schemas.openxmlformats.org/drawingml/2006/main" prst="rect">
-            <a:avLst/>
-          </a:prstGeom>
-        </p:spPr>
-        <p:txBody>
-          <a:bodyPr xmlns:a="http://schemas.openxmlformats.org/drawingml/2006/main" lIns="0" tIns="0" rIns="0" bIns="0"/>
-          <a:lstStyle xmlns:a="http://schemas.openxmlformats.org/drawingml/2006/main"/>
-          <a:p xmlns:a="http://schemas.openxmlformats.org/drawingml/2006/main">
-            <a:pPr>
-              <a:defRPr sz="1725" b="1">
-                <a:solidFill>
-                  <a:srgbClr val="1F2937"/>
-                </a:solidFill>
-              </a:defRPr>
-            </a:pPr>
-            <a:r>
-              <a:rPr sz="1725" b="1">
-                <a:solidFill>
-                  <a:srgbClr val="1F2937"/>
-                </a:solidFill>
-              </a:rPr>
-              <a:t>测试建议</a:t>
-            </a:r>
-          </a:p>
-        </p:txBody>
-      </p:sp>
-      <p:sp>
-        <p:nvSpPr>
-          <p:cNvPr id="14" name="">
-            <a:extLst xmlns:a="http://schemas.openxmlformats.org/drawingml/2006/main">
-              <a:ext uri="{FF2B5EF4-FFF2-40B4-BE49-F238E27FC236}">
-                <a16:creationId xmlns:a16="http://schemas.microsoft.com/office/drawing/2014/main" id="{B1913CC7-E57C-445D-9474-814DD7F5D980}"/>
-              </a:ext>
-            </a:extLst>
-          </p:cNvPr>
-          <p:cNvSpPr>
-            <a:spLocks xmlns:a="http://schemas.openxmlformats.org/drawingml/2006/main" noGrp="1"/>
-          </p:cNvSpPr>
-          <p:nvPr/>
-        </p:nvSpPr>
-        <p:spPr>
-          <a:xfrm xmlns:a="http://schemas.openxmlformats.org/drawingml/2006/main">
-            <a:off x="1085850" y="6877050"/>
-            <a:ext cx="3619500" cy="209550"/>
-          </a:xfrm>
-          <a:prstGeom xmlns:a="http://schemas.openxmlformats.org/drawingml/2006/main" prst="rect">
-            <a:avLst/>
-          </a:prstGeom>
-        </p:spPr>
-        <p:txBody>
-          <a:bodyPr xmlns:a="http://schemas.openxmlformats.org/drawingml/2006/main" lIns="0" tIns="0" rIns="0" bIns="0"/>
-          <a:lstStyle xmlns:a="http://schemas.openxmlformats.org/drawingml/2006/main"/>
-          <a:p xmlns:a="http://schemas.openxmlformats.org/drawingml/2006/main">
-            <a:r>
-              <a:t/>
+            <a:ext cx="3733800" cy="209550"/>
+          </a:xfrm>
+          <a:prstGeom xmlns:a="http://schemas.openxmlformats.org/drawingml/2006/main" prst="rect">
+            <a:avLst/>
+          </a:prstGeom>
+        </p:spPr>
+        <p:txBody>
+          <a:bodyPr xmlns:a="http://schemas.openxmlformats.org/drawingml/2006/main" lIns="0" tIns="0" rIns="0" bIns="0"/>
+          <a:lstStyle xmlns:a="http://schemas.openxmlformats.org/drawingml/2006/main"/>
+          <a:p xmlns:a="http://schemas.openxmlformats.org/drawingml/2006/main">
+            <a:pPr>
+              <a:defRPr sz="1275">
+                <a:solidFill>
+                  <a:srgbClr val="64748B"/>
+                </a:solidFill>
+              </a:defRPr>
+            </a:pPr>
+            <a:r>
+              <a:rPr sz="1275">
+                <a:solidFill>
+                  <a:srgbClr val="64748B"/>
+                </a:solidFill>
+              </a:rPr>
+              <a:t>测试指标</a:t>
             </a:r>
           </a:p>
         </p:txBody>
@@ -7065,23 +7296,23 @@
           <p:cNvPr id="15" name="">
             <a:extLst xmlns:a="http://schemas.openxmlformats.org/drawingml/2006/main">
               <a:ext uri="{FF2B5EF4-FFF2-40B4-BE49-F238E27FC236}">
-                <a16:creationId xmlns:a16="http://schemas.microsoft.com/office/drawing/2014/main" id="{2F8769B0-20CD-41E4-930F-36169BC0A805}"/>
-              </a:ext>
-            </a:extLst>
-          </p:cNvPr>
-          <p:cNvSpPr>
-            <a:spLocks xmlns:a="http://schemas.openxmlformats.org/drawingml/2006/main" noGrp="1"/>
-          </p:cNvSpPr>
-          <p:nvPr/>
-        </p:nvSpPr>
-        <p:spPr>
-          <a:xfrm xmlns:a="http://schemas.openxmlformats.org/drawingml/2006/main">
-            <a:off x="5135404" y="5587365"/>
-            <a:ext cx="4144804" cy="1706880"/>
+                <a16:creationId xmlns:a16="http://schemas.microsoft.com/office/drawing/2014/main" id="{79B81FE6-DA06-4FEC-8DE4-61D0B4F56273}"/>
+              </a:ext>
+            </a:extLst>
+          </p:cNvPr>
+          <p:cNvSpPr>
+            <a:spLocks xmlns:a="http://schemas.openxmlformats.org/drawingml/2006/main" noGrp="1"/>
+          </p:cNvSpPr>
+          <p:nvPr/>
+        </p:nvSpPr>
+        <p:spPr>
+          <a:xfrm xmlns:a="http://schemas.openxmlformats.org/drawingml/2006/main">
+            <a:off x="5266563" y="5288280"/>
+            <a:ext cx="4275963" cy="1672590"/>
           </a:xfrm>
           <a:prstGeom xmlns:a="http://schemas.openxmlformats.org/drawingml/2006/main" prst="roundRect">
             <a:avLst>
-              <a:gd name="adj" fmla="val 6696"/>
+              <a:gd name="adj" fmla="val 6834"/>
             </a:avLst>
           </a:prstGeom>
           <a:solidFill xmlns:a="http://schemas.openxmlformats.org/drawingml/2006/main">
@@ -7100,37 +7331,37 @@
           <p:cNvPr id="16" name="">
             <a:extLst xmlns:a="http://schemas.openxmlformats.org/drawingml/2006/main">
               <a:ext uri="{FF2B5EF4-FFF2-40B4-BE49-F238E27FC236}">
-                <a16:creationId xmlns:a16="http://schemas.microsoft.com/office/drawing/2014/main" id="{62F331F8-0DC1-464C-9AC2-90036B9A6FF2}"/>
-              </a:ext>
-            </a:extLst>
-          </p:cNvPr>
-          <p:cNvSpPr>
-            <a:spLocks xmlns:a="http://schemas.openxmlformats.org/drawingml/2006/main" noGrp="1"/>
-          </p:cNvSpPr>
-          <p:nvPr/>
-        </p:nvSpPr>
-        <p:spPr>
-          <a:xfrm xmlns:a="http://schemas.openxmlformats.org/drawingml/2006/main">
-            <a:off x="5410200" y="5810250"/>
-            <a:ext cx="3619500" cy="647700"/>
-          </a:xfrm>
-          <a:prstGeom xmlns:a="http://schemas.openxmlformats.org/drawingml/2006/main" prst="rect">
-            <a:avLst/>
-          </a:prstGeom>
-        </p:spPr>
-        <p:txBody>
-          <a:bodyPr xmlns:a="http://schemas.openxmlformats.org/drawingml/2006/main" lIns="0" tIns="0" rIns="0" bIns="0"/>
-          <a:lstStyle xmlns:a="http://schemas.openxmlformats.org/drawingml/2006/main"/>
-          <a:p xmlns:a="http://schemas.openxmlformats.org/drawingml/2006/main">
-            <a:pPr>
-              <a:defRPr sz="4200" b="1">
+                <a16:creationId xmlns:a16="http://schemas.microsoft.com/office/drawing/2014/main" id="{0AEA13CC-C8D0-48AB-9F1A-122D140A0E92}"/>
+              </a:ext>
+            </a:extLst>
+          </p:cNvPr>
+          <p:cNvSpPr>
+            <a:spLocks xmlns:a="http://schemas.openxmlformats.org/drawingml/2006/main" noGrp="1"/>
+          </p:cNvSpPr>
+          <p:nvPr/>
+        </p:nvSpPr>
+        <p:spPr>
+          <a:xfrm xmlns:a="http://schemas.openxmlformats.org/drawingml/2006/main">
+            <a:off x="5524500" y="5524500"/>
+            <a:ext cx="3733800" cy="628650"/>
+          </a:xfrm>
+          <a:prstGeom xmlns:a="http://schemas.openxmlformats.org/drawingml/2006/main" prst="rect">
+            <a:avLst/>
+          </a:prstGeom>
+        </p:spPr>
+        <p:txBody>
+          <a:bodyPr xmlns:a="http://schemas.openxmlformats.org/drawingml/2006/main" lIns="0" tIns="0" rIns="0" bIns="0"/>
+          <a:lstStyle xmlns:a="http://schemas.openxmlformats.org/drawingml/2006/main"/>
+          <a:p xmlns:a="http://schemas.openxmlformats.org/drawingml/2006/main">
+            <a:pPr>
+              <a:defRPr sz="4050" b="1">
                 <a:solidFill>
                   <a:srgbClr val="F59E0B"/>
                 </a:solidFill>
               </a:defRPr>
             </a:pPr>
             <a:r>
-              <a:rPr sz="4200" b="1">
+              <a:rPr sz="4050" b="1">
                 <a:solidFill>
                   <a:srgbClr val="F59E0B"/>
                 </a:solidFill>
@@ -7145,37 +7376,37 @@
           <p:cNvPr id="17" name="">
             <a:extLst xmlns:a="http://schemas.openxmlformats.org/drawingml/2006/main">
               <a:ext uri="{FF2B5EF4-FFF2-40B4-BE49-F238E27FC236}">
-                <a16:creationId xmlns:a16="http://schemas.microsoft.com/office/drawing/2014/main" id="{03784E42-4250-4883-B0EE-71AB41A76531}"/>
-              </a:ext>
-            </a:extLst>
-          </p:cNvPr>
-          <p:cNvSpPr>
-            <a:spLocks xmlns:a="http://schemas.openxmlformats.org/drawingml/2006/main" noGrp="1"/>
-          </p:cNvSpPr>
-          <p:nvPr/>
-        </p:nvSpPr>
-        <p:spPr>
-          <a:xfrm xmlns:a="http://schemas.openxmlformats.org/drawingml/2006/main">
-            <a:off x="5410200" y="6534150"/>
-            <a:ext cx="3619500" cy="266700"/>
-          </a:xfrm>
-          <a:prstGeom xmlns:a="http://schemas.openxmlformats.org/drawingml/2006/main" prst="rect">
-            <a:avLst/>
-          </a:prstGeom>
-        </p:spPr>
-        <p:txBody>
-          <a:bodyPr xmlns:a="http://schemas.openxmlformats.org/drawingml/2006/main" lIns="0" tIns="0" rIns="0" bIns="0"/>
-          <a:lstStyle xmlns:a="http://schemas.openxmlformats.org/drawingml/2006/main"/>
-          <a:p xmlns:a="http://schemas.openxmlformats.org/drawingml/2006/main">
-            <a:pPr>
-              <a:defRPr sz="1725" b="1">
+                <a16:creationId xmlns:a16="http://schemas.microsoft.com/office/drawing/2014/main" id="{6BA5543B-5599-48F2-855D-F8E4ACB90224}"/>
+              </a:ext>
+            </a:extLst>
+          </p:cNvPr>
+          <p:cNvSpPr>
+            <a:spLocks xmlns:a="http://schemas.openxmlformats.org/drawingml/2006/main" noGrp="1"/>
+          </p:cNvSpPr>
+          <p:nvPr/>
+        </p:nvSpPr>
+        <p:spPr>
+          <a:xfrm xmlns:a="http://schemas.openxmlformats.org/drawingml/2006/main">
+            <a:off x="5524500" y="6210300"/>
+            <a:ext cx="3733800" cy="266700"/>
+          </a:xfrm>
+          <a:prstGeom xmlns:a="http://schemas.openxmlformats.org/drawingml/2006/main" prst="rect">
+            <a:avLst/>
+          </a:prstGeom>
+        </p:spPr>
+        <p:txBody>
+          <a:bodyPr xmlns:a="http://schemas.openxmlformats.org/drawingml/2006/main" lIns="0" tIns="0" rIns="0" bIns="0"/>
+          <a:lstStyle xmlns:a="http://schemas.openxmlformats.org/drawingml/2006/main"/>
+          <a:p xmlns:a="http://schemas.openxmlformats.org/drawingml/2006/main">
+            <a:pPr>
+              <a:defRPr sz="1650" b="1">
                 <a:solidFill>
                   <a:srgbClr val="1F2937"/>
                 </a:solidFill>
               </a:defRPr>
             </a:pPr>
             <a:r>
-              <a:rPr sz="1725" b="1">
+              <a:rPr sz="1650" b="1">
                 <a:solidFill>
                   <a:srgbClr val="1F2937"/>
                 </a:solidFill>
@@ -7190,30 +7421,42 @@
           <p:cNvPr id="18" name="">
             <a:extLst xmlns:a="http://schemas.openxmlformats.org/drawingml/2006/main">
               <a:ext uri="{FF2B5EF4-FFF2-40B4-BE49-F238E27FC236}">
-                <a16:creationId xmlns:a16="http://schemas.microsoft.com/office/drawing/2014/main" id="{A9AC09CE-F3D2-4FAC-AE61-C8A0385F8B00}"/>
-              </a:ext>
-            </a:extLst>
-          </p:cNvPr>
-          <p:cNvSpPr>
-            <a:spLocks xmlns:a="http://schemas.openxmlformats.org/drawingml/2006/main" noGrp="1"/>
-          </p:cNvSpPr>
-          <p:nvPr/>
-        </p:nvSpPr>
-        <p:spPr>
-          <a:xfrm xmlns:a="http://schemas.openxmlformats.org/drawingml/2006/main">
-            <a:off x="5410200" y="6877050"/>
-            <a:ext cx="3619500" cy="209550"/>
-          </a:xfrm>
-          <a:prstGeom xmlns:a="http://schemas.openxmlformats.org/drawingml/2006/main" prst="rect">
-            <a:avLst/>
-          </a:prstGeom>
-        </p:spPr>
-        <p:txBody>
-          <a:bodyPr xmlns:a="http://schemas.openxmlformats.org/drawingml/2006/main" lIns="0" tIns="0" rIns="0" bIns="0"/>
-          <a:lstStyle xmlns:a="http://schemas.openxmlformats.org/drawingml/2006/main"/>
-          <a:p xmlns:a="http://schemas.openxmlformats.org/drawingml/2006/main">
-            <a:r>
-              <a:t/>
+                <a16:creationId xmlns:a16="http://schemas.microsoft.com/office/drawing/2014/main" id="{CF7CAC15-84BC-4FBB-A262-6B23489B6F8F}"/>
+              </a:ext>
+            </a:extLst>
+          </p:cNvPr>
+          <p:cNvSpPr>
+            <a:spLocks xmlns:a="http://schemas.openxmlformats.org/drawingml/2006/main" noGrp="1"/>
+          </p:cNvSpPr>
+          <p:nvPr/>
+        </p:nvSpPr>
+        <p:spPr>
+          <a:xfrm xmlns:a="http://schemas.openxmlformats.org/drawingml/2006/main">
+            <a:off x="5524500" y="6534150"/>
+            <a:ext cx="3733800" cy="209550"/>
+          </a:xfrm>
+          <a:prstGeom xmlns:a="http://schemas.openxmlformats.org/drawingml/2006/main" prst="rect">
+            <a:avLst/>
+          </a:prstGeom>
+        </p:spPr>
+        <p:txBody>
+          <a:bodyPr xmlns:a="http://schemas.openxmlformats.org/drawingml/2006/main" lIns="0" tIns="0" rIns="0" bIns="0"/>
+          <a:lstStyle xmlns:a="http://schemas.openxmlformats.org/drawingml/2006/main"/>
+          <a:p xmlns:a="http://schemas.openxmlformats.org/drawingml/2006/main">
+            <a:pPr>
+              <a:defRPr sz="1275">
+                <a:solidFill>
+                  <a:srgbClr val="64748B"/>
+                </a:solidFill>
+              </a:defRPr>
+            </a:pPr>
+            <a:r>
+              <a:rPr sz="1275">
+                <a:solidFill>
+                  <a:srgbClr val="64748B"/>
+                </a:solidFill>
+              </a:rPr>
+              <a:t>协作指标</a:t>
             </a:r>
           </a:p>
         </p:txBody>
@@ -7223,19 +7466,19 @@
           <p:cNvPr id="19" name="">
             <a:extLst xmlns:a="http://schemas.openxmlformats.org/drawingml/2006/main">
               <a:ext uri="{FF2B5EF4-FFF2-40B4-BE49-F238E27FC236}">
-                <a16:creationId xmlns:a16="http://schemas.microsoft.com/office/drawing/2014/main" id="{27A8DD69-25DE-4EAD-8D4B-B7CD3D7BEBA4}"/>
-              </a:ext>
-            </a:extLst>
-          </p:cNvPr>
-          <p:cNvSpPr>
-            <a:spLocks xmlns:a="http://schemas.openxmlformats.org/drawingml/2006/main" noGrp="1"/>
-          </p:cNvSpPr>
-          <p:nvPr/>
-        </p:nvSpPr>
-        <p:spPr>
-          <a:xfrm xmlns:a="http://schemas.openxmlformats.org/drawingml/2006/main">
-            <a:off x="819150" y="7505700"/>
-            <a:ext cx="8458200" cy="323850"/>
+                <a16:creationId xmlns:a16="http://schemas.microsoft.com/office/drawing/2014/main" id="{9CCE69F4-E802-4AC9-AC19-D7B78830BF0D}"/>
+              </a:ext>
+            </a:extLst>
+          </p:cNvPr>
+          <p:cNvSpPr>
+            <a:spLocks xmlns:a="http://schemas.openxmlformats.org/drawingml/2006/main" noGrp="1"/>
+          </p:cNvSpPr>
+          <p:nvPr/>
+        </p:nvSpPr>
+        <p:spPr>
+          <a:xfrm xmlns:a="http://schemas.openxmlformats.org/drawingml/2006/main">
+            <a:off x="819150" y="7143750"/>
+            <a:ext cx="8724900" cy="323850"/>
           </a:xfrm>
           <a:prstGeom xmlns:a="http://schemas.openxmlformats.org/drawingml/2006/main" prst="rect">
             <a:avLst/>
@@ -7258,7 +7501,7 @@
                   <a:srgbClr val="17223B"/>
                 </a:solidFill>
               </a:rPr>
-              <a:t>上线后真实指标建议</a:t>
+              <a:t>建议试点节奏</a:t>
             </a:r>
           </a:p>
         </p:txBody>
@@ -7268,19 +7511,19 @@
           <p:cNvPr id="20" name="">
             <a:extLst xmlns:a="http://schemas.openxmlformats.org/drawingml/2006/main">
               <a:ext uri="{FF2B5EF4-FFF2-40B4-BE49-F238E27FC236}">
-                <a16:creationId xmlns:a16="http://schemas.microsoft.com/office/drawing/2014/main" id="{E7CFCC3C-B5B3-431A-8826-215004DF4268}"/>
-              </a:ext>
-            </a:extLst>
-          </p:cNvPr>
-          <p:cNvSpPr>
-            <a:spLocks xmlns:a="http://schemas.openxmlformats.org/drawingml/2006/main" noGrp="1"/>
-          </p:cNvSpPr>
-          <p:nvPr/>
-        </p:nvSpPr>
-        <p:spPr>
-          <a:xfrm xmlns:a="http://schemas.openxmlformats.org/drawingml/2006/main">
-            <a:off x="819150" y="8039100"/>
-            <a:ext cx="6400800" cy="552450"/>
+                <a16:creationId xmlns:a16="http://schemas.microsoft.com/office/drawing/2014/main" id="{E1D42D27-8880-4A98-A1E8-EDFF4CC3E733}"/>
+              </a:ext>
+            </a:extLst>
+          </p:cNvPr>
+          <p:cNvSpPr>
+            <a:spLocks xmlns:a="http://schemas.openxmlformats.org/drawingml/2006/main" noGrp="1"/>
+          </p:cNvSpPr>
+          <p:nvPr/>
+        </p:nvSpPr>
+        <p:spPr>
+          <a:xfrm xmlns:a="http://schemas.openxmlformats.org/drawingml/2006/main">
+            <a:off x="819150" y="7658100"/>
+            <a:ext cx="5943600" cy="552450"/>
           </a:xfrm>
           <a:prstGeom xmlns:a="http://schemas.openxmlformats.org/drawingml/2006/main" prst="rect">
             <a:avLst/>
@@ -7303,31 +7546,31 @@
                   <a:srgbClr val="1F2937"/>
                 </a:solidFill>
               </a:rPr>
-              <a:t>PR 首轮 review 时长、AI 评论采纳率、缺陷前置发现率、测试补充率、回归缺陷逃逸率。</a:t>
+              <a:t>选择 1 个机器人/感知控制仓库，连续 2 周对所有 PR 生成 AI 初筛报告；统计采纳率、误报率、节省时间和缺陷前置率。</a:t>
             </a:r>
           </a:p>
         </p:txBody>
       </p:sp>
       <p:graphicFrame>
         <p:nvGraphicFramePr>
-          <p:cNvPr id="21" name="efficiency-index"/>
+          <p:cNvPr id="21" name="dept-kpi"/>
           <p:cNvGraphicFramePr/>
           <p:nvPr/>
         </p:nvGraphicFramePr>
         <p:xfrm>
-          <a:off xmlns:a="http://schemas.openxmlformats.org/drawingml/2006/main" x="9813608" y="2556510"/>
-          <a:ext xmlns:a="http://schemas.openxmlformats.org/drawingml/2006/main" cx="7655242" cy="7139940"/>
+          <a:off xmlns:a="http://schemas.openxmlformats.org/drawingml/2006/main" x="10037826" y="1939290"/>
+          <a:ext xmlns:a="http://schemas.openxmlformats.org/drawingml/2006/main" cx="7431024" cy="7757160"/>
         </p:xfrm>
         <a:graphic xmlns:a="http://schemas.openxmlformats.org/drawingml/2006/main">
           <a:graphicData uri="http://schemas.openxmlformats.org/drawingml/2006/chart">
-            <c:chart xmlns:r="http://schemas.openxmlformats.org/officeDocument/2006/relationships" xmlns:c="http://schemas.openxmlformats.org/drawingml/2006/chart" r:id="R15423c433ee740d0"/>
+            <c:chart xmlns:r="http://schemas.openxmlformats.org/officeDocument/2006/relationships" xmlns:c="http://schemas.openxmlformats.org/drawingml/2006/chart" r:id="R79a9fd9fe29848b4"/>
           </a:graphicData>
         </a:graphic>
       </p:graphicFrame>
     </p:spTree>
     <p:extLst>
       <p:ext uri="{BB962C8B-B14F-4D97-AF65-F5344CB8AC3E}">
-        <p14:creationId xmlns:p14="http://schemas.microsoft.com/office/powerpoint/2010/main" val="426787941"/>
+        <p14:creationId xmlns:p14="http://schemas.microsoft.com/office/powerpoint/2010/main" val="1580910632"/>
       </p:ext>
     </p:extLst>
   </p:cSld>
